--- a/納品レポート/ホテル別レポート/daiwa_osaki_口コミ分析レポート.pptx
+++ b/納品レポート/ホテル別レポート/daiwa_osaki_口コミ分析レポート.pptx
@@ -208,7 +208,7 @@
                 <c:formatCode>General</c:formatCode>
                 <c:ptCount val="6"/>
                 <c:pt idx="0">
-                  <c:v>9.6</c:v>
+                  <c:v>9.64</c:v>
                 </c:pt>
                 <c:pt idx="1">
                   <c:v>9.25</c:v>
@@ -566,7 +566,7 @@
               <c:numCache>
                 <c:ptCount val="3"/>
                 <c:pt idx="0">
-                  <c:v>42</c:v>
+                  <c:v>43</c:v>
                 </c:pt>
                 <c:pt idx="1">
                   <c:v>8</c:v>
@@ -767,7 +767,7 @@
                 <c:formatCode>General</c:formatCode>
                 <c:ptCount val="5"/>
                 <c:pt idx="0">
-                  <c:v>24</c:v>
+                  <c:v>25</c:v>
                 </c:pt>
                 <c:pt idx="1">
                   <c:v>8</c:v>
@@ -2730,7 +2730,7 @@
                 <a:ea typeface="Arial" pitchFamily="34" charset="-122"/>
                 <a:cs typeface="Arial" pitchFamily="34" charset="-120"/>
               </a:rPr>
-              <a:t>レビュー総数：50件（6サイト）</a:t>
+              <a:t>レビュー総数：51件（6サイト）</a:t>
             </a:r>
             <a:endParaRPr lang="en-US" sz="1000" dirty="0"/>
           </a:p>
@@ -2750,7 +2750,7 @@
                 <a:ea typeface="Arial" pitchFamily="34" charset="-122"/>
                 <a:cs typeface="Arial" pitchFamily="34" charset="-120"/>
               </a:rPr>
-              <a:t>作成日：2026年3月17日</a:t>
+              <a:t>作成日：2026年3月18日</a:t>
             </a:r>
             <a:endParaRPr lang="en-US" sz="1000" dirty="0"/>
           </a:p>
@@ -3296,7 +3296,7 @@
                           <a:ea typeface="Arial" pitchFamily="34" charset="-122"/>
                           <a:cs typeface="Arial" pitchFamily="34" charset="-120"/>
                         </a:rPr>
-                        <a:t>8.88点</a:t>
+                        <a:t>8.90点</a:t>
                       </a:r>
                       <a:endParaRPr lang="en-US" sz="1000" dirty="0">
                         <a:latin typeface="Arial" charset="0"/>
@@ -3570,7 +3570,7 @@
                           <a:ea typeface="Arial" pitchFamily="34" charset="-122"/>
                           <a:cs typeface="Arial" pitchFamily="34" charset="-120"/>
                         </a:rPr>
-                        <a:t>84.0%</a:t>
+                        <a:t>84.3%</a:t>
                       </a:r>
                       <a:endParaRPr lang="en-US" sz="1000" dirty="0">
                         <a:latin typeface="Arial" charset="0"/>
@@ -5305,7 +5305,7 @@
                 <a:ea typeface="Arial" pitchFamily="34" charset="-122"/>
                 <a:cs typeface="Arial" pitchFamily="34" charset="-120"/>
               </a:rPr>
-              <a:t>8.88</a:t>
+              <a:t>8.90</a:t>
             </a:r>
             <a:endParaRPr lang="en-US" sz="3200" dirty="0"/>
           </a:p>
@@ -5430,7 +5430,7 @@
                 <a:ea typeface="Arial" pitchFamily="34" charset="-122"/>
                 <a:cs typeface="Arial" pitchFamily="34" charset="-120"/>
               </a:rPr>
-              <a:t>84.0%</a:t>
+              <a:t>84.3%</a:t>
             </a:r>
             <a:endParaRPr lang="en-US" sz="3200" dirty="0"/>
           </a:p>
@@ -5680,7 +5680,7 @@
                 <a:ea typeface="Arial" pitchFamily="34" charset="-122"/>
                 <a:cs typeface="Arial" pitchFamily="34" charset="-120"/>
               </a:rPr>
-              <a:t>50件</a:t>
+              <a:t>51件</a:t>
             </a:r>
             <a:endParaRPr lang="en-US" sz="3200" dirty="0"/>
           </a:p>
@@ -5828,7 +5828,7 @@
                 <a:ea typeface="Arial" pitchFamily="34" charset="-122"/>
                 <a:cs typeface="Arial" pitchFamily="34" charset="-120"/>
               </a:rPr>
-              <a:t>  立地はとても便利で、窓の一つからは素晴らしい景色が望めます</a:t>
+              <a:t>  値段も手頃だし、立地も便利</a:t>
             </a:r>
             <a:endParaRPr lang="en-US" sz="1100" dirty="0"/>
           </a:p>
@@ -6489,7 +6489,7 @@
                 <a:ea typeface="Arial" pitchFamily="34" charset="-122"/>
                 <a:cs typeface="Arial" pitchFamily="34" charset="-120"/>
               </a:rPr>
-              <a:t>8.88</a:t>
+              <a:t>8.90</a:t>
             </a:r>
             <a:endParaRPr lang="en-US" sz="3200" dirty="0"/>
           </a:p>
@@ -6614,7 +6614,7 @@
                 <a:ea typeface="Arial" pitchFamily="34" charset="-122"/>
                 <a:cs typeface="Arial" pitchFamily="34" charset="-120"/>
               </a:rPr>
-              <a:t>84.0%</a:t>
+              <a:t>84.3%</a:t>
             </a:r>
             <a:endParaRPr lang="en-US" sz="3200" dirty="0"/>
           </a:p>
@@ -6864,7 +6864,7 @@
                 <a:ea typeface="Arial" pitchFamily="34" charset="-122"/>
                 <a:cs typeface="Arial" pitchFamily="34" charset="-120"/>
               </a:rPr>
-              <a:t>50件</a:t>
+              <a:t>51件</a:t>
             </a:r>
             <a:endParaRPr lang="en-US" sz="3200" dirty="0"/>
           </a:p>
@@ -7285,7 +7285,7 @@
                 <a:ea typeface="Arial" pitchFamily="34" charset="-122"/>
                 <a:cs typeface="Arial" pitchFamily="34" charset="-120"/>
               </a:rPr>
-              <a:t>Trip.com(9.60)が最高スコア。</a:t>
+              <a:t>Trip.com(9.64)が最高スコア。</a:t>
             </a:r>
             <a:endParaRPr lang="en-US" sz="1100" dirty="0"/>
           </a:p>
@@ -7843,7 +7843,7 @@
                           <a:ea typeface="Arial" pitchFamily="34" charset="-122"/>
                           <a:cs typeface="Arial" pitchFamily="34" charset="-120"/>
                         </a:rPr>
-                        <a:t>10</a:t>
+                        <a:t>11</a:t>
                       </a:r>
                       <a:endParaRPr lang="en-US" sz="900" dirty="0">
                         <a:latin typeface="Arial" charset="0"/>
@@ -7911,7 +7911,7 @@
                           <a:ea typeface="Arial" pitchFamily="34" charset="-122"/>
                           <a:cs typeface="Arial" pitchFamily="34" charset="-120"/>
                         </a:rPr>
-                        <a:t>9.6</a:t>
+                        <a:t>9.64</a:t>
                       </a:r>
                       <a:endParaRPr lang="en-US" sz="900" dirty="0">
                         <a:latin typeface="Arial" charset="0"/>
@@ -8047,7 +8047,7 @@
                           <a:ea typeface="Arial" pitchFamily="34" charset="-122"/>
                           <a:cs typeface="Arial" pitchFamily="34" charset="-120"/>
                         </a:rPr>
-                        <a:t>9.6</a:t>
+                        <a:t>9.64</a:t>
                       </a:r>
                       <a:endParaRPr lang="en-US" sz="900" dirty="0">
                         <a:latin typeface="Arial" charset="0"/>
@@ -10165,7 +10165,7 @@
                 <a:ea typeface="Arial" pitchFamily="34" charset="-122"/>
                 <a:cs typeface="Arial" pitchFamily="34" charset="-120"/>
               </a:rPr>
-              <a:t>42件（84.0%）</a:t>
+              <a:t>43件（84.3%）</a:t>
             </a:r>
             <a:endParaRPr lang="en-US" sz="1100" dirty="0"/>
           </a:p>
@@ -10263,7 +10263,7 @@
                 <a:ea typeface="Arial" pitchFamily="34" charset="-122"/>
                 <a:cs typeface="Arial" pitchFamily="34" charset="-120"/>
               </a:rPr>
-              <a:t>8件（16.0%）</a:t>
+              <a:t>8件（15.7%）</a:t>
             </a:r>
             <a:endParaRPr lang="en-US" sz="1100" dirty="0"/>
           </a:p>
@@ -10773,7 +10773,7 @@
                 <a:ea typeface="Arial" pitchFamily="34" charset="-122"/>
                 <a:cs typeface="Arial" pitchFamily="34" charset="-120"/>
               </a:rPr>
-              <a:t>立地はとても便利で、窓の一つからは素晴らしい景色が望めます</a:t>
+              <a:t>値段も手頃だし、立地も便利</a:t>
             </a:r>
             <a:endParaRPr lang="en-US" sz="900" dirty="0"/>
           </a:p>
@@ -10812,7 +10812,7 @@
                 <a:ea typeface="Arial" pitchFamily="34" charset="-122"/>
                 <a:cs typeface="Arial" pitchFamily="34" charset="-120"/>
               </a:rPr>
-              <a:t>「ホテルの立地は便利で、近くにレストランやショップがたくさんあり、滞在するには良い場所です」</a:t>
+              <a:t>「立地はとても便利で、窓の一つからは素晴らしい景色が望めます」</a:t>
             </a:r>
             <a:endParaRPr lang="en-US" sz="900" dirty="0"/>
           </a:p>

--- a/納品レポート/ホテル別レポート/daiwa_osaki_口コミ分析レポート.pptx
+++ b/納品レポート/ホテル別レポート/daiwa_osaki_口コミ分析レポート.pptx
@@ -211,10 +211,10 @@
                   <c:v>9.64</c:v>
                 </c:pt>
                 <c:pt idx="1">
-                  <c:v>9.25</c:v>
+                  <c:v>9</c:v>
                 </c:pt>
                 <c:pt idx="2">
-                  <c:v>8.95</c:v>
+                  <c:v>9</c:v>
                 </c:pt>
                 <c:pt idx="3">
                   <c:v>8.67</c:v>
@@ -566,7 +566,7 @@
               <c:numCache>
                 <c:ptCount val="3"/>
                 <c:pt idx="0">
-                  <c:v>43</c:v>
+                  <c:v>45</c:v>
                 </c:pt>
                 <c:pt idx="1">
                   <c:v>8</c:v>
@@ -767,13 +767,13 @@
                 <c:formatCode>General</c:formatCode>
                 <c:ptCount val="5"/>
                 <c:pt idx="0">
-                  <c:v>25</c:v>
+                  <c:v>26</c:v>
                 </c:pt>
                 <c:pt idx="1">
                   <c:v>8</c:v>
                 </c:pt>
                 <c:pt idx="2">
-                  <c:v>10</c:v>
+                  <c:v>11</c:v>
                 </c:pt>
                 <c:pt idx="3">
                   <c:v>4</c:v>
@@ -2730,7 +2730,7 @@
                 <a:ea typeface="Arial" pitchFamily="34" charset="-122"/>
                 <a:cs typeface="Arial" pitchFamily="34" charset="-120"/>
               </a:rPr>
-              <a:t>レビュー総数：51件（6サイト）</a:t>
+              <a:t>レビュー総数：53件（6サイト）</a:t>
             </a:r>
             <a:endParaRPr lang="en-US" sz="1000" dirty="0"/>
           </a:p>
@@ -2750,7 +2750,7 @@
                 <a:ea typeface="Arial" pitchFamily="34" charset="-122"/>
                 <a:cs typeface="Arial" pitchFamily="34" charset="-120"/>
               </a:rPr>
-              <a:t>作成日：2026年3月18日</a:t>
+              <a:t>作成日：2026年3月19日</a:t>
             </a:r>
             <a:endParaRPr lang="en-US" sz="1000" dirty="0"/>
           </a:p>
@@ -3296,7 +3296,7 @@
                           <a:ea typeface="Arial" pitchFamily="34" charset="-122"/>
                           <a:cs typeface="Arial" pitchFamily="34" charset="-120"/>
                         </a:rPr>
-                        <a:t>8.90点</a:t>
+                        <a:t>8.91点</a:t>
                       </a:r>
                       <a:endParaRPr lang="en-US" sz="1000" dirty="0">
                         <a:latin typeface="Arial" charset="0"/>
@@ -3570,7 +3570,7 @@
                           <a:ea typeface="Arial" pitchFamily="34" charset="-122"/>
                           <a:cs typeface="Arial" pitchFamily="34" charset="-120"/>
                         </a:rPr>
-                        <a:t>84.3%</a:t>
+                        <a:t>84.9%</a:t>
                       </a:r>
                       <a:endParaRPr lang="en-US" sz="1000" dirty="0">
                         <a:latin typeface="Arial" charset="0"/>
@@ -3638,7 +3638,7 @@
                           <a:ea typeface="Arial" pitchFamily="34" charset="-122"/>
                           <a:cs typeface="Arial" pitchFamily="34" charset="-120"/>
                         </a:rPr>
-                        <a:t>89%以上</a:t>
+                        <a:t>90%以上</a:t>
                       </a:r>
                       <a:endParaRPr lang="en-US" sz="1000" dirty="0">
                         <a:latin typeface="Arial" charset="0"/>
@@ -5305,7 +5305,7 @@
                 <a:ea typeface="Arial" pitchFamily="34" charset="-122"/>
                 <a:cs typeface="Arial" pitchFamily="34" charset="-120"/>
               </a:rPr>
-              <a:t>8.90</a:t>
+              <a:t>8.91</a:t>
             </a:r>
             <a:endParaRPr lang="en-US" sz="3200" dirty="0"/>
           </a:p>
@@ -5430,7 +5430,7 @@
                 <a:ea typeface="Arial" pitchFamily="34" charset="-122"/>
                 <a:cs typeface="Arial" pitchFamily="34" charset="-120"/>
               </a:rPr>
-              <a:t>84.3%</a:t>
+              <a:t>84.9%</a:t>
             </a:r>
             <a:endParaRPr lang="en-US" sz="3200" dirty="0"/>
           </a:p>
@@ -5680,7 +5680,7 @@
                 <a:ea typeface="Arial" pitchFamily="34" charset="-122"/>
                 <a:cs typeface="Arial" pitchFamily="34" charset="-120"/>
               </a:rPr>
-              <a:t>51件</a:t>
+              <a:t>53件</a:t>
             </a:r>
             <a:endParaRPr lang="en-US" sz="3200" dirty="0"/>
           </a:p>
@@ -5828,7 +5828,7 @@
                 <a:ea typeface="Arial" pitchFamily="34" charset="-122"/>
                 <a:cs typeface="Arial" pitchFamily="34" charset="-120"/>
               </a:rPr>
-              <a:t>  値段も手頃だし、立地も便利</a:t>
+              <a:t>  Location, comfort, amenities None なし</a:t>
             </a:r>
             <a:endParaRPr lang="en-US" sz="1100" dirty="0"/>
           </a:p>
@@ -5868,7 +5868,7 @@
                 <a:ea typeface="Arial" pitchFamily="34" charset="-122"/>
                 <a:cs typeface="Arial" pitchFamily="34" charset="-120"/>
               </a:rPr>
-              <a:t>  清潔でした</a:t>
+              <a:t>  清潔感のある過ごしやすい環境を提供しているホテルでした</a:t>
             </a:r>
             <a:endParaRPr lang="en-US" sz="1100" dirty="0"/>
           </a:p>
@@ -6489,7 +6489,7 @@
                 <a:ea typeface="Arial" pitchFamily="34" charset="-122"/>
                 <a:cs typeface="Arial" pitchFamily="34" charset="-120"/>
               </a:rPr>
-              <a:t>8.90</a:t>
+              <a:t>8.91</a:t>
             </a:r>
             <a:endParaRPr lang="en-US" sz="3200" dirty="0"/>
           </a:p>
@@ -6614,7 +6614,7 @@
                 <a:ea typeface="Arial" pitchFamily="34" charset="-122"/>
                 <a:cs typeface="Arial" pitchFamily="34" charset="-120"/>
               </a:rPr>
-              <a:t>84.3%</a:t>
+              <a:t>84.9%</a:t>
             </a:r>
             <a:endParaRPr lang="en-US" sz="3200" dirty="0"/>
           </a:p>
@@ -6864,7 +6864,7 @@
                 <a:ea typeface="Arial" pitchFamily="34" charset="-122"/>
                 <a:cs typeface="Arial" pitchFamily="34" charset="-120"/>
               </a:rPr>
-              <a:t>51件</a:t>
+              <a:t>53件</a:t>
             </a:r>
             <a:endParaRPr lang="en-US" sz="3200" dirty="0"/>
           </a:p>
@@ -8185,7 +8185,7 @@
                           <a:ea typeface="Arial" pitchFamily="34" charset="-122"/>
                           <a:cs typeface="Arial" pitchFamily="34" charset="-120"/>
                         </a:rPr>
-                        <a:t>4</a:t>
+                        <a:t>5</a:t>
                       </a:r>
                       <a:endParaRPr lang="en-US" sz="900" dirty="0">
                         <a:latin typeface="Arial" charset="0"/>
@@ -8253,7 +8253,7 @@
                           <a:ea typeface="Arial" pitchFamily="34" charset="-122"/>
                           <a:cs typeface="Arial" pitchFamily="34" charset="-120"/>
                         </a:rPr>
-                        <a:t>9.25</a:t>
+                        <a:t>9</a:t>
                       </a:r>
                       <a:endParaRPr lang="en-US" sz="900" dirty="0">
                         <a:latin typeface="Arial" charset="0"/>
@@ -8389,7 +8389,7 @@
                           <a:ea typeface="Arial" pitchFamily="34" charset="-122"/>
                           <a:cs typeface="Arial" pitchFamily="34" charset="-120"/>
                         </a:rPr>
-                        <a:t>9.25</a:t>
+                        <a:t>9</a:t>
                       </a:r>
                       <a:endParaRPr lang="en-US" sz="900" dirty="0">
                         <a:latin typeface="Arial" charset="0"/>
@@ -8527,7 +8527,7 @@
                           <a:ea typeface="Arial" pitchFamily="34" charset="-122"/>
                           <a:cs typeface="Arial" pitchFamily="34" charset="-120"/>
                         </a:rPr>
-                        <a:t>20</a:t>
+                        <a:t>21</a:t>
                       </a:r>
                       <a:endParaRPr lang="en-US" sz="900" dirty="0">
                         <a:latin typeface="Arial" charset="0"/>
@@ -8595,7 +8595,7 @@
                           <a:ea typeface="Arial" pitchFamily="34" charset="-122"/>
                           <a:cs typeface="Arial" pitchFamily="34" charset="-120"/>
                         </a:rPr>
-                        <a:t>8.95</a:t>
+                        <a:t>9</a:t>
                       </a:r>
                       <a:endParaRPr lang="en-US" sz="900" dirty="0">
                         <a:latin typeface="Arial" charset="0"/>
@@ -8731,7 +8731,7 @@
                           <a:ea typeface="Arial" pitchFamily="34" charset="-122"/>
                           <a:cs typeface="Arial" pitchFamily="34" charset="-120"/>
                         </a:rPr>
-                        <a:t>8.95</a:t>
+                        <a:t>9</a:t>
                       </a:r>
                       <a:endParaRPr lang="en-US" sz="900" dirty="0">
                         <a:latin typeface="Arial" charset="0"/>
@@ -10165,7 +10165,7 @@
                 <a:ea typeface="Arial" pitchFamily="34" charset="-122"/>
                 <a:cs typeface="Arial" pitchFamily="34" charset="-120"/>
               </a:rPr>
-              <a:t>43件（84.3%）</a:t>
+              <a:t>45件（84.9%）</a:t>
             </a:r>
             <a:endParaRPr lang="en-US" sz="1100" dirty="0"/>
           </a:p>
@@ -10263,7 +10263,7 @@
                 <a:ea typeface="Arial" pitchFamily="34" charset="-122"/>
                 <a:cs typeface="Arial" pitchFamily="34" charset="-120"/>
               </a:rPr>
-              <a:t>8件（15.7%）</a:t>
+              <a:t>8件（15.1%）</a:t>
             </a:r>
             <a:endParaRPr lang="en-US" sz="1100" dirty="0"/>
           </a:p>
@@ -10773,7 +10773,7 @@
                 <a:ea typeface="Arial" pitchFamily="34" charset="-122"/>
                 <a:cs typeface="Arial" pitchFamily="34" charset="-120"/>
               </a:rPr>
-              <a:t>値段も手頃だし、立地も便利</a:t>
+              <a:t>Location, comfort, amenities None なし</a:t>
             </a:r>
             <a:endParaRPr lang="en-US" sz="900" dirty="0"/>
           </a:p>
@@ -10812,7 +10812,7 @@
                 <a:ea typeface="Arial" pitchFamily="34" charset="-122"/>
                 <a:cs typeface="Arial" pitchFamily="34" charset="-120"/>
               </a:rPr>
-              <a:t>「立地はとても便利で、窓の一つからは素晴らしい景色が望めます」</a:t>
+              <a:t>「大崎駅直ぐという立地やアクセスしやすいのが便利です」</a:t>
             </a:r>
             <a:endParaRPr lang="en-US" sz="900" dirty="0"/>
           </a:p>
@@ -10996,7 +10996,7 @@
                 <a:ea typeface="Arial" pitchFamily="34" charset="-122"/>
                 <a:cs typeface="Arial" pitchFamily="34" charset="-120"/>
               </a:rPr>
-              <a:t>清潔でした</a:t>
+              <a:t>清潔感のある過ごしやすい環境を提供しているホテルでした</a:t>
             </a:r>
             <a:endParaRPr lang="en-US" sz="900" dirty="0"/>
           </a:p>
@@ -11035,7 +11035,7 @@
                 <a:ea typeface="Arial" pitchFamily="34" charset="-122"/>
                 <a:cs typeface="Arial" pitchFamily="34" charset="-120"/>
               </a:rPr>
-              <a:t>「部屋は中くらいの広さで、概ね清潔でしたが、設備は少し古かったです」</a:t>
+              <a:t>「清潔でした」</a:t>
             </a:r>
             <a:endParaRPr lang="en-US" sz="900" dirty="0"/>
           </a:p>
@@ -11364,7 +11364,7 @@
                 <a:ea typeface="Arial" pitchFamily="34" charset="-122"/>
                 <a:cs typeface="Arial" pitchFamily="34" charset="-120"/>
               </a:rPr>
-              <a:t>8件</a:t>
+              <a:t>9件</a:t>
             </a:r>
             <a:endParaRPr lang="en-US" sz="900" dirty="0"/>
           </a:p>
@@ -11442,7 +11442,7 @@
                 <a:ea typeface="Arial" pitchFamily="34" charset="-122"/>
                 <a:cs typeface="Arial" pitchFamily="34" charset="-120"/>
               </a:rPr>
-              <a:t>アメニティや設備も充実しており、コンセント、照明設備、ドライヤー、冷暖房も使いやすくとても快適に過ごせました</a:t>
+              <a:t>Location, comfort, amenities None なし</a:t>
             </a:r>
             <a:endParaRPr lang="en-US" sz="900" dirty="0"/>
           </a:p>
@@ -11481,7 +11481,7 @@
                 <a:ea typeface="Arial" pitchFamily="34" charset="-122"/>
                 <a:cs typeface="Arial" pitchFamily="34" charset="-120"/>
               </a:rPr>
-              <a:t>「房間空間適中，整體算乾淨，但設備稍微有些老舊」</a:t>
+              <a:t>「アメニティや設備も充実しており、コンセント、照明設備、ドライヤー、冷暖房も使いやすくとても快適に過ごせました」</a:t>
             </a:r>
             <a:endParaRPr lang="en-US" sz="900" dirty="0"/>
           </a:p>

--- a/納品レポート/ホテル別レポート/daiwa_osaki_口コミ分析レポート.pptx
+++ b/納品レポート/ホテル別レポート/daiwa_osaki_口コミ分析レポート.pptx
@@ -2750,7 +2750,7 @@
                 <a:ea typeface="Arial" pitchFamily="34" charset="-122"/>
                 <a:cs typeface="Arial" pitchFamily="34" charset="-120"/>
               </a:rPr>
-              <a:t>作成日：2026年3月19日</a:t>
+              <a:t>作成日：2026年3月20日</a:t>
             </a:r>
             <a:endParaRPr lang="en-US" sz="1000" dirty="0"/>
           </a:p>

--- a/納品レポート/ホテル別レポート/daiwa_osaki_口コミ分析レポート.pptx
+++ b/納品レポート/ホテル別レポート/daiwa_osaki_口コミ分析レポート.pptx
@@ -214,7 +214,7 @@
                   <c:v>9</c:v>
                 </c:pt>
                 <c:pt idx="2">
-                  <c:v>9</c:v>
+                  <c:v>8.91</c:v>
                 </c:pt>
                 <c:pt idx="3">
                   <c:v>8.67</c:v>
@@ -569,7 +569,7 @@
                   <c:v>45</c:v>
                 </c:pt>
                 <c:pt idx="1">
-                  <c:v>8</c:v>
+                  <c:v>9</c:v>
                 </c:pt>
                 <c:pt idx="2">
                   <c:v>0</c:v>
@@ -776,7 +776,7 @@
                   <c:v>11</c:v>
                 </c:pt>
                 <c:pt idx="3">
-                  <c:v>4</c:v>
+                  <c:v>5</c:v>
                 </c:pt>
                 <c:pt idx="4">
                   <c:v>4</c:v>
@@ -2730,7 +2730,7 @@
                 <a:ea typeface="Arial" pitchFamily="34" charset="-122"/>
                 <a:cs typeface="Arial" pitchFamily="34" charset="-120"/>
               </a:rPr>
-              <a:t>レビュー総数：53件（6サイト）</a:t>
+              <a:t>レビュー総数：54件（6サイト）</a:t>
             </a:r>
             <a:endParaRPr lang="en-US" sz="1000" dirty="0"/>
           </a:p>
@@ -2750,7 +2750,7 @@
                 <a:ea typeface="Arial" pitchFamily="34" charset="-122"/>
                 <a:cs typeface="Arial" pitchFamily="34" charset="-120"/>
               </a:rPr>
-              <a:t>作成日：2026年3月20日</a:t>
+              <a:t>作成日：2026年3月21日</a:t>
             </a:r>
             <a:endParaRPr lang="en-US" sz="1000" dirty="0"/>
           </a:p>
@@ -3296,7 +3296,7 @@
                           <a:ea typeface="Arial" pitchFamily="34" charset="-122"/>
                           <a:cs typeface="Arial" pitchFamily="34" charset="-120"/>
                         </a:rPr>
-                        <a:t>8.91点</a:t>
+                        <a:t>8.87点</a:t>
                       </a:r>
                       <a:endParaRPr lang="en-US" sz="1000" dirty="0">
                         <a:latin typeface="Arial" charset="0"/>
@@ -3570,7 +3570,7 @@
                           <a:ea typeface="Arial" pitchFamily="34" charset="-122"/>
                           <a:cs typeface="Arial" pitchFamily="34" charset="-120"/>
                         </a:rPr>
-                        <a:t>84.9%</a:t>
+                        <a:t>83.3%</a:t>
                       </a:r>
                       <a:endParaRPr lang="en-US" sz="1000" dirty="0">
                         <a:latin typeface="Arial" charset="0"/>
@@ -3638,7 +3638,7 @@
                           <a:ea typeface="Arial" pitchFamily="34" charset="-122"/>
                           <a:cs typeface="Arial" pitchFamily="34" charset="-120"/>
                         </a:rPr>
-                        <a:t>90%以上</a:t>
+                        <a:t>88%以上</a:t>
                       </a:r>
                       <a:endParaRPr lang="en-US" sz="1000" dirty="0">
                         <a:latin typeface="Arial" charset="0"/>
@@ -5305,7 +5305,7 @@
                 <a:ea typeface="Arial" pitchFamily="34" charset="-122"/>
                 <a:cs typeface="Arial" pitchFamily="34" charset="-120"/>
               </a:rPr>
-              <a:t>8.91</a:t>
+              <a:t>8.87</a:t>
             </a:r>
             <a:endParaRPr lang="en-US" sz="3200" dirty="0"/>
           </a:p>
@@ -5430,7 +5430,7 @@
                 <a:ea typeface="Arial" pitchFamily="34" charset="-122"/>
                 <a:cs typeface="Arial" pitchFamily="34" charset="-120"/>
               </a:rPr>
-              <a:t>84.9%</a:t>
+              <a:t>83.3%</a:t>
             </a:r>
             <a:endParaRPr lang="en-US" sz="3200" dirty="0"/>
           </a:p>
@@ -5680,7 +5680,7 @@
                 <a:ea typeface="Arial" pitchFamily="34" charset="-122"/>
                 <a:cs typeface="Arial" pitchFamily="34" charset="-120"/>
               </a:rPr>
-              <a:t>53件</a:t>
+              <a:t>54件</a:t>
             </a:r>
             <a:endParaRPr lang="en-US" sz="3200" dirty="0"/>
           </a:p>
@@ -6489,7 +6489,7 @@
                 <a:ea typeface="Arial" pitchFamily="34" charset="-122"/>
                 <a:cs typeface="Arial" pitchFamily="34" charset="-120"/>
               </a:rPr>
-              <a:t>8.91</a:t>
+              <a:t>8.87</a:t>
             </a:r>
             <a:endParaRPr lang="en-US" sz="3200" dirty="0"/>
           </a:p>
@@ -6614,7 +6614,7 @@
                 <a:ea typeface="Arial" pitchFamily="34" charset="-122"/>
                 <a:cs typeface="Arial" pitchFamily="34" charset="-120"/>
               </a:rPr>
-              <a:t>84.9%</a:t>
+              <a:t>83.3%</a:t>
             </a:r>
             <a:endParaRPr lang="en-US" sz="3200" dirty="0"/>
           </a:p>
@@ -6864,7 +6864,7 @@
                 <a:ea typeface="Arial" pitchFamily="34" charset="-122"/>
                 <a:cs typeface="Arial" pitchFamily="34" charset="-120"/>
               </a:rPr>
-              <a:t>53件</a:t>
+              <a:t>54件</a:t>
             </a:r>
             <a:endParaRPr lang="en-US" sz="3200" dirty="0"/>
           </a:p>
@@ -8527,7 +8527,7 @@
                           <a:ea typeface="Arial" pitchFamily="34" charset="-122"/>
                           <a:cs typeface="Arial" pitchFamily="34" charset="-120"/>
                         </a:rPr>
-                        <a:t>21</a:t>
+                        <a:t>22</a:t>
                       </a:r>
                       <a:endParaRPr lang="en-US" sz="900" dirty="0">
                         <a:latin typeface="Arial" charset="0"/>
@@ -8595,7 +8595,7 @@
                           <a:ea typeface="Arial" pitchFamily="34" charset="-122"/>
                           <a:cs typeface="Arial" pitchFamily="34" charset="-120"/>
                         </a:rPr>
-                        <a:t>9</a:t>
+                        <a:t>8.91</a:t>
                       </a:r>
                       <a:endParaRPr lang="en-US" sz="900" dirty="0">
                         <a:latin typeface="Arial" charset="0"/>
@@ -8731,7 +8731,7 @@
                           <a:ea typeface="Arial" pitchFamily="34" charset="-122"/>
                           <a:cs typeface="Arial" pitchFamily="34" charset="-120"/>
                         </a:rPr>
-                        <a:t>9</a:t>
+                        <a:t>8.91</a:t>
                       </a:r>
                       <a:endParaRPr lang="en-US" sz="900" dirty="0">
                         <a:latin typeface="Arial" charset="0"/>
@@ -10165,7 +10165,7 @@
                 <a:ea typeface="Arial" pitchFamily="34" charset="-122"/>
                 <a:cs typeface="Arial" pitchFamily="34" charset="-120"/>
               </a:rPr>
-              <a:t>45件（84.9%）</a:t>
+              <a:t>45件（83.3%）</a:t>
             </a:r>
             <a:endParaRPr lang="en-US" sz="1100" dirty="0"/>
           </a:p>
@@ -10263,7 +10263,7 @@
                 <a:ea typeface="Arial" pitchFamily="34" charset="-122"/>
                 <a:cs typeface="Arial" pitchFamily="34" charset="-120"/>
               </a:rPr>
-              <a:t>8件（15.1%）</a:t>
+              <a:t>9件（16.7%）</a:t>
             </a:r>
             <a:endParaRPr lang="en-US" sz="1100" dirty="0"/>
           </a:p>

--- a/納品レポート/ホテル別レポート/daiwa_osaki_口コミ分析レポート.pptx
+++ b/納品レポート/ホテル別レポート/daiwa_osaki_口コミ分析レポート.pptx
@@ -192,10 +192,10 @@
                     <c:v>楽天トラベル</c:v>
                   </c:pt>
                   <c:pt idx="4">
-                    <c:v>じゃらん</c:v>
+                    <c:v>Google</c:v>
                   </c:pt>
                   <c:pt idx="5">
-                    <c:v>Google</c:v>
+                    <c:v>じゃらん</c:v>
                   </c:pt>
                 </c:lvl>
               </c:multiLvlStrCache>
@@ -214,13 +214,13 @@
                   <c:v>9</c:v>
                 </c:pt>
                 <c:pt idx="2">
-                  <c:v>8.91</c:v>
+                  <c:v>8.96</c:v>
                 </c:pt>
                 <c:pt idx="3">
                   <c:v>8.67</c:v>
                 </c:pt>
                 <c:pt idx="4">
-                  <c:v>8.29</c:v>
+                  <c:v>8</c:v>
                 </c:pt>
                 <c:pt idx="5">
                   <c:v>8</c:v>
@@ -566,10 +566,10 @@
               <c:numCache>
                 <c:ptCount val="3"/>
                 <c:pt idx="0">
-                  <c:v>45</c:v>
+                  <c:v>46</c:v>
                 </c:pt>
                 <c:pt idx="1">
-                  <c:v>9</c:v>
+                  <c:v>10</c:v>
                 </c:pt>
                 <c:pt idx="2">
                   <c:v>0</c:v>
@@ -767,7 +767,7 @@
                 <c:formatCode>General</c:formatCode>
                 <c:ptCount val="5"/>
                 <c:pt idx="0">
-                  <c:v>26</c:v>
+                  <c:v>27</c:v>
                 </c:pt>
                 <c:pt idx="1">
                   <c:v>8</c:v>
@@ -779,7 +779,7 @@
                   <c:v>5</c:v>
                 </c:pt>
                 <c:pt idx="4">
-                  <c:v>4</c:v>
+                  <c:v>5</c:v>
                 </c:pt>
               </c:numCache>
             </c:numRef>
@@ -2730,7 +2730,7 @@
                 <a:ea typeface="Arial" pitchFamily="34" charset="-122"/>
                 <a:cs typeface="Arial" pitchFamily="34" charset="-120"/>
               </a:rPr>
-              <a:t>レビュー総数：54件（6サイト）</a:t>
+              <a:t>レビュー総数：56件（6サイト）</a:t>
             </a:r>
             <a:endParaRPr lang="en-US" sz="1000" dirty="0"/>
           </a:p>
@@ -2750,7 +2750,7 @@
                 <a:ea typeface="Arial" pitchFamily="34" charset="-122"/>
                 <a:cs typeface="Arial" pitchFamily="34" charset="-120"/>
               </a:rPr>
-              <a:t>作成日：2026年3月21日</a:t>
+              <a:t>作成日：2026年3月23日</a:t>
             </a:r>
             <a:endParaRPr lang="en-US" sz="1000" dirty="0"/>
           </a:p>
@@ -3296,7 +3296,7 @@
                           <a:ea typeface="Arial" pitchFamily="34" charset="-122"/>
                           <a:cs typeface="Arial" pitchFamily="34" charset="-120"/>
                         </a:rPr>
-                        <a:t>8.87点</a:t>
+                        <a:t>8.84点</a:t>
                       </a:r>
                       <a:endParaRPr lang="en-US" sz="1000" dirty="0">
                         <a:latin typeface="Arial" charset="0"/>
@@ -3364,7 +3364,7 @@
                           <a:ea typeface="Arial" pitchFamily="34" charset="-122"/>
                           <a:cs typeface="Arial" pitchFamily="34" charset="-120"/>
                         </a:rPr>
-                        <a:t>9.2点以上</a:t>
+                        <a:t>9.1点以上</a:t>
                       </a:r>
                       <a:endParaRPr lang="en-US" sz="1000" dirty="0">
                         <a:latin typeface="Arial" charset="0"/>
@@ -3570,7 +3570,7 @@
                           <a:ea typeface="Arial" pitchFamily="34" charset="-122"/>
                           <a:cs typeface="Arial" pitchFamily="34" charset="-120"/>
                         </a:rPr>
-                        <a:t>83.3%</a:t>
+                        <a:t>82.1%</a:t>
                       </a:r>
                       <a:endParaRPr lang="en-US" sz="1000" dirty="0">
                         <a:latin typeface="Arial" charset="0"/>
@@ -3638,7 +3638,7 @@
                           <a:ea typeface="Arial" pitchFamily="34" charset="-122"/>
                           <a:cs typeface="Arial" pitchFamily="34" charset="-120"/>
                         </a:rPr>
-                        <a:t>88%以上</a:t>
+                        <a:t>87%以上</a:t>
                       </a:r>
                       <a:endParaRPr lang="en-US" sz="1000" dirty="0">
                         <a:latin typeface="Arial" charset="0"/>
@@ -4050,7 +4050,7 @@
                           <a:ea typeface="Arial" pitchFamily="34" charset="-122"/>
                           <a:cs typeface="Arial" pitchFamily="34" charset="-120"/>
                         </a:rPr>
-                        <a:t>Google平均評価</a:t>
+                        <a:t>じゃらん平均評価</a:t>
                       </a:r>
                       <a:endParaRPr lang="en-US" sz="1000" dirty="0">
                         <a:latin typeface="Arial" charset="0"/>
@@ -5305,7 +5305,7 @@
                 <a:ea typeface="Arial" pitchFamily="34" charset="-122"/>
                 <a:cs typeface="Arial" pitchFamily="34" charset="-120"/>
               </a:rPr>
-              <a:t>8.87</a:t>
+              <a:t>8.84</a:t>
             </a:r>
             <a:endParaRPr lang="en-US" sz="3200" dirty="0"/>
           </a:p>
@@ -5430,7 +5430,7 @@
                 <a:ea typeface="Arial" pitchFamily="34" charset="-122"/>
                 <a:cs typeface="Arial" pitchFamily="34" charset="-120"/>
               </a:rPr>
-              <a:t>83.3%</a:t>
+              <a:t>82.1%</a:t>
             </a:r>
             <a:endParaRPr lang="en-US" sz="3200" dirty="0"/>
           </a:p>
@@ -5680,7 +5680,7 @@
                 <a:ea typeface="Arial" pitchFamily="34" charset="-122"/>
                 <a:cs typeface="Arial" pitchFamily="34" charset="-120"/>
               </a:rPr>
-              <a:t>54件</a:t>
+              <a:t>56件</a:t>
             </a:r>
             <a:endParaRPr lang="en-US" sz="3200" dirty="0"/>
           </a:p>
@@ -5868,7 +5868,7 @@
                 <a:ea typeface="Arial" pitchFamily="34" charset="-122"/>
                 <a:cs typeface="Arial" pitchFamily="34" charset="-120"/>
               </a:rPr>
-              <a:t>  清潔感のある過ごしやすい環境を提供しているホテルでした</a:t>
+              <a:t>  それ以外は、部屋の広さと清潔さは気に入っています</a:t>
             </a:r>
             <a:endParaRPr lang="en-US" sz="1100" dirty="0"/>
           </a:p>
@@ -5908,7 +5908,7 @@
                 <a:ea typeface="Arial" pitchFamily="34" charset="-122"/>
                 <a:cs typeface="Arial" pitchFamily="34" charset="-120"/>
               </a:rPr>
-              <a:t>  スタッフ皆さんに優しくしていただき感謝しています</a:t>
+              <a:t>  結局、貴重品は毎日フロントに預けなければなりませんでした</a:t>
             </a:r>
             <a:endParaRPr lang="en-US" sz="1100" dirty="0"/>
           </a:p>
@@ -6489,7 +6489,7 @@
                 <a:ea typeface="Arial" pitchFamily="34" charset="-122"/>
                 <a:cs typeface="Arial" pitchFamily="34" charset="-120"/>
               </a:rPr>
-              <a:t>8.87</a:t>
+              <a:t>8.84</a:t>
             </a:r>
             <a:endParaRPr lang="en-US" sz="3200" dirty="0"/>
           </a:p>
@@ -6614,7 +6614,7 @@
                 <a:ea typeface="Arial" pitchFamily="34" charset="-122"/>
                 <a:cs typeface="Arial" pitchFamily="34" charset="-120"/>
               </a:rPr>
-              <a:t>83.3%</a:t>
+              <a:t>82.1%</a:t>
             </a:r>
             <a:endParaRPr lang="en-US" sz="3200" dirty="0"/>
           </a:p>
@@ -6864,7 +6864,7 @@
                 <a:ea typeface="Arial" pitchFamily="34" charset="-122"/>
                 <a:cs typeface="Arial" pitchFamily="34" charset="-120"/>
               </a:rPr>
-              <a:t>54件</a:t>
+              <a:t>56件</a:t>
             </a:r>
             <a:endParaRPr lang="en-US" sz="3200" dirty="0"/>
           </a:p>
@@ -7334,7 +7334,7 @@
                 <a:ea typeface="Arial" pitchFamily="34" charset="-122"/>
                 <a:cs typeface="Arial" pitchFamily="34" charset="-120"/>
               </a:rPr>
-              <a:t>Google(8.0)が相対的に低い。口コミ返信の強化が急務</a:t>
+              <a:t>じゃらん(8.0)が相対的に低い。口コミ返信の強化が急務</a:t>
             </a:r>
             <a:endParaRPr lang="en-US" sz="1100" dirty="0"/>
           </a:p>
@@ -8527,7 +8527,7 @@
                           <a:ea typeface="Arial" pitchFamily="34" charset="-122"/>
                           <a:cs typeface="Arial" pitchFamily="34" charset="-120"/>
                         </a:rPr>
-                        <a:t>22</a:t>
+                        <a:t>23</a:t>
                       </a:r>
                       <a:endParaRPr lang="en-US" sz="900" dirty="0">
                         <a:latin typeface="Arial" charset="0"/>
@@ -8595,7 +8595,7 @@
                           <a:ea typeface="Arial" pitchFamily="34" charset="-122"/>
                           <a:cs typeface="Arial" pitchFamily="34" charset="-120"/>
                         </a:rPr>
-                        <a:t>8.91</a:t>
+                        <a:t>8.96</a:t>
                       </a:r>
                       <a:endParaRPr lang="en-US" sz="900" dirty="0">
                         <a:latin typeface="Arial" charset="0"/>
@@ -8731,7 +8731,7 @@
                           <a:ea typeface="Arial" pitchFamily="34" charset="-122"/>
                           <a:cs typeface="Arial" pitchFamily="34" charset="-120"/>
                         </a:rPr>
-                        <a:t>8.91</a:t>
+                        <a:t>8.96</a:t>
                       </a:r>
                       <a:endParaRPr lang="en-US" sz="900" dirty="0">
                         <a:latin typeface="Arial" charset="0"/>
@@ -9143,7 +9143,7 @@
                           <a:ea typeface="Arial" pitchFamily="34" charset="-122"/>
                           <a:cs typeface="Arial" pitchFamily="34" charset="-120"/>
                         </a:rPr>
-                        <a:t>じゃらん</a:t>
+                        <a:t>Google</a:t>
                       </a:r>
                       <a:endParaRPr lang="en-US" sz="900" dirty="0">
                         <a:latin typeface="Arial" charset="0"/>
@@ -9211,7 +9211,7 @@
                           <a:ea typeface="Arial" pitchFamily="34" charset="-122"/>
                           <a:cs typeface="Arial" pitchFamily="34" charset="-120"/>
                         </a:rPr>
-                        <a:t>7</a:t>
+                        <a:t>6</a:t>
                       </a:r>
                       <a:endParaRPr lang="en-US" sz="900" dirty="0">
                         <a:latin typeface="Arial" charset="0"/>
@@ -9279,7 +9279,7 @@
                           <a:ea typeface="Arial" pitchFamily="34" charset="-122"/>
                           <a:cs typeface="Arial" pitchFamily="34" charset="-120"/>
                         </a:rPr>
-                        <a:t>4.14</a:t>
+                        <a:t>4</a:t>
                       </a:r>
                       <a:endParaRPr lang="en-US" sz="900" dirty="0">
                         <a:latin typeface="Arial" charset="0"/>
@@ -9415,7 +9415,7 @@
                           <a:ea typeface="Arial" pitchFamily="34" charset="-122"/>
                           <a:cs typeface="Arial" pitchFamily="34" charset="-120"/>
                         </a:rPr>
-                        <a:t>8.29</a:t>
+                        <a:t>8</a:t>
                       </a:r>
                       <a:endParaRPr lang="en-US" sz="900" dirty="0">
                         <a:latin typeface="Arial" charset="0"/>
@@ -9485,7 +9485,7 @@
                           <a:ea typeface="Arial" pitchFamily="34" charset="-122"/>
                           <a:cs typeface="Arial" pitchFamily="34" charset="-120"/>
                         </a:rPr>
-                        <a:t>Google</a:t>
+                        <a:t>じゃらん</a:t>
                       </a:r>
                       <a:endParaRPr lang="en-US" sz="900" dirty="0">
                         <a:latin typeface="Arial" charset="0"/>
@@ -9553,7 +9553,7 @@
                           <a:ea typeface="Arial" pitchFamily="34" charset="-122"/>
                           <a:cs typeface="Arial" pitchFamily="34" charset="-120"/>
                         </a:rPr>
-                        <a:t>6</a:t>
+                        <a:t>8</a:t>
                       </a:r>
                       <a:endParaRPr lang="en-US" sz="900" dirty="0">
                         <a:latin typeface="Arial" charset="0"/>
@@ -10165,7 +10165,7 @@
                 <a:ea typeface="Arial" pitchFamily="34" charset="-122"/>
                 <a:cs typeface="Arial" pitchFamily="34" charset="-120"/>
               </a:rPr>
-              <a:t>45件（83.3%）</a:t>
+              <a:t>46件（82.1%）</a:t>
             </a:r>
             <a:endParaRPr lang="en-US" sz="1100" dirty="0"/>
           </a:p>
@@ -10263,7 +10263,7 @@
                 <a:ea typeface="Arial" pitchFamily="34" charset="-122"/>
                 <a:cs typeface="Arial" pitchFamily="34" charset="-120"/>
               </a:rPr>
-              <a:t>9件（16.7%）</a:t>
+              <a:t>10件（17.9%）</a:t>
             </a:r>
             <a:endParaRPr lang="en-US" sz="1100" dirty="0"/>
           </a:p>
@@ -10996,7 +10996,7 @@
                 <a:ea typeface="Arial" pitchFamily="34" charset="-122"/>
                 <a:cs typeface="Arial" pitchFamily="34" charset="-120"/>
               </a:rPr>
-              <a:t>清潔感のある過ごしやすい環境を提供しているホテルでした</a:t>
+              <a:t>それ以外は、部屋の広さと清潔さは気に入っています</a:t>
             </a:r>
             <a:endParaRPr lang="en-US" sz="900" dirty="0"/>
           </a:p>
@@ -11035,7 +11035,7 @@
                 <a:ea typeface="Arial" pitchFamily="34" charset="-122"/>
                 <a:cs typeface="Arial" pitchFamily="34" charset="-120"/>
               </a:rPr>
-              <a:t>「清潔でした」</a:t>
+              <a:t>「清潔感のある過ごしやすい環境を提供しているホテルでした」</a:t>
             </a:r>
             <a:endParaRPr lang="en-US" sz="900" dirty="0"/>
           </a:p>
@@ -11219,7 +11219,7 @@
                 <a:ea typeface="Arial" pitchFamily="34" charset="-122"/>
                 <a:cs typeface="Arial" pitchFamily="34" charset="-120"/>
               </a:rPr>
-              <a:t>スタッフ皆さんに優しくしていただき感謝しています</a:t>
+              <a:t>結局、貴重品は毎日フロントに預けなければなりませんでした</a:t>
             </a:r>
             <a:endParaRPr lang="en-US" sz="900" dirty="0"/>
           </a:p>
@@ -11258,7 +11258,7 @@
                 <a:ea typeface="Arial" pitchFamily="34" charset="-122"/>
                 <a:cs typeface="Arial" pitchFamily="34" charset="-120"/>
               </a:rPr>
-              <a:t>「スタッフの態度は平均的で、チェックインとチェックアウトはスムーズでした」</a:t>
+              <a:t>「スタッフ皆さんに優しくしていただき感謝しています」</a:t>
             </a:r>
             <a:endParaRPr lang="en-US" sz="900" dirty="0"/>
           </a:p>
@@ -11364,7 +11364,7 @@
                 <a:ea typeface="Arial" pitchFamily="34" charset="-122"/>
                 <a:cs typeface="Arial" pitchFamily="34" charset="-120"/>
               </a:rPr>
-              <a:t>9件</a:t>
+              <a:t>10件+</a:t>
             </a:r>
             <a:endParaRPr lang="en-US" sz="900" dirty="0"/>
           </a:p>
@@ -11442,7 +11442,7 @@
                 <a:ea typeface="Arial" pitchFamily="34" charset="-122"/>
                 <a:cs typeface="Arial" pitchFamily="34" charset="-120"/>
               </a:rPr>
-              <a:t>Location, comfort, amenities None なし</a:t>
+              <a:t>コットンボールなどの基本的なアメニティが用意されていないのは驚きです</a:t>
             </a:r>
             <a:endParaRPr lang="en-US" sz="900" dirty="0"/>
           </a:p>
@@ -11481,7 +11481,7 @@
                 <a:ea typeface="Arial" pitchFamily="34" charset="-122"/>
                 <a:cs typeface="Arial" pitchFamily="34" charset="-120"/>
               </a:rPr>
-              <a:t>「アメニティや設備も充実しており、コンセント、照明設備、ドライヤー、冷暖房も使いやすくとても快適に過ごせました」</a:t>
+              <a:t>「Location, comfort, amenities None なし」</a:t>
             </a:r>
             <a:endParaRPr lang="en-US" sz="900" dirty="0"/>
           </a:p>

--- a/納品レポート/ホテル別レポート/daiwa_osaki_口コミ分析レポート.pptx
+++ b/納品レポート/ホテル別レポート/daiwa_osaki_口コミ分析レポート.pptx
@@ -214,7 +214,7 @@
                   <c:v>9</c:v>
                 </c:pt>
                 <c:pt idx="2">
-                  <c:v>8.96</c:v>
+                  <c:v>9</c:v>
                 </c:pt>
                 <c:pt idx="3">
                   <c:v>8.67</c:v>
@@ -566,7 +566,7 @@
               <c:numCache>
                 <c:ptCount val="3"/>
                 <c:pt idx="0">
-                  <c:v>46</c:v>
+                  <c:v>47</c:v>
                 </c:pt>
                 <c:pt idx="1">
                   <c:v>10</c:v>
@@ -767,7 +767,7 @@
                 <c:formatCode>General</c:formatCode>
                 <c:ptCount val="5"/>
                 <c:pt idx="0">
-                  <c:v>27</c:v>
+                  <c:v>28</c:v>
                 </c:pt>
                 <c:pt idx="1">
                   <c:v>8</c:v>
@@ -2730,7 +2730,7 @@
                 <a:ea typeface="Arial" pitchFamily="34" charset="-122"/>
                 <a:cs typeface="Arial" pitchFamily="34" charset="-120"/>
               </a:rPr>
-              <a:t>レビュー総数：56件（6サイト）</a:t>
+              <a:t>レビュー総数：57件（6サイト）</a:t>
             </a:r>
             <a:endParaRPr lang="en-US" sz="1000" dirty="0"/>
           </a:p>
@@ -2750,7 +2750,7 @@
                 <a:ea typeface="Arial" pitchFamily="34" charset="-122"/>
                 <a:cs typeface="Arial" pitchFamily="34" charset="-120"/>
               </a:rPr>
-              <a:t>作成日：2026年3月23日</a:t>
+              <a:t>作成日：2026年3月24日</a:t>
             </a:r>
             <a:endParaRPr lang="en-US" sz="1000" dirty="0"/>
           </a:p>
@@ -3296,7 +3296,7 @@
                           <a:ea typeface="Arial" pitchFamily="34" charset="-122"/>
                           <a:cs typeface="Arial" pitchFamily="34" charset="-120"/>
                         </a:rPr>
-                        <a:t>8.84点</a:t>
+                        <a:t>8.86点</a:t>
                       </a:r>
                       <a:endParaRPr lang="en-US" sz="1000" dirty="0">
                         <a:latin typeface="Arial" charset="0"/>
@@ -3364,7 +3364,7 @@
                           <a:ea typeface="Arial" pitchFamily="34" charset="-122"/>
                           <a:cs typeface="Arial" pitchFamily="34" charset="-120"/>
                         </a:rPr>
-                        <a:t>9.1点以上</a:t>
+                        <a:t>9.2点以上</a:t>
                       </a:r>
                       <a:endParaRPr lang="en-US" sz="1000" dirty="0">
                         <a:latin typeface="Arial" charset="0"/>
@@ -3570,7 +3570,7 @@
                           <a:ea typeface="Arial" pitchFamily="34" charset="-122"/>
                           <a:cs typeface="Arial" pitchFamily="34" charset="-120"/>
                         </a:rPr>
-                        <a:t>82.1%</a:t>
+                        <a:t>82.5%</a:t>
                       </a:r>
                       <a:endParaRPr lang="en-US" sz="1000" dirty="0">
                         <a:latin typeface="Arial" charset="0"/>
@@ -3638,7 +3638,7 @@
                           <a:ea typeface="Arial" pitchFamily="34" charset="-122"/>
                           <a:cs typeface="Arial" pitchFamily="34" charset="-120"/>
                         </a:rPr>
-                        <a:t>87%以上</a:t>
+                        <a:t>88%以上</a:t>
                       </a:r>
                       <a:endParaRPr lang="en-US" sz="1000" dirty="0">
                         <a:latin typeface="Arial" charset="0"/>
@@ -5305,7 +5305,7 @@
                 <a:ea typeface="Arial" pitchFamily="34" charset="-122"/>
                 <a:cs typeface="Arial" pitchFamily="34" charset="-120"/>
               </a:rPr>
-              <a:t>8.84</a:t>
+              <a:t>8.86</a:t>
             </a:r>
             <a:endParaRPr lang="en-US" sz="3200" dirty="0"/>
           </a:p>
@@ -5430,7 +5430,7 @@
                 <a:ea typeface="Arial" pitchFamily="34" charset="-122"/>
                 <a:cs typeface="Arial" pitchFamily="34" charset="-120"/>
               </a:rPr>
-              <a:t>82.1%</a:t>
+              <a:t>82.5%</a:t>
             </a:r>
             <a:endParaRPr lang="en-US" sz="3200" dirty="0"/>
           </a:p>
@@ -5680,7 +5680,7 @@
                 <a:ea typeface="Arial" pitchFamily="34" charset="-122"/>
                 <a:cs typeface="Arial" pitchFamily="34" charset="-120"/>
               </a:rPr>
-              <a:t>56件</a:t>
+              <a:t>57件</a:t>
             </a:r>
             <a:endParaRPr lang="en-US" sz="3200" dirty="0"/>
           </a:p>
@@ -5828,7 +5828,7 @@
                 <a:ea typeface="Arial" pitchFamily="34" charset="-122"/>
                 <a:cs typeface="Arial" pitchFamily="34" charset="-120"/>
               </a:rPr>
-              <a:t>  Location, comfort, amenities None なし</a:t>
+              <a:t>  駅が近くて駐車場も隣にあり良かった ございません ございません</a:t>
             </a:r>
             <a:endParaRPr lang="en-US" sz="1100" dirty="0"/>
           </a:p>
@@ -6489,7 +6489,7 @@
                 <a:ea typeface="Arial" pitchFamily="34" charset="-122"/>
                 <a:cs typeface="Arial" pitchFamily="34" charset="-120"/>
               </a:rPr>
-              <a:t>8.84</a:t>
+              <a:t>8.86</a:t>
             </a:r>
             <a:endParaRPr lang="en-US" sz="3200" dirty="0"/>
           </a:p>
@@ -6614,7 +6614,7 @@
                 <a:ea typeface="Arial" pitchFamily="34" charset="-122"/>
                 <a:cs typeface="Arial" pitchFamily="34" charset="-120"/>
               </a:rPr>
-              <a:t>82.1%</a:t>
+              <a:t>82.5%</a:t>
             </a:r>
             <a:endParaRPr lang="en-US" sz="3200" dirty="0"/>
           </a:p>
@@ -6864,7 +6864,7 @@
                 <a:ea typeface="Arial" pitchFamily="34" charset="-122"/>
                 <a:cs typeface="Arial" pitchFamily="34" charset="-120"/>
               </a:rPr>
-              <a:t>56件</a:t>
+              <a:t>57件</a:t>
             </a:r>
             <a:endParaRPr lang="en-US" sz="3200" dirty="0"/>
           </a:p>
@@ -8527,7 +8527,7 @@
                           <a:ea typeface="Arial" pitchFamily="34" charset="-122"/>
                           <a:cs typeface="Arial" pitchFamily="34" charset="-120"/>
                         </a:rPr>
-                        <a:t>23</a:t>
+                        <a:t>24</a:t>
                       </a:r>
                       <a:endParaRPr lang="en-US" sz="900" dirty="0">
                         <a:latin typeface="Arial" charset="0"/>
@@ -8595,7 +8595,7 @@
                           <a:ea typeface="Arial" pitchFamily="34" charset="-122"/>
                           <a:cs typeface="Arial" pitchFamily="34" charset="-120"/>
                         </a:rPr>
-                        <a:t>8.96</a:t>
+                        <a:t>9</a:t>
                       </a:r>
                       <a:endParaRPr lang="en-US" sz="900" dirty="0">
                         <a:latin typeface="Arial" charset="0"/>
@@ -8731,7 +8731,7 @@
                           <a:ea typeface="Arial" pitchFamily="34" charset="-122"/>
                           <a:cs typeface="Arial" pitchFamily="34" charset="-120"/>
                         </a:rPr>
-                        <a:t>8.96</a:t>
+                        <a:t>9</a:t>
                       </a:r>
                       <a:endParaRPr lang="en-US" sz="900" dirty="0">
                         <a:latin typeface="Arial" charset="0"/>
@@ -10165,7 +10165,7 @@
                 <a:ea typeface="Arial" pitchFamily="34" charset="-122"/>
                 <a:cs typeface="Arial" pitchFamily="34" charset="-120"/>
               </a:rPr>
-              <a:t>46件（82.1%）</a:t>
+              <a:t>47件（82.5%）</a:t>
             </a:r>
             <a:endParaRPr lang="en-US" sz="1100" dirty="0"/>
           </a:p>
@@ -10263,7 +10263,7 @@
                 <a:ea typeface="Arial" pitchFamily="34" charset="-122"/>
                 <a:cs typeface="Arial" pitchFamily="34" charset="-120"/>
               </a:rPr>
-              <a:t>10件（17.9%）</a:t>
+              <a:t>10件（17.5%）</a:t>
             </a:r>
             <a:endParaRPr lang="en-US" sz="1100" dirty="0"/>
           </a:p>
@@ -10773,7 +10773,7 @@
                 <a:ea typeface="Arial" pitchFamily="34" charset="-122"/>
                 <a:cs typeface="Arial" pitchFamily="34" charset="-120"/>
               </a:rPr>
-              <a:t>Location, comfort, amenities None なし</a:t>
+              <a:t>駅が近くて駐車場も隣にあり良かった ございません ございません</a:t>
             </a:r>
             <a:endParaRPr lang="en-US" sz="900" dirty="0"/>
           </a:p>
@@ -10812,7 +10812,7 @@
                 <a:ea typeface="Arial" pitchFamily="34" charset="-122"/>
                 <a:cs typeface="Arial" pitchFamily="34" charset="-120"/>
               </a:rPr>
-              <a:t>「大崎駅直ぐという立地やアクセスしやすいのが便利です」</a:t>
+              <a:t>「Location, comfort, amenities None なし」</a:t>
             </a:r>
             <a:endParaRPr lang="en-US" sz="900" dirty="0"/>
           </a:p>

--- a/納品レポート/ホテル別レポート/daiwa_osaki_口コミ分析レポート.pptx
+++ b/納品レポート/ホテル別レポート/daiwa_osaki_口コミ分析レポート.pptx
@@ -214,7 +214,7 @@
                   <c:v>9</c:v>
                 </c:pt>
                 <c:pt idx="2">
-                  <c:v>9</c:v>
+                  <c:v>8.92</c:v>
                 </c:pt>
                 <c:pt idx="3">
                   <c:v>8.67</c:v>
@@ -569,7 +569,7 @@
                   <c:v>47</c:v>
                 </c:pt>
                 <c:pt idx="1">
-                  <c:v>10</c:v>
+                  <c:v>11</c:v>
                 </c:pt>
                 <c:pt idx="2">
                   <c:v>0</c:v>
@@ -776,7 +776,7 @@
                   <c:v>11</c:v>
                 </c:pt>
                 <c:pt idx="3">
-                  <c:v>5</c:v>
+                  <c:v>6</c:v>
                 </c:pt>
                 <c:pt idx="4">
                   <c:v>5</c:v>
@@ -2730,7 +2730,7 @@
                 <a:ea typeface="Arial" pitchFamily="34" charset="-122"/>
                 <a:cs typeface="Arial" pitchFamily="34" charset="-120"/>
               </a:rPr>
-              <a:t>レビュー総数：57件（6サイト）</a:t>
+              <a:t>レビュー総数：58件（6サイト）</a:t>
             </a:r>
             <a:endParaRPr lang="en-US" sz="1000" dirty="0"/>
           </a:p>
@@ -2750,7 +2750,7 @@
                 <a:ea typeface="Arial" pitchFamily="34" charset="-122"/>
                 <a:cs typeface="Arial" pitchFamily="34" charset="-120"/>
               </a:rPr>
-              <a:t>作成日：2026年3月24日</a:t>
+              <a:t>作成日：2026年3月25日</a:t>
             </a:r>
             <a:endParaRPr lang="en-US" sz="1000" dirty="0"/>
           </a:p>
@@ -3296,7 +3296,7 @@
                           <a:ea typeface="Arial" pitchFamily="34" charset="-122"/>
                           <a:cs typeface="Arial" pitchFamily="34" charset="-120"/>
                         </a:rPr>
-                        <a:t>8.86点</a:t>
+                        <a:t>8.83点</a:t>
                       </a:r>
                       <a:endParaRPr lang="en-US" sz="1000" dirty="0">
                         <a:latin typeface="Arial" charset="0"/>
@@ -3364,7 +3364,7 @@
                           <a:ea typeface="Arial" pitchFamily="34" charset="-122"/>
                           <a:cs typeface="Arial" pitchFamily="34" charset="-120"/>
                         </a:rPr>
-                        <a:t>9.2点以上</a:t>
+                        <a:t>9.1点以上</a:t>
                       </a:r>
                       <a:endParaRPr lang="en-US" sz="1000" dirty="0">
                         <a:latin typeface="Arial" charset="0"/>
@@ -3570,7 +3570,7 @@
                           <a:ea typeface="Arial" pitchFamily="34" charset="-122"/>
                           <a:cs typeface="Arial" pitchFamily="34" charset="-120"/>
                         </a:rPr>
-                        <a:t>82.5%</a:t>
+                        <a:t>81.0%</a:t>
                       </a:r>
                       <a:endParaRPr lang="en-US" sz="1000" dirty="0">
                         <a:latin typeface="Arial" charset="0"/>
@@ -3638,7 +3638,7 @@
                           <a:ea typeface="Arial" pitchFamily="34" charset="-122"/>
                           <a:cs typeface="Arial" pitchFamily="34" charset="-120"/>
                         </a:rPr>
-                        <a:t>88%以上</a:t>
+                        <a:t>86%以上</a:t>
                       </a:r>
                       <a:endParaRPr lang="en-US" sz="1000" dirty="0">
                         <a:latin typeface="Arial" charset="0"/>
@@ -4598,7 +4598,7 @@
                           <a:ea typeface="Arial" pitchFamily="34" charset="-122"/>
                           <a:cs typeface="Arial" pitchFamily="34" charset="-120"/>
                         </a:rPr>
-                        <a:t>浴室・水回りクレーム</a:t>
+                        <a:t>エアコン・空調クレーム</a:t>
                       </a:r>
                       <a:endParaRPr lang="en-US" sz="1000" dirty="0">
                         <a:latin typeface="Arial" charset="0"/>
@@ -4666,7 +4666,7 @@
                           <a:ea typeface="Arial" pitchFamily="34" charset="-122"/>
                           <a:cs typeface="Arial" pitchFamily="34" charset="-120"/>
                         </a:rPr>
-                        <a:t>約3件/期間</a:t>
+                        <a:t>約4件/期間</a:t>
                       </a:r>
                       <a:endParaRPr lang="en-US" sz="1000" dirty="0">
                         <a:latin typeface="Arial" charset="0"/>
@@ -4734,7 +4734,7 @@
                           <a:ea typeface="Arial" pitchFamily="34" charset="-122"/>
                           <a:cs typeface="Arial" pitchFamily="34" charset="-120"/>
                         </a:rPr>
-                        <a:t>1件以下</a:t>
+                        <a:t>2件以下</a:t>
                       </a:r>
                       <a:endParaRPr lang="en-US" sz="1000" dirty="0">
                         <a:latin typeface="Arial" charset="0"/>
@@ -5305,7 +5305,7 @@
                 <a:ea typeface="Arial" pitchFamily="34" charset="-122"/>
                 <a:cs typeface="Arial" pitchFamily="34" charset="-120"/>
               </a:rPr>
-              <a:t>8.86</a:t>
+              <a:t>8.83</a:t>
             </a:r>
             <a:endParaRPr lang="en-US" sz="3200" dirty="0"/>
           </a:p>
@@ -5430,7 +5430,7 @@
                 <a:ea typeface="Arial" pitchFamily="34" charset="-122"/>
                 <a:cs typeface="Arial" pitchFamily="34" charset="-120"/>
               </a:rPr>
-              <a:t>82.5%</a:t>
+              <a:t>81.0%</a:t>
             </a:r>
             <a:endParaRPr lang="en-US" sz="3200" dirty="0"/>
           </a:p>
@@ -5680,7 +5680,7 @@
                 <a:ea typeface="Arial" pitchFamily="34" charset="-122"/>
                 <a:cs typeface="Arial" pitchFamily="34" charset="-120"/>
               </a:rPr>
-              <a:t>57件</a:t>
+              <a:t>58件</a:t>
             </a:r>
             <a:endParaRPr lang="en-US" sz="3200" dirty="0"/>
           </a:p>
@@ -5828,7 +5828,7 @@
                 <a:ea typeface="Arial" pitchFamily="34" charset="-122"/>
                 <a:cs typeface="Arial" pitchFamily="34" charset="-120"/>
               </a:rPr>
-              <a:t>  駅が近くて駐車場も隣にあり良かった ございません ございません</a:t>
+              <a:t>  Good location with the train station is just 3 minutes of...</a:t>
             </a:r>
             <a:endParaRPr lang="en-US" sz="1100" dirty="0"/>
           </a:p>
@@ -6036,6 +6036,46 @@
                 <a:ea typeface="Arial" pitchFamily="34" charset="-122"/>
                 <a:cs typeface="Arial" pitchFamily="34" charset="-120"/>
               </a:rPr>
+              <a:t>エアコン・空調 </a:t>
+            </a:r>
+            <a:endParaRPr lang="en-US" sz="1100" dirty="0"/>
+          </a:p>
+          <a:p>
+            <a:pPr indent="0" marL="0">
+              <a:spcAft>
+                <a:spcPts val="200"/>
+              </a:spcAft>
+              <a:buNone/>
+            </a:pPr>
+            <a:r>
+              <a:rPr lang="en-US" sz="900" dirty="0">
+                <a:solidFill>
+                  <a:srgbClr val="64748B"/>
+                </a:solidFill>
+                <a:latin typeface="Arial" pitchFamily="34" charset="0"/>
+                <a:ea typeface="Arial" pitchFamily="34" charset="-122"/>
+                <a:cs typeface="Arial" pitchFamily="34" charset="-120"/>
+              </a:rPr>
+              <a:t>  As a result, I experienced significant back soreness thro...</a:t>
+            </a:r>
+            <a:endParaRPr lang="en-US" sz="1100" dirty="0"/>
+          </a:p>
+          <a:p>
+            <a:pPr indent="0" marL="0">
+              <a:spcAft>
+                <a:spcPts val="200"/>
+              </a:spcAft>
+              <a:buNone/>
+            </a:pPr>
+            <a:r>
+              <a:rPr lang="en-US" sz="1100" b="1" dirty="0">
+                <a:solidFill>
+                  <a:srgbClr val="334155"/>
+                </a:solidFill>
+                <a:latin typeface="Arial" pitchFamily="34" charset="0"/>
+                <a:ea typeface="Arial" pitchFamily="34" charset="-122"/>
+                <a:cs typeface="Arial" pitchFamily="34" charset="-120"/>
+              </a:rPr>
               <a:t>浴室・水回り </a:t>
             </a:r>
             <a:endParaRPr lang="en-US" sz="1100" dirty="0"/>
@@ -6057,46 +6097,6 @@
                 <a:cs typeface="Arial" pitchFamily="34" charset="-120"/>
               </a:rPr>
               <a:t>  広いお部屋にしていただいたおかげで、トイレとお風呂も十分な広さがあり、子供と二人で着替えやトイレ利用をしても全く窮...</a:t>
-            </a:r>
-            <a:endParaRPr lang="en-US" sz="1100" dirty="0"/>
-          </a:p>
-          <a:p>
-            <a:pPr indent="0" marL="0">
-              <a:spcAft>
-                <a:spcPts val="200"/>
-              </a:spcAft>
-              <a:buNone/>
-            </a:pPr>
-            <a:r>
-              <a:rPr lang="en-US" sz="1100" b="1" dirty="0">
-                <a:solidFill>
-                  <a:srgbClr val="334155"/>
-                </a:solidFill>
-                <a:latin typeface="Arial" pitchFamily="34" charset="0"/>
-                <a:ea typeface="Arial" pitchFamily="34" charset="-122"/>
-                <a:cs typeface="Arial" pitchFamily="34" charset="-120"/>
-              </a:rPr>
-              <a:t>エアコン・空調 </a:t>
-            </a:r>
-            <a:endParaRPr lang="en-US" sz="1100" dirty="0"/>
-          </a:p>
-          <a:p>
-            <a:pPr indent="0" marL="0">
-              <a:spcAft>
-                <a:spcPts val="200"/>
-              </a:spcAft>
-              <a:buNone/>
-            </a:pPr>
-            <a:r>
-              <a:rPr lang="en-US" sz="900" dirty="0">
-                <a:solidFill>
-                  <a:srgbClr val="64748B"/>
-                </a:solidFill>
-                <a:latin typeface="Arial" pitchFamily="34" charset="0"/>
-                <a:ea typeface="Arial" pitchFamily="34" charset="-122"/>
-                <a:cs typeface="Arial" pitchFamily="34" charset="-120"/>
-              </a:rPr>
-              <a:t>  アメニティや設備も充実しており、コンセント、照明設備、ドライヤー、冷暖房も使いやすくとても快適に過ごせました</a:t>
             </a:r>
             <a:endParaRPr lang="en-US" sz="1100" dirty="0"/>
           </a:p>
@@ -6489,7 +6489,7 @@
                 <a:ea typeface="Arial" pitchFamily="34" charset="-122"/>
                 <a:cs typeface="Arial" pitchFamily="34" charset="-120"/>
               </a:rPr>
-              <a:t>8.86</a:t>
+              <a:t>8.83</a:t>
             </a:r>
             <a:endParaRPr lang="en-US" sz="3200" dirty="0"/>
           </a:p>
@@ -6614,7 +6614,7 @@
                 <a:ea typeface="Arial" pitchFamily="34" charset="-122"/>
                 <a:cs typeface="Arial" pitchFamily="34" charset="-120"/>
               </a:rPr>
-              <a:t>82.5%</a:t>
+              <a:t>81.0%</a:t>
             </a:r>
             <a:endParaRPr lang="en-US" sz="3200" dirty="0"/>
           </a:p>
@@ -6864,7 +6864,7 @@
                 <a:ea typeface="Arial" pitchFamily="34" charset="-122"/>
                 <a:cs typeface="Arial" pitchFamily="34" charset="-120"/>
               </a:rPr>
-              <a:t>57件</a:t>
+              <a:t>58件</a:t>
             </a:r>
             <a:endParaRPr lang="en-US" sz="3200" dirty="0"/>
           </a:p>
@@ -8527,7 +8527,7 @@
                           <a:ea typeface="Arial" pitchFamily="34" charset="-122"/>
                           <a:cs typeface="Arial" pitchFamily="34" charset="-120"/>
                         </a:rPr>
-                        <a:t>24</a:t>
+                        <a:t>25</a:t>
                       </a:r>
                       <a:endParaRPr lang="en-US" sz="900" dirty="0">
                         <a:latin typeface="Arial" charset="0"/>
@@ -8595,7 +8595,7 @@
                           <a:ea typeface="Arial" pitchFamily="34" charset="-122"/>
                           <a:cs typeface="Arial" pitchFamily="34" charset="-120"/>
                         </a:rPr>
-                        <a:t>9</a:t>
+                        <a:t>8.92</a:t>
                       </a:r>
                       <a:endParaRPr lang="en-US" sz="900" dirty="0">
                         <a:latin typeface="Arial" charset="0"/>
@@ -8731,7 +8731,7 @@
                           <a:ea typeface="Arial" pitchFamily="34" charset="-122"/>
                           <a:cs typeface="Arial" pitchFamily="34" charset="-120"/>
                         </a:rPr>
-                        <a:t>9</a:t>
+                        <a:t>8.92</a:t>
                       </a:r>
                       <a:endParaRPr lang="en-US" sz="900" dirty="0">
                         <a:latin typeface="Arial" charset="0"/>
@@ -10165,7 +10165,7 @@
                 <a:ea typeface="Arial" pitchFamily="34" charset="-122"/>
                 <a:cs typeface="Arial" pitchFamily="34" charset="-120"/>
               </a:rPr>
-              <a:t>47件（82.5%）</a:t>
+              <a:t>47件（81.0%）</a:t>
             </a:r>
             <a:endParaRPr lang="en-US" sz="1100" dirty="0"/>
           </a:p>
@@ -10263,7 +10263,7 @@
                 <a:ea typeface="Arial" pitchFamily="34" charset="-122"/>
                 <a:cs typeface="Arial" pitchFamily="34" charset="-120"/>
               </a:rPr>
-              <a:t>10件（17.5%）</a:t>
+              <a:t>11件（19.0%）</a:t>
             </a:r>
             <a:endParaRPr lang="en-US" sz="1100" dirty="0"/>
           </a:p>
@@ -10773,7 +10773,7 @@
                 <a:ea typeface="Arial" pitchFamily="34" charset="-122"/>
                 <a:cs typeface="Arial" pitchFamily="34" charset="-120"/>
               </a:rPr>
-              <a:t>駅が近くて駐車場も隣にあり良かった ございません ございません</a:t>
+              <a:t>Good location with the train station is just 3 minutes of...</a:t>
             </a:r>
             <a:endParaRPr lang="en-US" sz="900" dirty="0"/>
           </a:p>
@@ -10812,7 +10812,7 @@
                 <a:ea typeface="Arial" pitchFamily="34" charset="-122"/>
                 <a:cs typeface="Arial" pitchFamily="34" charset="-120"/>
               </a:rPr>
-              <a:t>「Location, comfort, amenities None なし」</a:t>
+              <a:t>「駅が近くて駐車場も隣にあり良かった ございません ございません」</a:t>
             </a:r>
             <a:endParaRPr lang="en-US" sz="900" dirty="0"/>
           </a:p>
@@ -11442,7 +11442,7 @@
                 <a:ea typeface="Arial" pitchFamily="34" charset="-122"/>
                 <a:cs typeface="Arial" pitchFamily="34" charset="-120"/>
               </a:rPr>
-              <a:t>コットンボールなどの基本的なアメニティが用意されていないのは驚きです</a:t>
+              <a:t>残念ながら、私の部屋のマットレスは沈み込んでいて、全く快適ではありませんでした</a:t>
             </a:r>
             <a:endParaRPr lang="en-US" sz="900" dirty="0"/>
           </a:p>
@@ -11481,7 +11481,7 @@
                 <a:ea typeface="Arial" pitchFamily="34" charset="-122"/>
                 <a:cs typeface="Arial" pitchFamily="34" charset="-120"/>
               </a:rPr>
-              <a:t>「Location, comfort, amenities None なし」</a:t>
+              <a:t>「コットンボールなどの基本的なアメニティが用意されていないのは驚きです」</a:t>
             </a:r>
             <a:endParaRPr lang="en-US" sz="900" dirty="0"/>
           </a:p>
@@ -12549,7 +12549,7 @@
                           <a:ea typeface="Arial" pitchFamily="34" charset="-122"/>
                           <a:cs typeface="Arial" pitchFamily="34" charset="-120"/>
                         </a:rPr>
-                        <a:t>浴室・水回り</a:t>
+                        <a:t>エアコン・空調</a:t>
                       </a:r>
                       <a:endParaRPr lang="en-US" sz="900" dirty="0">
                         <a:latin typeface="Arial" charset="0"/>
@@ -12617,7 +12617,7 @@
                           <a:ea typeface="Arial" pitchFamily="34" charset="-122"/>
                           <a:cs typeface="Arial" pitchFamily="34" charset="-120"/>
                         </a:rPr>
-                        <a:t>広いお部屋にしていただいたおかげで、トイレとお風呂も十分な広さがあり、子供と二人で着替えやトイレ利用をしても全く窮...</a:t>
+                        <a:t>As a result, I experienced significant back soreness thro...</a:t>
                       </a:r>
                       <a:endParaRPr lang="en-US" sz="900" dirty="0">
                         <a:latin typeface="Arial" charset="0"/>
@@ -12685,7 +12685,7 @@
                           <a:ea typeface="Arial" pitchFamily="34" charset="-122"/>
                           <a:cs typeface="Arial" pitchFamily="34" charset="-120"/>
                         </a:rPr>
-                        <a:t>3件</a:t>
+                        <a:t>4件</a:t>
                       </a:r>
                       <a:endParaRPr lang="en-US" sz="900" dirty="0">
                         <a:latin typeface="Arial" charset="0"/>
@@ -12823,7 +12823,7 @@
                           <a:ea typeface="Arial" pitchFamily="34" charset="-122"/>
                           <a:cs typeface="Arial" pitchFamily="34" charset="-120"/>
                         </a:rPr>
-                        <a:t>エアコン・空調</a:t>
+                        <a:t>浴室・水回り</a:t>
                       </a:r>
                       <a:endParaRPr lang="en-US" sz="900" dirty="0">
                         <a:latin typeface="Arial" charset="0"/>
@@ -12891,7 +12891,7 @@
                           <a:ea typeface="Arial" pitchFamily="34" charset="-122"/>
                           <a:cs typeface="Arial" pitchFamily="34" charset="-120"/>
                         </a:rPr>
-                        <a:t>アメニティや設備も充実しており、コンセント、照明設備、ドライヤー、冷暖房も使いやすくとても快適に過ごせました</a:t>
+                        <a:t>広いお部屋にしていただいたおかげで、トイレとお風呂も十分な広さがあり、子供と二人で着替えやトイレ利用をしても全く窮...</a:t>
                       </a:r>
                       <a:endParaRPr lang="en-US" sz="900" dirty="0">
                         <a:latin typeface="Arial" charset="0"/>
@@ -13371,7 +13371,7 @@
                           <a:ea typeface="Arial" pitchFamily="34" charset="-122"/>
                           <a:cs typeface="Arial" pitchFamily="34" charset="-120"/>
                         </a:rPr>
-                        <a:t>臭い・匂い</a:t>
+                        <a:t>対応・サービスの不満</a:t>
                       </a:r>
                       <a:endParaRPr lang="en-US" sz="900" dirty="0">
                         <a:latin typeface="Arial" charset="0"/>
@@ -13439,7 +13439,7 @@
                           <a:ea typeface="Arial" pitchFamily="34" charset="-122"/>
                           <a:cs typeface="Arial" pitchFamily="34" charset="-120"/>
                         </a:rPr>
-                        <a:t>少しお風呂、水回りの匂いが気になりましたが、それ以外は何にも不便も不快もありません</a:t>
+                        <a:t>残念ながら、私の部屋のマットレスは沈み込んでいて、全く快適ではありませんでした</a:t>
                       </a:r>
                       <a:endParaRPr lang="en-US" sz="900" dirty="0">
                         <a:latin typeface="Arial" charset="0"/>
@@ -13507,7 +13507,7 @@
                           <a:ea typeface="Arial" pitchFamily="34" charset="-122"/>
                           <a:cs typeface="Arial" pitchFamily="34" charset="-120"/>
                         </a:rPr>
-                        <a:t>1件</a:t>
+                        <a:t>2件</a:t>
                       </a:r>
                       <a:endParaRPr lang="en-US" sz="900" dirty="0">
                         <a:latin typeface="Arial" charset="0"/>
@@ -13645,7 +13645,7 @@
                           <a:ea typeface="Arial" pitchFamily="34" charset="-122"/>
                           <a:cs typeface="Arial" pitchFamily="34" charset="-120"/>
                         </a:rPr>
-                        <a:t>窓・採光</a:t>
+                        <a:t>臭い・匂い</a:t>
                       </a:r>
                       <a:endParaRPr lang="en-US" sz="900" dirty="0">
                         <a:latin typeface="Arial" charset="0"/>
@@ -13713,7 +13713,7 @@
                           <a:ea typeface="Arial" pitchFamily="34" charset="-122"/>
                           <a:cs typeface="Arial" pitchFamily="34" charset="-120"/>
                         </a:rPr>
-                        <a:t>立地はとても便利で、窓の一つからは素晴らしい景色が望めます</a:t>
+                        <a:t>少しお風呂、水回りの匂いが気になりましたが、それ以外は何にも不便も不快もありません</a:t>
                       </a:r>
                       <a:endParaRPr lang="en-US" sz="900" dirty="0">
                         <a:latin typeface="Arial" charset="0"/>
@@ -13919,7 +13919,7 @@
                           <a:ea typeface="Arial" pitchFamily="34" charset="-122"/>
                           <a:cs typeface="Arial" pitchFamily="34" charset="-120"/>
                         </a:rPr>
-                        <a:t>対応・サービスの不満</a:t>
+                        <a:t>窓・採光</a:t>
                       </a:r>
                       <a:endParaRPr lang="en-US" sz="900" dirty="0">
                         <a:latin typeface="Arial" charset="0"/>
@@ -13987,7 +13987,7 @@
                           <a:ea typeface="Arial" pitchFamily="34" charset="-122"/>
                           <a:cs typeface="Arial" pitchFamily="34" charset="-120"/>
                         </a:rPr>
-                        <a:t>服務人員態度普通，辦理入住與退房都還算順利</a:t>
+                        <a:t>立地はとても便利で、窓の一つからは素晴らしい景色が望めます</a:t>
                       </a:r>
                       <a:endParaRPr lang="en-US" sz="900" dirty="0">
                         <a:latin typeface="Arial" charset="0"/>

--- a/納品レポート/ホテル別レポート/daiwa_osaki_口コミ分析レポート.pptx
+++ b/納品レポート/ホテル別レポート/daiwa_osaki_口コミ分析レポート.pptx
@@ -214,7 +214,7 @@
                   <c:v>9</c:v>
                 </c:pt>
                 <c:pt idx="2">
-                  <c:v>8.92</c:v>
+                  <c:v>8.96</c:v>
                 </c:pt>
                 <c:pt idx="3">
                   <c:v>8.67</c:v>
@@ -566,7 +566,7 @@
               <c:numCache>
                 <c:ptCount val="3"/>
                 <c:pt idx="0">
-                  <c:v>47</c:v>
+                  <c:v>48</c:v>
                 </c:pt>
                 <c:pt idx="1">
                   <c:v>11</c:v>
@@ -767,7 +767,7 @@
                 <c:formatCode>General</c:formatCode>
                 <c:ptCount val="5"/>
                 <c:pt idx="0">
-                  <c:v>28</c:v>
+                  <c:v>29</c:v>
                 </c:pt>
                 <c:pt idx="1">
                   <c:v>8</c:v>
@@ -2730,7 +2730,7 @@
                 <a:ea typeface="Arial" pitchFamily="34" charset="-122"/>
                 <a:cs typeface="Arial" pitchFamily="34" charset="-120"/>
               </a:rPr>
-              <a:t>レビュー総数：58件（6サイト）</a:t>
+              <a:t>レビュー総数：59件（6サイト）</a:t>
             </a:r>
             <a:endParaRPr lang="en-US" sz="1000" dirty="0"/>
           </a:p>
@@ -2750,7 +2750,7 @@
                 <a:ea typeface="Arial" pitchFamily="34" charset="-122"/>
                 <a:cs typeface="Arial" pitchFamily="34" charset="-120"/>
               </a:rPr>
-              <a:t>作成日：2026年3月25日</a:t>
+              <a:t>作成日：2026年3月26日</a:t>
             </a:r>
             <a:endParaRPr lang="en-US" sz="1000" dirty="0"/>
           </a:p>
@@ -3296,7 +3296,7 @@
                           <a:ea typeface="Arial" pitchFamily="34" charset="-122"/>
                           <a:cs typeface="Arial" pitchFamily="34" charset="-120"/>
                         </a:rPr>
-                        <a:t>8.83点</a:t>
+                        <a:t>8.85点</a:t>
                       </a:r>
                       <a:endParaRPr lang="en-US" sz="1000" dirty="0">
                         <a:latin typeface="Arial" charset="0"/>
@@ -3364,7 +3364,7 @@
                           <a:ea typeface="Arial" pitchFamily="34" charset="-122"/>
                           <a:cs typeface="Arial" pitchFamily="34" charset="-120"/>
                         </a:rPr>
-                        <a:t>9.1点以上</a:t>
+                        <a:t>9.2点以上</a:t>
                       </a:r>
                       <a:endParaRPr lang="en-US" sz="1000" dirty="0">
                         <a:latin typeface="Arial" charset="0"/>
@@ -3570,7 +3570,7 @@
                           <a:ea typeface="Arial" pitchFamily="34" charset="-122"/>
                           <a:cs typeface="Arial" pitchFamily="34" charset="-120"/>
                         </a:rPr>
-                        <a:t>81.0%</a:t>
+                        <a:t>81.4%</a:t>
                       </a:r>
                       <a:endParaRPr lang="en-US" sz="1000" dirty="0">
                         <a:latin typeface="Arial" charset="0"/>
@@ -5305,7 +5305,7 @@
                 <a:ea typeface="Arial" pitchFamily="34" charset="-122"/>
                 <a:cs typeface="Arial" pitchFamily="34" charset="-120"/>
               </a:rPr>
-              <a:t>8.83</a:t>
+              <a:t>8.85</a:t>
             </a:r>
             <a:endParaRPr lang="en-US" sz="3200" dirty="0"/>
           </a:p>
@@ -5430,7 +5430,7 @@
                 <a:ea typeface="Arial" pitchFamily="34" charset="-122"/>
                 <a:cs typeface="Arial" pitchFamily="34" charset="-120"/>
               </a:rPr>
-              <a:t>81.0%</a:t>
+              <a:t>81.4%</a:t>
             </a:r>
             <a:endParaRPr lang="en-US" sz="3200" dirty="0"/>
           </a:p>
@@ -5680,7 +5680,7 @@
                 <a:ea typeface="Arial" pitchFamily="34" charset="-122"/>
                 <a:cs typeface="Arial" pitchFamily="34" charset="-120"/>
               </a:rPr>
-              <a:t>58件</a:t>
+              <a:t>59件</a:t>
             </a:r>
             <a:endParaRPr lang="en-US" sz="3200" dirty="0"/>
           </a:p>
@@ -6489,7 +6489,7 @@
                 <a:ea typeface="Arial" pitchFamily="34" charset="-122"/>
                 <a:cs typeface="Arial" pitchFamily="34" charset="-120"/>
               </a:rPr>
-              <a:t>8.83</a:t>
+              <a:t>8.85</a:t>
             </a:r>
             <a:endParaRPr lang="en-US" sz="3200" dirty="0"/>
           </a:p>
@@ -6614,7 +6614,7 @@
                 <a:ea typeface="Arial" pitchFamily="34" charset="-122"/>
                 <a:cs typeface="Arial" pitchFamily="34" charset="-120"/>
               </a:rPr>
-              <a:t>81.0%</a:t>
+              <a:t>81.4%</a:t>
             </a:r>
             <a:endParaRPr lang="en-US" sz="3200" dirty="0"/>
           </a:p>
@@ -6864,7 +6864,7 @@
                 <a:ea typeface="Arial" pitchFamily="34" charset="-122"/>
                 <a:cs typeface="Arial" pitchFamily="34" charset="-120"/>
               </a:rPr>
-              <a:t>58件</a:t>
+              <a:t>59件</a:t>
             </a:r>
             <a:endParaRPr lang="en-US" sz="3200" dirty="0"/>
           </a:p>
@@ -8527,7 +8527,7 @@
                           <a:ea typeface="Arial" pitchFamily="34" charset="-122"/>
                           <a:cs typeface="Arial" pitchFamily="34" charset="-120"/>
                         </a:rPr>
-                        <a:t>25</a:t>
+                        <a:t>26</a:t>
                       </a:r>
                       <a:endParaRPr lang="en-US" sz="900" dirty="0">
                         <a:latin typeface="Arial" charset="0"/>
@@ -8595,7 +8595,7 @@
                           <a:ea typeface="Arial" pitchFamily="34" charset="-122"/>
                           <a:cs typeface="Arial" pitchFamily="34" charset="-120"/>
                         </a:rPr>
-                        <a:t>8.92</a:t>
+                        <a:t>8.96</a:t>
                       </a:r>
                       <a:endParaRPr lang="en-US" sz="900" dirty="0">
                         <a:latin typeface="Arial" charset="0"/>
@@ -8731,7 +8731,7 @@
                           <a:ea typeface="Arial" pitchFamily="34" charset="-122"/>
                           <a:cs typeface="Arial" pitchFamily="34" charset="-120"/>
                         </a:rPr>
-                        <a:t>8.92</a:t>
+                        <a:t>8.96</a:t>
                       </a:r>
                       <a:endParaRPr lang="en-US" sz="900" dirty="0">
                         <a:latin typeface="Arial" charset="0"/>
@@ -10165,7 +10165,7 @@
                 <a:ea typeface="Arial" pitchFamily="34" charset="-122"/>
                 <a:cs typeface="Arial" pitchFamily="34" charset="-120"/>
               </a:rPr>
-              <a:t>47件（81.0%）</a:t>
+              <a:t>48件（81.4%）</a:t>
             </a:r>
             <a:endParaRPr lang="en-US" sz="1100" dirty="0"/>
           </a:p>
@@ -10263,7 +10263,7 @@
                 <a:ea typeface="Arial" pitchFamily="34" charset="-122"/>
                 <a:cs typeface="Arial" pitchFamily="34" charset="-120"/>
               </a:rPr>
-              <a:t>11件（19.0%）</a:t>
+              <a:t>11件（18.6%）</a:t>
             </a:r>
             <a:endParaRPr lang="en-US" sz="1100" dirty="0"/>
           </a:p>

--- a/納品レポート/ホテル別レポート/daiwa_osaki_口コミ分析レポート.pptx
+++ b/納品レポート/ホテル別レポート/daiwa_osaki_口コミ分析レポート.pptx
@@ -208,7 +208,7 @@
                 <c:formatCode>General</c:formatCode>
                 <c:ptCount val="6"/>
                 <c:pt idx="0">
-                  <c:v>9.64</c:v>
+                  <c:v>9.67</c:v>
                 </c:pt>
                 <c:pt idx="1">
                   <c:v>9</c:v>
@@ -566,7 +566,7 @@
               <c:numCache>
                 <c:ptCount val="3"/>
                 <c:pt idx="0">
-                  <c:v>48</c:v>
+                  <c:v>49</c:v>
                 </c:pt>
                 <c:pt idx="1">
                   <c:v>11</c:v>
@@ -767,7 +767,7 @@
                 <c:formatCode>General</c:formatCode>
                 <c:ptCount val="5"/>
                 <c:pt idx="0">
-                  <c:v>29</c:v>
+                  <c:v>30</c:v>
                 </c:pt>
                 <c:pt idx="1">
                   <c:v>8</c:v>
@@ -2730,7 +2730,7 @@
                 <a:ea typeface="Arial" pitchFamily="34" charset="-122"/>
                 <a:cs typeface="Arial" pitchFamily="34" charset="-120"/>
               </a:rPr>
-              <a:t>レビュー総数：59件（6サイト）</a:t>
+              <a:t>レビュー総数：60件（6サイト）</a:t>
             </a:r>
             <a:endParaRPr lang="en-US" sz="1000" dirty="0"/>
           </a:p>
@@ -2750,7 +2750,7 @@
                 <a:ea typeface="Arial" pitchFamily="34" charset="-122"/>
                 <a:cs typeface="Arial" pitchFamily="34" charset="-120"/>
               </a:rPr>
-              <a:t>作成日：2026年3月26日</a:t>
+              <a:t>作成日：2026年3月27日</a:t>
             </a:r>
             <a:endParaRPr lang="en-US" sz="1000" dirty="0"/>
           </a:p>
@@ -3296,7 +3296,7 @@
                           <a:ea typeface="Arial" pitchFamily="34" charset="-122"/>
                           <a:cs typeface="Arial" pitchFamily="34" charset="-120"/>
                         </a:rPr>
-                        <a:t>8.85点</a:t>
+                        <a:t>8.87点</a:t>
                       </a:r>
                       <a:endParaRPr lang="en-US" sz="1000" dirty="0">
                         <a:latin typeface="Arial" charset="0"/>
@@ -3570,7 +3570,7 @@
                           <a:ea typeface="Arial" pitchFamily="34" charset="-122"/>
                           <a:cs typeface="Arial" pitchFamily="34" charset="-120"/>
                         </a:rPr>
-                        <a:t>81.4%</a:t>
+                        <a:t>81.7%</a:t>
                       </a:r>
                       <a:endParaRPr lang="en-US" sz="1000" dirty="0">
                         <a:latin typeface="Arial" charset="0"/>
@@ -3638,7 +3638,7 @@
                           <a:ea typeface="Arial" pitchFamily="34" charset="-122"/>
                           <a:cs typeface="Arial" pitchFamily="34" charset="-120"/>
                         </a:rPr>
-                        <a:t>86%以上</a:t>
+                        <a:t>87%以上</a:t>
                       </a:r>
                       <a:endParaRPr lang="en-US" sz="1000" dirty="0">
                         <a:latin typeface="Arial" charset="0"/>
@@ -5305,7 +5305,7 @@
                 <a:ea typeface="Arial" pitchFamily="34" charset="-122"/>
                 <a:cs typeface="Arial" pitchFamily="34" charset="-120"/>
               </a:rPr>
-              <a:t>8.85</a:t>
+              <a:t>8.87</a:t>
             </a:r>
             <a:endParaRPr lang="en-US" sz="3200" dirty="0"/>
           </a:p>
@@ -5430,7 +5430,7 @@
                 <a:ea typeface="Arial" pitchFamily="34" charset="-122"/>
                 <a:cs typeface="Arial" pitchFamily="34" charset="-120"/>
               </a:rPr>
-              <a:t>81.4%</a:t>
+              <a:t>81.7%</a:t>
             </a:r>
             <a:endParaRPr lang="en-US" sz="3200" dirty="0"/>
           </a:p>
@@ -5680,7 +5680,7 @@
                 <a:ea typeface="Arial" pitchFamily="34" charset="-122"/>
                 <a:cs typeface="Arial" pitchFamily="34" charset="-120"/>
               </a:rPr>
-              <a:t>59件</a:t>
+              <a:t>60件</a:t>
             </a:r>
             <a:endParaRPr lang="en-US" sz="3200" dirty="0"/>
           </a:p>
@@ -5868,7 +5868,7 @@
                 <a:ea typeface="Arial" pitchFamily="34" charset="-122"/>
                 <a:cs typeface="Arial" pitchFamily="34" charset="-120"/>
               </a:rPr>
-              <a:t>  それ以外は、部屋の広さと清潔さは気に入っています</a:t>
+              <a:t>  非常好乾凈 とても清潔</a:t>
             </a:r>
             <a:endParaRPr lang="en-US" sz="1100" dirty="0"/>
           </a:p>
@@ -6489,7 +6489,7 @@
                 <a:ea typeface="Arial" pitchFamily="34" charset="-122"/>
                 <a:cs typeface="Arial" pitchFamily="34" charset="-120"/>
               </a:rPr>
-              <a:t>8.85</a:t>
+              <a:t>8.87</a:t>
             </a:r>
             <a:endParaRPr lang="en-US" sz="3200" dirty="0"/>
           </a:p>
@@ -6614,7 +6614,7 @@
                 <a:ea typeface="Arial" pitchFamily="34" charset="-122"/>
                 <a:cs typeface="Arial" pitchFamily="34" charset="-120"/>
               </a:rPr>
-              <a:t>81.4%</a:t>
+              <a:t>81.7%</a:t>
             </a:r>
             <a:endParaRPr lang="en-US" sz="3200" dirty="0"/>
           </a:p>
@@ -6864,7 +6864,7 @@
                 <a:ea typeface="Arial" pitchFamily="34" charset="-122"/>
                 <a:cs typeface="Arial" pitchFamily="34" charset="-120"/>
               </a:rPr>
-              <a:t>59件</a:t>
+              <a:t>60件</a:t>
             </a:r>
             <a:endParaRPr lang="en-US" sz="3200" dirty="0"/>
           </a:p>
@@ -7285,7 +7285,7 @@
                 <a:ea typeface="Arial" pitchFamily="34" charset="-122"/>
                 <a:cs typeface="Arial" pitchFamily="34" charset="-120"/>
               </a:rPr>
-              <a:t>Trip.com(9.64)が最高スコア。</a:t>
+              <a:t>Trip.com(9.67)が最高スコア。</a:t>
             </a:r>
             <a:endParaRPr lang="en-US" sz="1100" dirty="0"/>
           </a:p>
@@ -7843,7 +7843,7 @@
                           <a:ea typeface="Arial" pitchFamily="34" charset="-122"/>
                           <a:cs typeface="Arial" pitchFamily="34" charset="-120"/>
                         </a:rPr>
-                        <a:t>11</a:t>
+                        <a:t>12</a:t>
                       </a:r>
                       <a:endParaRPr lang="en-US" sz="900" dirty="0">
                         <a:latin typeface="Arial" charset="0"/>
@@ -7911,7 +7911,7 @@
                           <a:ea typeface="Arial" pitchFamily="34" charset="-122"/>
                           <a:cs typeface="Arial" pitchFamily="34" charset="-120"/>
                         </a:rPr>
-                        <a:t>9.64</a:t>
+                        <a:t>9.67</a:t>
                       </a:r>
                       <a:endParaRPr lang="en-US" sz="900" dirty="0">
                         <a:latin typeface="Arial" charset="0"/>
@@ -8047,7 +8047,7 @@
                           <a:ea typeface="Arial" pitchFamily="34" charset="-122"/>
                           <a:cs typeface="Arial" pitchFamily="34" charset="-120"/>
                         </a:rPr>
-                        <a:t>9.64</a:t>
+                        <a:t>9.67</a:t>
                       </a:r>
                       <a:endParaRPr lang="en-US" sz="900" dirty="0">
                         <a:latin typeface="Arial" charset="0"/>
@@ -10165,7 +10165,7 @@
                 <a:ea typeface="Arial" pitchFamily="34" charset="-122"/>
                 <a:cs typeface="Arial" pitchFamily="34" charset="-120"/>
               </a:rPr>
-              <a:t>48件（81.4%）</a:t>
+              <a:t>49件（81.7%）</a:t>
             </a:r>
             <a:endParaRPr lang="en-US" sz="1100" dirty="0"/>
           </a:p>
@@ -10263,7 +10263,7 @@
                 <a:ea typeface="Arial" pitchFamily="34" charset="-122"/>
                 <a:cs typeface="Arial" pitchFamily="34" charset="-120"/>
               </a:rPr>
-              <a:t>11件（18.6%）</a:t>
+              <a:t>11件（18.3%）</a:t>
             </a:r>
             <a:endParaRPr lang="en-US" sz="1100" dirty="0"/>
           </a:p>
@@ -10996,7 +10996,7 @@
                 <a:ea typeface="Arial" pitchFamily="34" charset="-122"/>
                 <a:cs typeface="Arial" pitchFamily="34" charset="-120"/>
               </a:rPr>
-              <a:t>それ以外は、部屋の広さと清潔さは気に入っています</a:t>
+              <a:t>非常好乾凈 とても清潔</a:t>
             </a:r>
             <a:endParaRPr lang="en-US" sz="900" dirty="0"/>
           </a:p>
@@ -11035,7 +11035,7 @@
                 <a:ea typeface="Arial" pitchFamily="34" charset="-122"/>
                 <a:cs typeface="Arial" pitchFamily="34" charset="-120"/>
               </a:rPr>
-              <a:t>「清潔感のある過ごしやすい環境を提供しているホテルでした」</a:t>
+              <a:t>「それ以外は、部屋の広さと清潔さは気に入っています」</a:t>
             </a:r>
             <a:endParaRPr lang="en-US" sz="900" dirty="0"/>
           </a:p>

--- a/納品レポート/ホテル別レポート/daiwa_osaki_口コミ分析レポート.pptx
+++ b/納品レポート/ホテル別レポート/daiwa_osaki_口コミ分析レポート.pptx
@@ -2750,7 +2750,7 @@
                 <a:ea typeface="Arial" pitchFamily="34" charset="-122"/>
                 <a:cs typeface="Arial" pitchFamily="34" charset="-120"/>
               </a:rPr>
-              <a:t>作成日：2026年3月27日</a:t>
+              <a:t>作成日：2026年3月28日</a:t>
             </a:r>
             <a:endParaRPr lang="en-US" sz="1000" dirty="0"/>
           </a:p>

--- a/納品レポート/ホテル別レポート/daiwa_osaki_口コミ分析レポート.pptx
+++ b/納品レポート/ホテル別レポート/daiwa_osaki_口コミ分析レポート.pptx
@@ -280,13 +280,13 @@
                   <c:v>9</c:v>
                 </c:pt>
                 <c:pt idx="2">
-                  <c:v>8.96</c:v>
+                  <c:v>9</c:v>
                 </c:pt>
                 <c:pt idx="3">
                   <c:v>8.67</c:v>
                 </c:pt>
                 <c:pt idx="4">
-                  <c:v>8</c:v>
+                  <c:v>8.29</c:v>
                 </c:pt>
                 <c:pt idx="5">
                   <c:v>8</c:v>
@@ -586,7 +586,7 @@
                 <c:formatCode>General</c:formatCode>
                 <c:ptCount val="5"/>
                 <c:pt idx="0">
-                  <c:v>30</c:v>
+                  <c:v>32</c:v>
                 </c:pt>
                 <c:pt idx="1">
                   <c:v>8</c:v>
@@ -2486,7 +2486,7 @@
                 <a:ea typeface="Arial" pitchFamily="34" charset="-122"/>
                 <a:cs typeface="Arial" pitchFamily="34" charset="-120"/>
               </a:rPr>
-              <a:t>レビュー総数：60件</a:t>
+              <a:t>レビュー総数：62件</a:t>
             </a:r>
             <a:endParaRPr lang="en-US" sz="1000" dirty="0"/>
           </a:p>
@@ -2766,7 +2766,7 @@
                 <a:ea typeface="Arial" pitchFamily="34" charset="-122"/>
                 <a:cs typeface="Arial" pitchFamily="34" charset="-120"/>
               </a:rPr>
-              <a:t>ダイワロイネットホテル東京大崎は全体平均8.87点（10pt換算）、高評価率81.7%を達成しています。本レポートで示した改善施策を段階的に実施することで、さらなる顧客満足度向上が期待できます。</a:t>
+              <a:t>ダイワロイネットホテル東京大崎は全体平均8.90点（10pt換算）、高評価率82.3%を達成しています。本レポートで示した改善施策を段階的に実施することで、さらなる顧客満足度向上が期待できます。</a:t>
             </a:r>
             <a:endParaRPr lang="en-US" sz="1200" dirty="0"/>
           </a:p>
@@ -3203,7 +3203,7 @@
                 <a:ea typeface="Arial" pitchFamily="34" charset="-122"/>
                 <a:cs typeface="Arial" pitchFamily="34" charset="-120"/>
               </a:rPr>
-              <a:t>8.87</a:t>
+              <a:t>8.90</a:t>
             </a:r>
             <a:endParaRPr lang="en-US" sz="2800" dirty="0"/>
           </a:p>
@@ -3321,7 +3321,7 @@
                 <a:ea typeface="Arial" pitchFamily="34" charset="-122"/>
                 <a:cs typeface="Arial" pitchFamily="34" charset="-120"/>
               </a:rPr>
-              <a:t>81.7%</a:t>
+              <a:t>82.3%</a:t>
             </a:r>
             <a:endParaRPr lang="en-US" sz="2800" dirty="0"/>
           </a:p>
@@ -3557,7 +3557,7 @@
                 <a:ea typeface="Arial" pitchFamily="34" charset="-122"/>
                 <a:cs typeface="Arial" pitchFamily="34" charset="-120"/>
               </a:rPr>
-              <a:t>60件</a:t>
+              <a:t>62件</a:t>
             </a:r>
             <a:endParaRPr lang="en-US" sz="2800" dirty="0"/>
           </a:p>
@@ -4980,7 +4980,7 @@
                           <a:ea typeface="Arial" pitchFamily="34" charset="-122"/>
                           <a:cs typeface="Arial" pitchFamily="34" charset="-120"/>
                         </a:rPr>
-                        <a:t>26</a:t>
+                        <a:t>27</a:t>
                       </a:r>
                       <a:endParaRPr lang="en-US" sz="800" dirty="0">
                         <a:latin typeface="Arial" charset="0"/>
@@ -5048,7 +5048,7 @@
                           <a:ea typeface="Arial" pitchFamily="34" charset="-122"/>
                           <a:cs typeface="Arial" pitchFamily="34" charset="-120"/>
                         </a:rPr>
-                        <a:t>8.96/10</a:t>
+                        <a:t>9.00/10</a:t>
                       </a:r>
                       <a:endParaRPr lang="en-US" sz="800" dirty="0">
                         <a:latin typeface="Arial" charset="0"/>
@@ -5116,7 +5116,7 @@
                           <a:ea typeface="Arial" pitchFamily="34" charset="-122"/>
                           <a:cs typeface="Arial" pitchFamily="34" charset="-120"/>
                         </a:rPr>
-                        <a:t>8.96</a:t>
+                        <a:t>9.00</a:t>
                       </a:r>
                       <a:endParaRPr lang="en-US" sz="800" dirty="0">
                         <a:latin typeface="Arial" charset="0"/>
@@ -5184,7 +5184,7 @@
                           <a:ea typeface="Arial" pitchFamily="34" charset="-122"/>
                           <a:cs typeface="Arial" pitchFamily="34" charset="-120"/>
                         </a:rPr>
-                        <a:t>良好</a:t>
+                        <a:t>優秀</a:t>
                       </a:r>
                       <a:endParaRPr lang="en-US" sz="800" dirty="0">
                         <a:latin typeface="Arial" charset="0"/>
@@ -5664,7 +5664,7 @@
                           <a:ea typeface="Arial" pitchFamily="34" charset="-122"/>
                           <a:cs typeface="Arial" pitchFamily="34" charset="-120"/>
                         </a:rPr>
-                        <a:t>6</a:t>
+                        <a:t>7</a:t>
                       </a:r>
                       <a:endParaRPr lang="en-US" sz="800" dirty="0">
                         <a:latin typeface="Arial" charset="0"/>
@@ -5732,7 +5732,7 @@
                           <a:ea typeface="Arial" pitchFamily="34" charset="-122"/>
                           <a:cs typeface="Arial" pitchFamily="34" charset="-120"/>
                         </a:rPr>
-                        <a:t>4.00/5</a:t>
+                        <a:t>4.14/5</a:t>
                       </a:r>
                       <a:endParaRPr lang="en-US" sz="800" dirty="0">
                         <a:latin typeface="Arial" charset="0"/>
@@ -5800,7 +5800,7 @@
                           <a:ea typeface="Arial" pitchFamily="34" charset="-122"/>
                           <a:cs typeface="Arial" pitchFamily="34" charset="-120"/>
                         </a:rPr>
-                        <a:t>8.00</a:t>
+                        <a:t>8.29</a:t>
                       </a:r>
                       <a:endParaRPr lang="en-US" sz="800" dirty="0">
                         <a:latin typeface="Arial" charset="0"/>
@@ -6595,7 +6595,7 @@
                 <a:ea typeface="Arial" pitchFamily="34" charset="-122"/>
                 <a:cs typeface="Arial" pitchFamily="34" charset="-120"/>
               </a:rPr>
-              <a:t>49件（81.7%）</a:t>
+              <a:t>51件（82.3%）</a:t>
             </a:r>
             <a:endParaRPr lang="en-US" sz="1600" dirty="0"/>
           </a:p>
@@ -6693,7 +6693,7 @@
                 <a:ea typeface="Arial" pitchFamily="34" charset="-122"/>
                 <a:cs typeface="Arial" pitchFamily="34" charset="-120"/>
               </a:rPr>
-              <a:t>11件（18.3%）</a:t>
+              <a:t>11件（17.7%）</a:t>
             </a:r>
             <a:endParaRPr lang="en-US" sz="1600" dirty="0"/>
           </a:p>
@@ -6953,7 +6953,7 @@
                 <a:ea typeface="Arial" pitchFamily="34" charset="-122"/>
                 <a:cs typeface="Arial" pitchFamily="34" charset="-120"/>
               </a:rPr>
-              <a:t>高評価レビュー（8-10点: 49件）の分析から、主要な強みテーマを抽出しています。立地・アクセス、客室清潔感、スタッフ対応が高評価の中心的テーマです。</a:t>
+              <a:t>高評価レビュー（8-10点: 51件）の分析から、主要な強みテーマを抽出しています。立地・アクセス、客室清潔感、スタッフ対応が高評価の中心的テーマです。</a:t>
             </a:r>
             <a:endParaRPr lang="en-US" sz="1200" dirty="0"/>
           </a:p>
@@ -7993,7 +7993,7 @@
                 <a:ea typeface="Arial" pitchFamily="34" charset="-122"/>
                 <a:cs typeface="Arial" pitchFamily="34" charset="-120"/>
               </a:rPr>
-              <a:t>全体平均 8.87点 → 目標 9.37点</a:t>
+              <a:t>全体平均 8.90点 → 目標 9.40点</a:t>
             </a:r>
             <a:endParaRPr lang="en-US" sz="1200" dirty="0"/>
           </a:p>
@@ -8010,7 +8010,7 @@
                 <a:ea typeface="Arial" pitchFamily="34" charset="-122"/>
                 <a:cs typeface="Arial" pitchFamily="34" charset="-120"/>
               </a:rPr>
-              <a:t>高評価率 81.7% → 目標 86.7%</a:t>
+              <a:t>高評価率 82.3% → 目標 87.3%</a:t>
             </a:r>
             <a:endParaRPr lang="en-US" sz="1200" dirty="0"/>
           </a:p>

--- a/納品レポート/ホテル別レポート/daiwa_osaki_口コミ分析レポート.pptx
+++ b/納品レポート/ホテル別レポート/daiwa_osaki_口コミ分析レポート.pptx
@@ -249,10 +249,10 @@
                     <c:v>Trip.com</c:v>
                   </c:pt>
                   <c:pt idx="1">
-                    <c:v>Agoda</c:v>
+                    <c:v>Booking.com</c:v>
                   </c:pt>
                   <c:pt idx="2">
-                    <c:v>Booking.com</c:v>
+                    <c:v>Agoda</c:v>
                   </c:pt>
                   <c:pt idx="3">
                     <c:v>楽天トラベル</c:v>
@@ -280,7 +280,7 @@
                   <c:v>9</c:v>
                 </c:pt>
                 <c:pt idx="2">
-                  <c:v>9</c:v>
+                  <c:v>8.67</c:v>
                 </c:pt>
                 <c:pt idx="3">
                   <c:v>8.67</c:v>
@@ -595,7 +595,7 @@
                   <c:v>11</c:v>
                 </c:pt>
                 <c:pt idx="3">
-                  <c:v>6</c:v>
+                  <c:v>7</c:v>
                 </c:pt>
                 <c:pt idx="4">
                   <c:v>5</c:v>
@@ -2486,7 +2486,7 @@
                 <a:ea typeface="Arial" pitchFamily="34" charset="-122"/>
                 <a:cs typeface="Arial" pitchFamily="34" charset="-120"/>
               </a:rPr>
-              <a:t>レビュー総数：62件</a:t>
+              <a:t>レビュー総数：63件</a:t>
             </a:r>
             <a:endParaRPr lang="en-US" sz="1000" dirty="0"/>
           </a:p>
@@ -2766,7 +2766,7 @@
                 <a:ea typeface="Arial" pitchFamily="34" charset="-122"/>
                 <a:cs typeface="Arial" pitchFamily="34" charset="-120"/>
               </a:rPr>
-              <a:t>ダイワロイネットホテル東京大崎は全体平均8.90点（10pt換算）、高評価率82.3%を達成しています。本レポートで示した改善施策を段階的に実施することで、さらなる顧客満足度向上が期待できます。</a:t>
+              <a:t>ダイワロイネットホテル東京大崎は全体平均8.87点（10pt換算）、高評価率81.0%を達成しています。本レポートで示した改善施策を段階的に実施することで、さらなる顧客満足度向上が期待できます。</a:t>
             </a:r>
             <a:endParaRPr lang="en-US" sz="1200" dirty="0"/>
           </a:p>
@@ -3203,7 +3203,7 @@
                 <a:ea typeface="Arial" pitchFamily="34" charset="-122"/>
                 <a:cs typeface="Arial" pitchFamily="34" charset="-120"/>
               </a:rPr>
-              <a:t>8.90</a:t>
+              <a:t>8.87</a:t>
             </a:r>
             <a:endParaRPr lang="en-US" sz="2800" dirty="0"/>
           </a:p>
@@ -3321,7 +3321,7 @@
                 <a:ea typeface="Arial" pitchFamily="34" charset="-122"/>
                 <a:cs typeface="Arial" pitchFamily="34" charset="-120"/>
               </a:rPr>
-              <a:t>82.3%</a:t>
+              <a:t>81.0%</a:t>
             </a:r>
             <a:endParaRPr lang="en-US" sz="2800" dirty="0"/>
           </a:p>
@@ -3557,7 +3557,7 @@
                 <a:ea typeface="Arial" pitchFamily="34" charset="-122"/>
                 <a:cs typeface="Arial" pitchFamily="34" charset="-120"/>
               </a:rPr>
-              <a:t>62件</a:t>
+              <a:t>63件</a:t>
             </a:r>
             <a:endParaRPr lang="en-US" sz="2800" dirty="0"/>
           </a:p>
@@ -4570,7 +4570,7 @@
                           <a:ea typeface="Arial" pitchFamily="34" charset="-122"/>
                           <a:cs typeface="Arial" pitchFamily="34" charset="-120"/>
                         </a:rPr>
-                        <a:t>Agoda</a:t>
+                        <a:t>Booking.com</a:t>
                       </a:r>
                       <a:endParaRPr lang="en-US" sz="800" dirty="0">
                         <a:latin typeface="Arial" charset="0"/>
@@ -4638,7 +4638,7 @@
                           <a:ea typeface="Arial" pitchFamily="34" charset="-122"/>
                           <a:cs typeface="Arial" pitchFamily="34" charset="-120"/>
                         </a:rPr>
-                        <a:t>5</a:t>
+                        <a:t>27</a:t>
                       </a:r>
                       <a:endParaRPr lang="en-US" sz="800" dirty="0">
                         <a:latin typeface="Arial" charset="0"/>
@@ -4912,7 +4912,7 @@
                           <a:ea typeface="Arial" pitchFamily="34" charset="-122"/>
                           <a:cs typeface="Arial" pitchFamily="34" charset="-120"/>
                         </a:rPr>
-                        <a:t>Booking.com</a:t>
+                        <a:t>Agoda</a:t>
                       </a:r>
                       <a:endParaRPr lang="en-US" sz="800" dirty="0">
                         <a:latin typeface="Arial" charset="0"/>
@@ -4980,7 +4980,7 @@
                           <a:ea typeface="Arial" pitchFamily="34" charset="-122"/>
                           <a:cs typeface="Arial" pitchFamily="34" charset="-120"/>
                         </a:rPr>
-                        <a:t>27</a:t>
+                        <a:t>6</a:t>
                       </a:r>
                       <a:endParaRPr lang="en-US" sz="800" dirty="0">
                         <a:latin typeface="Arial" charset="0"/>
@@ -5048,7 +5048,7 @@
                           <a:ea typeface="Arial" pitchFamily="34" charset="-122"/>
                           <a:cs typeface="Arial" pitchFamily="34" charset="-120"/>
                         </a:rPr>
-                        <a:t>9.00/10</a:t>
+                        <a:t>8.67/10</a:t>
                       </a:r>
                       <a:endParaRPr lang="en-US" sz="800" dirty="0">
                         <a:latin typeface="Arial" charset="0"/>
@@ -5116,7 +5116,7 @@
                           <a:ea typeface="Arial" pitchFamily="34" charset="-122"/>
                           <a:cs typeface="Arial" pitchFamily="34" charset="-120"/>
                         </a:rPr>
-                        <a:t>9.00</a:t>
+                        <a:t>8.67</a:t>
                       </a:r>
                       <a:endParaRPr lang="en-US" sz="800" dirty="0">
                         <a:latin typeface="Arial" charset="0"/>
@@ -5184,7 +5184,7 @@
                           <a:ea typeface="Arial" pitchFamily="34" charset="-122"/>
                           <a:cs typeface="Arial" pitchFamily="34" charset="-120"/>
                         </a:rPr>
-                        <a:t>優秀</a:t>
+                        <a:t>良好</a:t>
                       </a:r>
                       <a:endParaRPr lang="en-US" sz="800" dirty="0">
                         <a:latin typeface="Arial" charset="0"/>
@@ -6595,7 +6595,7 @@
                 <a:ea typeface="Arial" pitchFamily="34" charset="-122"/>
                 <a:cs typeface="Arial" pitchFamily="34" charset="-120"/>
               </a:rPr>
-              <a:t>51件（82.3%）</a:t>
+              <a:t>51件（81.0%）</a:t>
             </a:r>
             <a:endParaRPr lang="en-US" sz="1600" dirty="0"/>
           </a:p>
@@ -6693,7 +6693,7 @@
                 <a:ea typeface="Arial" pitchFamily="34" charset="-122"/>
                 <a:cs typeface="Arial" pitchFamily="34" charset="-120"/>
               </a:rPr>
-              <a:t>11件（17.7%）</a:t>
+              <a:t>12件（19.0%）</a:t>
             </a:r>
             <a:endParaRPr lang="en-US" sz="1600" dirty="0"/>
           </a:p>
@@ -7213,7 +7213,7 @@
                 <a:ea typeface="Arial" pitchFamily="34" charset="-122"/>
                 <a:cs typeface="Arial" pitchFamily="34" charset="-120"/>
               </a:rPr>
-              <a:t>低評価・中評価レビュー（11件）から改善課題を優先度別に整理しています。S/A/B/Cの4段階で優先度を設定し、計画的な改善を推進します。</a:t>
+              <a:t>低評価・中評価レビュー（12件）から改善課題を優先度別に整理しています。S/A/B/Cの4段階で優先度を設定し、計画的な改善を推進します。</a:t>
             </a:r>
             <a:endParaRPr lang="en-US" sz="1200" dirty="0"/>
           </a:p>
@@ -7993,7 +7993,7 @@
                 <a:ea typeface="Arial" pitchFamily="34" charset="-122"/>
                 <a:cs typeface="Arial" pitchFamily="34" charset="-120"/>
               </a:rPr>
-              <a:t>全体平均 8.90点 → 目標 9.40点</a:t>
+              <a:t>全体平均 8.87点 → 目標 9.37点</a:t>
             </a:r>
             <a:endParaRPr lang="en-US" sz="1200" dirty="0"/>
           </a:p>
@@ -8010,7 +8010,7 @@
                 <a:ea typeface="Arial" pitchFamily="34" charset="-122"/>
                 <a:cs typeface="Arial" pitchFamily="34" charset="-120"/>
               </a:rPr>
-              <a:t>高評価率 82.3% → 目標 87.3%</a:t>
+              <a:t>高評価率 81.0% → 目標 86.0%</a:t>
             </a:r>
             <a:endParaRPr lang="en-US" sz="1200" dirty="0"/>
           </a:p>

--- a/納品レポート/ホテル別レポート/daiwa_osaki_口コミ分析レポート.pptx
+++ b/納品レポート/ホテル別レポート/daiwa_osaki_口コミ分析レポート.pptx
@@ -252,10 +252,10 @@
                     <c:v>Booking.com</c:v>
                   </c:pt>
                   <c:pt idx="2">
-                    <c:v>Agoda</c:v>
+                    <c:v>楽天トラベル</c:v>
                   </c:pt>
                   <c:pt idx="3">
-                    <c:v>楽天トラベル</c:v>
+                    <c:v>Agoda</c:v>
                   </c:pt>
                   <c:pt idx="4">
                     <c:v>Google</c:v>
@@ -277,13 +277,13 @@
                   <c:v>9.67</c:v>
                 </c:pt>
                 <c:pt idx="1">
-                  <c:v>9</c:v>
+                  <c:v>8.93</c:v>
                 </c:pt>
                 <c:pt idx="2">
                   <c:v>8.67</c:v>
                 </c:pt>
                 <c:pt idx="3">
-                  <c:v>8.67</c:v>
+                  <c:v>8.57</c:v>
                 </c:pt>
                 <c:pt idx="4">
                   <c:v>8.29</c:v>
@@ -586,16 +586,16 @@
                 <c:formatCode>General</c:formatCode>
                 <c:ptCount val="5"/>
                 <c:pt idx="0">
-                  <c:v>32</c:v>
+                  <c:v>33</c:v>
                 </c:pt>
                 <c:pt idx="1">
                   <c:v>8</c:v>
                 </c:pt>
                 <c:pt idx="2">
-                  <c:v>11</c:v>
+                  <c:v>13</c:v>
                 </c:pt>
                 <c:pt idx="3">
-                  <c:v>7</c:v>
+                  <c:v>8</c:v>
                 </c:pt>
                 <c:pt idx="4">
                   <c:v>5</c:v>
@@ -2486,7 +2486,7 @@
                 <a:ea typeface="Arial" pitchFamily="34" charset="-122"/>
                 <a:cs typeface="Arial" pitchFamily="34" charset="-120"/>
               </a:rPr>
-              <a:t>レビュー総数：63件</a:t>
+              <a:t>レビュー総数：67件</a:t>
             </a:r>
             <a:endParaRPr lang="en-US" sz="1000" dirty="0"/>
           </a:p>
@@ -2766,7 +2766,7 @@
                 <a:ea typeface="Arial" pitchFamily="34" charset="-122"/>
                 <a:cs typeface="Arial" pitchFamily="34" charset="-120"/>
               </a:rPr>
-              <a:t>ダイワロイネットホテル東京大崎は全体平均8.87点（10pt換算）、高評価率81.0%を達成しています。本レポートで示した改善施策を段階的に実施することで、さらなる顧客満足度向上が期待できます。</a:t>
+              <a:t>ダイワロイネットホテル東京大崎は全体平均8.84点（10pt換算）、高評価率80.6%を達成しています。本レポートで示した改善施策を段階的に実施することで、さらなる顧客満足度向上が期待できます。</a:t>
             </a:r>
             <a:endParaRPr lang="en-US" sz="1200" dirty="0"/>
           </a:p>
@@ -3203,7 +3203,7 @@
                 <a:ea typeface="Arial" pitchFamily="34" charset="-122"/>
                 <a:cs typeface="Arial" pitchFamily="34" charset="-120"/>
               </a:rPr>
-              <a:t>8.87</a:t>
+              <a:t>8.84</a:t>
             </a:r>
             <a:endParaRPr lang="en-US" sz="2800" dirty="0"/>
           </a:p>
@@ -3321,7 +3321,7 @@
                 <a:ea typeface="Arial" pitchFamily="34" charset="-122"/>
                 <a:cs typeface="Arial" pitchFamily="34" charset="-120"/>
               </a:rPr>
-              <a:t>81.0%</a:t>
+              <a:t>80.6%</a:t>
             </a:r>
             <a:endParaRPr lang="en-US" sz="2800" dirty="0"/>
           </a:p>
@@ -3557,7 +3557,7 @@
                 <a:ea typeface="Arial" pitchFamily="34" charset="-122"/>
                 <a:cs typeface="Arial" pitchFamily="34" charset="-120"/>
               </a:rPr>
-              <a:t>63件</a:t>
+              <a:t>67件</a:t>
             </a:r>
             <a:endParaRPr lang="en-US" sz="2800" dirty="0"/>
           </a:p>
@@ -4638,7 +4638,7 @@
                           <a:ea typeface="Arial" pitchFamily="34" charset="-122"/>
                           <a:cs typeface="Arial" pitchFamily="34" charset="-120"/>
                         </a:rPr>
-                        <a:t>27</a:t>
+                        <a:t>30</a:t>
                       </a:r>
                       <a:endParaRPr lang="en-US" sz="800" dirty="0">
                         <a:latin typeface="Arial" charset="0"/>
@@ -4706,7 +4706,7 @@
                           <a:ea typeface="Arial" pitchFamily="34" charset="-122"/>
                           <a:cs typeface="Arial" pitchFamily="34" charset="-120"/>
                         </a:rPr>
-                        <a:t>9.00/10</a:t>
+                        <a:t>8.93/10</a:t>
                       </a:r>
                       <a:endParaRPr lang="en-US" sz="800" dirty="0">
                         <a:latin typeface="Arial" charset="0"/>
@@ -4774,7 +4774,7 @@
                           <a:ea typeface="Arial" pitchFamily="34" charset="-122"/>
                           <a:cs typeface="Arial" pitchFamily="34" charset="-120"/>
                         </a:rPr>
-                        <a:t>9.00</a:t>
+                        <a:t>8.93</a:t>
                       </a:r>
                       <a:endParaRPr lang="en-US" sz="800" dirty="0">
                         <a:latin typeface="Arial" charset="0"/>
@@ -4842,7 +4842,349 @@
                           <a:ea typeface="Arial" pitchFamily="34" charset="-122"/>
                           <a:cs typeface="Arial" pitchFamily="34" charset="-120"/>
                         </a:rPr>
-                        <a:t>優秀</a:t>
+                        <a:t>良好</a:t>
+                      </a:r>
+                      <a:endParaRPr lang="en-US" sz="800" dirty="0">
+                        <a:latin typeface="Arial" charset="0"/>
+                        <a:ea typeface="Arial" charset="0"/>
+                        <a:cs typeface="Arial" charset="0"/>
+                      </a:endParaRPr>
+                    </a:p>
+                  </a:txBody>
+                  <a:tcPr marL="91440" marR="91440" marT="45720" marB="45720">
+                    <a:lnL w="6350" cap="flat" cmpd="sng" algn="ctr">
+                      <a:solidFill>
+                        <a:srgbClr val="CCCCCC"/>
+                      </a:solidFill>
+                      <a:prstDash val="solid"/>
+                      <a:round/>
+                      <a:headEnd type="none" w="med" len="med"/>
+                      <a:tailEnd type="none" w="med" len="med"/>
+                    </a:lnL>
+                    <a:lnR w="6350" cap="flat" cmpd="sng" algn="ctr">
+                      <a:solidFill>
+                        <a:srgbClr val="CCCCCC"/>
+                      </a:solidFill>
+                      <a:prstDash val="solid"/>
+                      <a:round/>
+                      <a:headEnd type="none" w="med" len="med"/>
+                      <a:tailEnd type="none" w="med" len="med"/>
+                    </a:lnR>
+                    <a:lnT w="6350" cap="flat" cmpd="sng" algn="ctr">
+                      <a:solidFill>
+                        <a:srgbClr val="CCCCCC"/>
+                      </a:solidFill>
+                      <a:prstDash val="solid"/>
+                      <a:round/>
+                      <a:headEnd type="none" w="med" len="med"/>
+                      <a:tailEnd type="none" w="med" len="med"/>
+                    </a:lnT>
+                    <a:lnB w="6350" cap="flat" cmpd="sng" algn="ctr">
+                      <a:solidFill>
+                        <a:srgbClr val="CCCCCC"/>
+                      </a:solidFill>
+                      <a:prstDash val="solid"/>
+                      <a:round/>
+                      <a:headEnd type="none" w="med" len="med"/>
+                      <a:tailEnd type="none" w="med" len="med"/>
+                    </a:lnB>
+                    <a:solidFill>
+                      <a:srgbClr val="FFFFFF"/>
+                    </a:solidFill>
+                  </a:tcPr>
+                </a:tc>
+              </a:tr>
+              <a:tr h="0">
+                <a:tc>
+                  <a:txBody>
+                    <a:bodyPr/>
+                    <a:lstStyle/>
+                    <a:p>
+                      <a:pPr algn="ctr" indent="0" marL="0">
+                        <a:buNone/>
+                      </a:pPr>
+                      <a:r>
+                        <a:rPr lang="en-US" sz="800" dirty="0">
+                          <a:solidFill>
+                            <a:srgbClr val="000000"/>
+                          </a:solidFill>
+                          <a:latin typeface="Arial" pitchFamily="34" charset="0"/>
+                          <a:ea typeface="Arial" pitchFamily="34" charset="-122"/>
+                          <a:cs typeface="Arial" pitchFamily="34" charset="-120"/>
+                        </a:rPr>
+                        <a:t>楽天トラベル</a:t>
+                      </a:r>
+                      <a:endParaRPr lang="en-US" sz="800" dirty="0">
+                        <a:latin typeface="Arial" charset="0"/>
+                        <a:ea typeface="Arial" charset="0"/>
+                        <a:cs typeface="Arial" charset="0"/>
+                      </a:endParaRPr>
+                    </a:p>
+                  </a:txBody>
+                  <a:tcPr marL="91440" marR="91440" marT="45720" marB="45720">
+                    <a:lnL w="6350" cap="flat" cmpd="sng" algn="ctr">
+                      <a:solidFill>
+                        <a:srgbClr val="CCCCCC"/>
+                      </a:solidFill>
+                      <a:prstDash val="solid"/>
+                      <a:round/>
+                      <a:headEnd type="none" w="med" len="med"/>
+                      <a:tailEnd type="none" w="med" len="med"/>
+                    </a:lnL>
+                    <a:lnR w="6350" cap="flat" cmpd="sng" algn="ctr">
+                      <a:solidFill>
+                        <a:srgbClr val="CCCCCC"/>
+                      </a:solidFill>
+                      <a:prstDash val="solid"/>
+                      <a:round/>
+                      <a:headEnd type="none" w="med" len="med"/>
+                      <a:tailEnd type="none" w="med" len="med"/>
+                    </a:lnR>
+                    <a:lnT w="6350" cap="flat" cmpd="sng" algn="ctr">
+                      <a:solidFill>
+                        <a:srgbClr val="CCCCCC"/>
+                      </a:solidFill>
+                      <a:prstDash val="solid"/>
+                      <a:round/>
+                      <a:headEnd type="none" w="med" len="med"/>
+                      <a:tailEnd type="none" w="med" len="med"/>
+                    </a:lnT>
+                    <a:lnB w="6350" cap="flat" cmpd="sng" algn="ctr">
+                      <a:solidFill>
+                        <a:srgbClr val="CCCCCC"/>
+                      </a:solidFill>
+                      <a:prstDash val="solid"/>
+                      <a:round/>
+                      <a:headEnd type="none" w="med" len="med"/>
+                      <a:tailEnd type="none" w="med" len="med"/>
+                    </a:lnB>
+                    <a:solidFill>
+                      <a:srgbClr val="FFFFFF"/>
+                    </a:solidFill>
+                  </a:tcPr>
+                </a:tc>
+                <a:tc>
+                  <a:txBody>
+                    <a:bodyPr/>
+                    <a:lstStyle/>
+                    <a:p>
+                      <a:pPr algn="ctr" indent="0" marL="0">
+                        <a:buNone/>
+                      </a:pPr>
+                      <a:r>
+                        <a:rPr lang="en-US" sz="800" dirty="0">
+                          <a:solidFill>
+                            <a:srgbClr val="000000"/>
+                          </a:solidFill>
+                          <a:latin typeface="Arial" pitchFamily="34" charset="0"/>
+                          <a:ea typeface="Arial" pitchFamily="34" charset="-122"/>
+                          <a:cs typeface="Arial" pitchFamily="34" charset="-120"/>
+                        </a:rPr>
+                        <a:t>3</a:t>
+                      </a:r>
+                      <a:endParaRPr lang="en-US" sz="800" dirty="0">
+                        <a:latin typeface="Arial" charset="0"/>
+                        <a:ea typeface="Arial" charset="0"/>
+                        <a:cs typeface="Arial" charset="0"/>
+                      </a:endParaRPr>
+                    </a:p>
+                  </a:txBody>
+                  <a:tcPr marL="91440" marR="91440" marT="45720" marB="45720">
+                    <a:lnL w="6350" cap="flat" cmpd="sng" algn="ctr">
+                      <a:solidFill>
+                        <a:srgbClr val="CCCCCC"/>
+                      </a:solidFill>
+                      <a:prstDash val="solid"/>
+                      <a:round/>
+                      <a:headEnd type="none" w="med" len="med"/>
+                      <a:tailEnd type="none" w="med" len="med"/>
+                    </a:lnL>
+                    <a:lnR w="6350" cap="flat" cmpd="sng" algn="ctr">
+                      <a:solidFill>
+                        <a:srgbClr val="CCCCCC"/>
+                      </a:solidFill>
+                      <a:prstDash val="solid"/>
+                      <a:round/>
+                      <a:headEnd type="none" w="med" len="med"/>
+                      <a:tailEnd type="none" w="med" len="med"/>
+                    </a:lnR>
+                    <a:lnT w="6350" cap="flat" cmpd="sng" algn="ctr">
+                      <a:solidFill>
+                        <a:srgbClr val="CCCCCC"/>
+                      </a:solidFill>
+                      <a:prstDash val="solid"/>
+                      <a:round/>
+                      <a:headEnd type="none" w="med" len="med"/>
+                      <a:tailEnd type="none" w="med" len="med"/>
+                    </a:lnT>
+                    <a:lnB w="6350" cap="flat" cmpd="sng" algn="ctr">
+                      <a:solidFill>
+                        <a:srgbClr val="CCCCCC"/>
+                      </a:solidFill>
+                      <a:prstDash val="solid"/>
+                      <a:round/>
+                      <a:headEnd type="none" w="med" len="med"/>
+                      <a:tailEnd type="none" w="med" len="med"/>
+                    </a:lnB>
+                    <a:solidFill>
+                      <a:srgbClr val="FFFFFF"/>
+                    </a:solidFill>
+                  </a:tcPr>
+                </a:tc>
+                <a:tc>
+                  <a:txBody>
+                    <a:bodyPr/>
+                    <a:lstStyle/>
+                    <a:p>
+                      <a:pPr algn="ctr" indent="0" marL="0">
+                        <a:buNone/>
+                      </a:pPr>
+                      <a:r>
+                        <a:rPr lang="en-US" sz="800" dirty="0">
+                          <a:solidFill>
+                            <a:srgbClr val="000000"/>
+                          </a:solidFill>
+                          <a:latin typeface="Arial" pitchFamily="34" charset="0"/>
+                          <a:ea typeface="Arial" pitchFamily="34" charset="-122"/>
+                          <a:cs typeface="Arial" pitchFamily="34" charset="-120"/>
+                        </a:rPr>
+                        <a:t>4.33/5</a:t>
+                      </a:r>
+                      <a:endParaRPr lang="en-US" sz="800" dirty="0">
+                        <a:latin typeface="Arial" charset="0"/>
+                        <a:ea typeface="Arial" charset="0"/>
+                        <a:cs typeface="Arial" charset="0"/>
+                      </a:endParaRPr>
+                    </a:p>
+                  </a:txBody>
+                  <a:tcPr marL="91440" marR="91440" marT="45720" marB="45720">
+                    <a:lnL w="6350" cap="flat" cmpd="sng" algn="ctr">
+                      <a:solidFill>
+                        <a:srgbClr val="CCCCCC"/>
+                      </a:solidFill>
+                      <a:prstDash val="solid"/>
+                      <a:round/>
+                      <a:headEnd type="none" w="med" len="med"/>
+                      <a:tailEnd type="none" w="med" len="med"/>
+                    </a:lnL>
+                    <a:lnR w="6350" cap="flat" cmpd="sng" algn="ctr">
+                      <a:solidFill>
+                        <a:srgbClr val="CCCCCC"/>
+                      </a:solidFill>
+                      <a:prstDash val="solid"/>
+                      <a:round/>
+                      <a:headEnd type="none" w="med" len="med"/>
+                      <a:tailEnd type="none" w="med" len="med"/>
+                    </a:lnR>
+                    <a:lnT w="6350" cap="flat" cmpd="sng" algn="ctr">
+                      <a:solidFill>
+                        <a:srgbClr val="CCCCCC"/>
+                      </a:solidFill>
+                      <a:prstDash val="solid"/>
+                      <a:round/>
+                      <a:headEnd type="none" w="med" len="med"/>
+                      <a:tailEnd type="none" w="med" len="med"/>
+                    </a:lnT>
+                    <a:lnB w="6350" cap="flat" cmpd="sng" algn="ctr">
+                      <a:solidFill>
+                        <a:srgbClr val="CCCCCC"/>
+                      </a:solidFill>
+                      <a:prstDash val="solid"/>
+                      <a:round/>
+                      <a:headEnd type="none" w="med" len="med"/>
+                      <a:tailEnd type="none" w="med" len="med"/>
+                    </a:lnB>
+                    <a:solidFill>
+                      <a:srgbClr val="FFFFFF"/>
+                    </a:solidFill>
+                  </a:tcPr>
+                </a:tc>
+                <a:tc>
+                  <a:txBody>
+                    <a:bodyPr/>
+                    <a:lstStyle/>
+                    <a:p>
+                      <a:pPr algn="ctr" indent="0" marL="0">
+                        <a:buNone/>
+                      </a:pPr>
+                      <a:r>
+                        <a:rPr lang="en-US" sz="800" dirty="0">
+                          <a:solidFill>
+                            <a:srgbClr val="000000"/>
+                          </a:solidFill>
+                          <a:latin typeface="Arial" pitchFamily="34" charset="0"/>
+                          <a:ea typeface="Arial" pitchFamily="34" charset="-122"/>
+                          <a:cs typeface="Arial" pitchFamily="34" charset="-120"/>
+                        </a:rPr>
+                        <a:t>8.67</a:t>
+                      </a:r>
+                      <a:endParaRPr lang="en-US" sz="800" dirty="0">
+                        <a:latin typeface="Arial" charset="0"/>
+                        <a:ea typeface="Arial" charset="0"/>
+                        <a:cs typeface="Arial" charset="0"/>
+                      </a:endParaRPr>
+                    </a:p>
+                  </a:txBody>
+                  <a:tcPr marL="91440" marR="91440" marT="45720" marB="45720">
+                    <a:lnL w="6350" cap="flat" cmpd="sng" algn="ctr">
+                      <a:solidFill>
+                        <a:srgbClr val="CCCCCC"/>
+                      </a:solidFill>
+                      <a:prstDash val="solid"/>
+                      <a:round/>
+                      <a:headEnd type="none" w="med" len="med"/>
+                      <a:tailEnd type="none" w="med" len="med"/>
+                    </a:lnL>
+                    <a:lnR w="6350" cap="flat" cmpd="sng" algn="ctr">
+                      <a:solidFill>
+                        <a:srgbClr val="CCCCCC"/>
+                      </a:solidFill>
+                      <a:prstDash val="solid"/>
+                      <a:round/>
+                      <a:headEnd type="none" w="med" len="med"/>
+                      <a:tailEnd type="none" w="med" len="med"/>
+                    </a:lnR>
+                    <a:lnT w="6350" cap="flat" cmpd="sng" algn="ctr">
+                      <a:solidFill>
+                        <a:srgbClr val="CCCCCC"/>
+                      </a:solidFill>
+                      <a:prstDash val="solid"/>
+                      <a:round/>
+                      <a:headEnd type="none" w="med" len="med"/>
+                      <a:tailEnd type="none" w="med" len="med"/>
+                    </a:lnT>
+                    <a:lnB w="6350" cap="flat" cmpd="sng" algn="ctr">
+                      <a:solidFill>
+                        <a:srgbClr val="CCCCCC"/>
+                      </a:solidFill>
+                      <a:prstDash val="solid"/>
+                      <a:round/>
+                      <a:headEnd type="none" w="med" len="med"/>
+                      <a:tailEnd type="none" w="med" len="med"/>
+                    </a:lnB>
+                    <a:solidFill>
+                      <a:srgbClr val="FFFFFF"/>
+                    </a:solidFill>
+                  </a:tcPr>
+                </a:tc>
+                <a:tc>
+                  <a:txBody>
+                    <a:bodyPr/>
+                    <a:lstStyle/>
+                    <a:p>
+                      <a:pPr algn="ctr" indent="0" marL="0">
+                        <a:buNone/>
+                      </a:pPr>
+                      <a:r>
+                        <a:rPr lang="en-US" sz="800" dirty="0">
+                          <a:solidFill>
+                            <a:srgbClr val="000000"/>
+                          </a:solidFill>
+                          <a:latin typeface="Arial" pitchFamily="34" charset="0"/>
+                          <a:ea typeface="Arial" pitchFamily="34" charset="-122"/>
+                          <a:cs typeface="Arial" pitchFamily="34" charset="-120"/>
+                        </a:rPr>
+                        <a:t>良好</a:t>
                       </a:r>
                       <a:endParaRPr lang="en-US" sz="800" dirty="0">
                         <a:latin typeface="Arial" charset="0"/>
@@ -4980,7 +5322,7 @@
                           <a:ea typeface="Arial" pitchFamily="34" charset="-122"/>
                           <a:cs typeface="Arial" pitchFamily="34" charset="-120"/>
                         </a:rPr>
-                        <a:t>6</a:t>
+                        <a:t>7</a:t>
                       </a:r>
                       <a:endParaRPr lang="en-US" sz="800" dirty="0">
                         <a:latin typeface="Arial" charset="0"/>
@@ -5048,7 +5390,7 @@
                           <a:ea typeface="Arial" pitchFamily="34" charset="-122"/>
                           <a:cs typeface="Arial" pitchFamily="34" charset="-120"/>
                         </a:rPr>
-                        <a:t>8.67/10</a:t>
+                        <a:t>8.57/10</a:t>
                       </a:r>
                       <a:endParaRPr lang="en-US" sz="800" dirty="0">
                         <a:latin typeface="Arial" charset="0"/>
@@ -5116,349 +5458,7 @@
                           <a:ea typeface="Arial" pitchFamily="34" charset="-122"/>
                           <a:cs typeface="Arial" pitchFamily="34" charset="-120"/>
                         </a:rPr>
-                        <a:t>8.67</a:t>
-                      </a:r>
-                      <a:endParaRPr lang="en-US" sz="800" dirty="0">
-                        <a:latin typeface="Arial" charset="0"/>
-                        <a:ea typeface="Arial" charset="0"/>
-                        <a:cs typeface="Arial" charset="0"/>
-                      </a:endParaRPr>
-                    </a:p>
-                  </a:txBody>
-                  <a:tcPr marL="91440" marR="91440" marT="45720" marB="45720">
-                    <a:lnL w="6350" cap="flat" cmpd="sng" algn="ctr">
-                      <a:solidFill>
-                        <a:srgbClr val="CCCCCC"/>
-                      </a:solidFill>
-                      <a:prstDash val="solid"/>
-                      <a:round/>
-                      <a:headEnd type="none" w="med" len="med"/>
-                      <a:tailEnd type="none" w="med" len="med"/>
-                    </a:lnL>
-                    <a:lnR w="6350" cap="flat" cmpd="sng" algn="ctr">
-                      <a:solidFill>
-                        <a:srgbClr val="CCCCCC"/>
-                      </a:solidFill>
-                      <a:prstDash val="solid"/>
-                      <a:round/>
-                      <a:headEnd type="none" w="med" len="med"/>
-                      <a:tailEnd type="none" w="med" len="med"/>
-                    </a:lnR>
-                    <a:lnT w="6350" cap="flat" cmpd="sng" algn="ctr">
-                      <a:solidFill>
-                        <a:srgbClr val="CCCCCC"/>
-                      </a:solidFill>
-                      <a:prstDash val="solid"/>
-                      <a:round/>
-                      <a:headEnd type="none" w="med" len="med"/>
-                      <a:tailEnd type="none" w="med" len="med"/>
-                    </a:lnT>
-                    <a:lnB w="6350" cap="flat" cmpd="sng" algn="ctr">
-                      <a:solidFill>
-                        <a:srgbClr val="CCCCCC"/>
-                      </a:solidFill>
-                      <a:prstDash val="solid"/>
-                      <a:round/>
-                      <a:headEnd type="none" w="med" len="med"/>
-                      <a:tailEnd type="none" w="med" len="med"/>
-                    </a:lnB>
-                    <a:solidFill>
-                      <a:srgbClr val="FFFFFF"/>
-                    </a:solidFill>
-                  </a:tcPr>
-                </a:tc>
-                <a:tc>
-                  <a:txBody>
-                    <a:bodyPr/>
-                    <a:lstStyle/>
-                    <a:p>
-                      <a:pPr algn="ctr" indent="0" marL="0">
-                        <a:buNone/>
-                      </a:pPr>
-                      <a:r>
-                        <a:rPr lang="en-US" sz="800" dirty="0">
-                          <a:solidFill>
-                            <a:srgbClr val="000000"/>
-                          </a:solidFill>
-                          <a:latin typeface="Arial" pitchFamily="34" charset="0"/>
-                          <a:ea typeface="Arial" pitchFamily="34" charset="-122"/>
-                          <a:cs typeface="Arial" pitchFamily="34" charset="-120"/>
-                        </a:rPr>
-                        <a:t>良好</a:t>
-                      </a:r>
-                      <a:endParaRPr lang="en-US" sz="800" dirty="0">
-                        <a:latin typeface="Arial" charset="0"/>
-                        <a:ea typeface="Arial" charset="0"/>
-                        <a:cs typeface="Arial" charset="0"/>
-                      </a:endParaRPr>
-                    </a:p>
-                  </a:txBody>
-                  <a:tcPr marL="91440" marR="91440" marT="45720" marB="45720">
-                    <a:lnL w="6350" cap="flat" cmpd="sng" algn="ctr">
-                      <a:solidFill>
-                        <a:srgbClr val="CCCCCC"/>
-                      </a:solidFill>
-                      <a:prstDash val="solid"/>
-                      <a:round/>
-                      <a:headEnd type="none" w="med" len="med"/>
-                      <a:tailEnd type="none" w="med" len="med"/>
-                    </a:lnL>
-                    <a:lnR w="6350" cap="flat" cmpd="sng" algn="ctr">
-                      <a:solidFill>
-                        <a:srgbClr val="CCCCCC"/>
-                      </a:solidFill>
-                      <a:prstDash val="solid"/>
-                      <a:round/>
-                      <a:headEnd type="none" w="med" len="med"/>
-                      <a:tailEnd type="none" w="med" len="med"/>
-                    </a:lnR>
-                    <a:lnT w="6350" cap="flat" cmpd="sng" algn="ctr">
-                      <a:solidFill>
-                        <a:srgbClr val="CCCCCC"/>
-                      </a:solidFill>
-                      <a:prstDash val="solid"/>
-                      <a:round/>
-                      <a:headEnd type="none" w="med" len="med"/>
-                      <a:tailEnd type="none" w="med" len="med"/>
-                    </a:lnT>
-                    <a:lnB w="6350" cap="flat" cmpd="sng" algn="ctr">
-                      <a:solidFill>
-                        <a:srgbClr val="CCCCCC"/>
-                      </a:solidFill>
-                      <a:prstDash val="solid"/>
-                      <a:round/>
-                      <a:headEnd type="none" w="med" len="med"/>
-                      <a:tailEnd type="none" w="med" len="med"/>
-                    </a:lnB>
-                    <a:solidFill>
-                      <a:srgbClr val="FFFFFF"/>
-                    </a:solidFill>
-                  </a:tcPr>
-                </a:tc>
-              </a:tr>
-              <a:tr h="0">
-                <a:tc>
-                  <a:txBody>
-                    <a:bodyPr/>
-                    <a:lstStyle/>
-                    <a:p>
-                      <a:pPr algn="ctr" indent="0" marL="0">
-                        <a:buNone/>
-                      </a:pPr>
-                      <a:r>
-                        <a:rPr lang="en-US" sz="800" dirty="0">
-                          <a:solidFill>
-                            <a:srgbClr val="000000"/>
-                          </a:solidFill>
-                          <a:latin typeface="Arial" pitchFamily="34" charset="0"/>
-                          <a:ea typeface="Arial" pitchFamily="34" charset="-122"/>
-                          <a:cs typeface="Arial" pitchFamily="34" charset="-120"/>
-                        </a:rPr>
-                        <a:t>楽天トラベル</a:t>
-                      </a:r>
-                      <a:endParaRPr lang="en-US" sz="800" dirty="0">
-                        <a:latin typeface="Arial" charset="0"/>
-                        <a:ea typeface="Arial" charset="0"/>
-                        <a:cs typeface="Arial" charset="0"/>
-                      </a:endParaRPr>
-                    </a:p>
-                  </a:txBody>
-                  <a:tcPr marL="91440" marR="91440" marT="45720" marB="45720">
-                    <a:lnL w="6350" cap="flat" cmpd="sng" algn="ctr">
-                      <a:solidFill>
-                        <a:srgbClr val="CCCCCC"/>
-                      </a:solidFill>
-                      <a:prstDash val="solid"/>
-                      <a:round/>
-                      <a:headEnd type="none" w="med" len="med"/>
-                      <a:tailEnd type="none" w="med" len="med"/>
-                    </a:lnL>
-                    <a:lnR w="6350" cap="flat" cmpd="sng" algn="ctr">
-                      <a:solidFill>
-                        <a:srgbClr val="CCCCCC"/>
-                      </a:solidFill>
-                      <a:prstDash val="solid"/>
-                      <a:round/>
-                      <a:headEnd type="none" w="med" len="med"/>
-                      <a:tailEnd type="none" w="med" len="med"/>
-                    </a:lnR>
-                    <a:lnT w="6350" cap="flat" cmpd="sng" algn="ctr">
-                      <a:solidFill>
-                        <a:srgbClr val="CCCCCC"/>
-                      </a:solidFill>
-                      <a:prstDash val="solid"/>
-                      <a:round/>
-                      <a:headEnd type="none" w="med" len="med"/>
-                      <a:tailEnd type="none" w="med" len="med"/>
-                    </a:lnT>
-                    <a:lnB w="6350" cap="flat" cmpd="sng" algn="ctr">
-                      <a:solidFill>
-                        <a:srgbClr val="CCCCCC"/>
-                      </a:solidFill>
-                      <a:prstDash val="solid"/>
-                      <a:round/>
-                      <a:headEnd type="none" w="med" len="med"/>
-                      <a:tailEnd type="none" w="med" len="med"/>
-                    </a:lnB>
-                    <a:solidFill>
-                      <a:srgbClr val="FFFFFF"/>
-                    </a:solidFill>
-                  </a:tcPr>
-                </a:tc>
-                <a:tc>
-                  <a:txBody>
-                    <a:bodyPr/>
-                    <a:lstStyle/>
-                    <a:p>
-                      <a:pPr algn="ctr" indent="0" marL="0">
-                        <a:buNone/>
-                      </a:pPr>
-                      <a:r>
-                        <a:rPr lang="en-US" sz="800" dirty="0">
-                          <a:solidFill>
-                            <a:srgbClr val="000000"/>
-                          </a:solidFill>
-                          <a:latin typeface="Arial" pitchFamily="34" charset="0"/>
-                          <a:ea typeface="Arial" pitchFamily="34" charset="-122"/>
-                          <a:cs typeface="Arial" pitchFamily="34" charset="-120"/>
-                        </a:rPr>
-                        <a:t>3</a:t>
-                      </a:r>
-                      <a:endParaRPr lang="en-US" sz="800" dirty="0">
-                        <a:latin typeface="Arial" charset="0"/>
-                        <a:ea typeface="Arial" charset="0"/>
-                        <a:cs typeface="Arial" charset="0"/>
-                      </a:endParaRPr>
-                    </a:p>
-                  </a:txBody>
-                  <a:tcPr marL="91440" marR="91440" marT="45720" marB="45720">
-                    <a:lnL w="6350" cap="flat" cmpd="sng" algn="ctr">
-                      <a:solidFill>
-                        <a:srgbClr val="CCCCCC"/>
-                      </a:solidFill>
-                      <a:prstDash val="solid"/>
-                      <a:round/>
-                      <a:headEnd type="none" w="med" len="med"/>
-                      <a:tailEnd type="none" w="med" len="med"/>
-                    </a:lnL>
-                    <a:lnR w="6350" cap="flat" cmpd="sng" algn="ctr">
-                      <a:solidFill>
-                        <a:srgbClr val="CCCCCC"/>
-                      </a:solidFill>
-                      <a:prstDash val="solid"/>
-                      <a:round/>
-                      <a:headEnd type="none" w="med" len="med"/>
-                      <a:tailEnd type="none" w="med" len="med"/>
-                    </a:lnR>
-                    <a:lnT w="6350" cap="flat" cmpd="sng" algn="ctr">
-                      <a:solidFill>
-                        <a:srgbClr val="CCCCCC"/>
-                      </a:solidFill>
-                      <a:prstDash val="solid"/>
-                      <a:round/>
-                      <a:headEnd type="none" w="med" len="med"/>
-                      <a:tailEnd type="none" w="med" len="med"/>
-                    </a:lnT>
-                    <a:lnB w="6350" cap="flat" cmpd="sng" algn="ctr">
-                      <a:solidFill>
-                        <a:srgbClr val="CCCCCC"/>
-                      </a:solidFill>
-                      <a:prstDash val="solid"/>
-                      <a:round/>
-                      <a:headEnd type="none" w="med" len="med"/>
-                      <a:tailEnd type="none" w="med" len="med"/>
-                    </a:lnB>
-                    <a:solidFill>
-                      <a:srgbClr val="FFFFFF"/>
-                    </a:solidFill>
-                  </a:tcPr>
-                </a:tc>
-                <a:tc>
-                  <a:txBody>
-                    <a:bodyPr/>
-                    <a:lstStyle/>
-                    <a:p>
-                      <a:pPr algn="ctr" indent="0" marL="0">
-                        <a:buNone/>
-                      </a:pPr>
-                      <a:r>
-                        <a:rPr lang="en-US" sz="800" dirty="0">
-                          <a:solidFill>
-                            <a:srgbClr val="000000"/>
-                          </a:solidFill>
-                          <a:latin typeface="Arial" pitchFamily="34" charset="0"/>
-                          <a:ea typeface="Arial" pitchFamily="34" charset="-122"/>
-                          <a:cs typeface="Arial" pitchFamily="34" charset="-120"/>
-                        </a:rPr>
-                        <a:t>4.33/5</a:t>
-                      </a:r>
-                      <a:endParaRPr lang="en-US" sz="800" dirty="0">
-                        <a:latin typeface="Arial" charset="0"/>
-                        <a:ea typeface="Arial" charset="0"/>
-                        <a:cs typeface="Arial" charset="0"/>
-                      </a:endParaRPr>
-                    </a:p>
-                  </a:txBody>
-                  <a:tcPr marL="91440" marR="91440" marT="45720" marB="45720">
-                    <a:lnL w="6350" cap="flat" cmpd="sng" algn="ctr">
-                      <a:solidFill>
-                        <a:srgbClr val="CCCCCC"/>
-                      </a:solidFill>
-                      <a:prstDash val="solid"/>
-                      <a:round/>
-                      <a:headEnd type="none" w="med" len="med"/>
-                      <a:tailEnd type="none" w="med" len="med"/>
-                    </a:lnL>
-                    <a:lnR w="6350" cap="flat" cmpd="sng" algn="ctr">
-                      <a:solidFill>
-                        <a:srgbClr val="CCCCCC"/>
-                      </a:solidFill>
-                      <a:prstDash val="solid"/>
-                      <a:round/>
-                      <a:headEnd type="none" w="med" len="med"/>
-                      <a:tailEnd type="none" w="med" len="med"/>
-                    </a:lnR>
-                    <a:lnT w="6350" cap="flat" cmpd="sng" algn="ctr">
-                      <a:solidFill>
-                        <a:srgbClr val="CCCCCC"/>
-                      </a:solidFill>
-                      <a:prstDash val="solid"/>
-                      <a:round/>
-                      <a:headEnd type="none" w="med" len="med"/>
-                      <a:tailEnd type="none" w="med" len="med"/>
-                    </a:lnT>
-                    <a:lnB w="6350" cap="flat" cmpd="sng" algn="ctr">
-                      <a:solidFill>
-                        <a:srgbClr val="CCCCCC"/>
-                      </a:solidFill>
-                      <a:prstDash val="solid"/>
-                      <a:round/>
-                      <a:headEnd type="none" w="med" len="med"/>
-                      <a:tailEnd type="none" w="med" len="med"/>
-                    </a:lnB>
-                    <a:solidFill>
-                      <a:srgbClr val="FFFFFF"/>
-                    </a:solidFill>
-                  </a:tcPr>
-                </a:tc>
-                <a:tc>
-                  <a:txBody>
-                    <a:bodyPr/>
-                    <a:lstStyle/>
-                    <a:p>
-                      <a:pPr algn="ctr" indent="0" marL="0">
-                        <a:buNone/>
-                      </a:pPr>
-                      <a:r>
-                        <a:rPr lang="en-US" sz="800" dirty="0">
-                          <a:solidFill>
-                            <a:srgbClr val="000000"/>
-                          </a:solidFill>
-                          <a:latin typeface="Arial" pitchFamily="34" charset="0"/>
-                          <a:ea typeface="Arial" pitchFamily="34" charset="-122"/>
-                          <a:cs typeface="Arial" pitchFamily="34" charset="-120"/>
-                        </a:rPr>
-                        <a:t>8.67</a:t>
+                        <a:t>8.57</a:t>
                       </a:r>
                       <a:endParaRPr lang="en-US" sz="800" dirty="0">
                         <a:latin typeface="Arial" charset="0"/>
@@ -6595,7 +6595,7 @@
                 <a:ea typeface="Arial" pitchFamily="34" charset="-122"/>
                 <a:cs typeface="Arial" pitchFamily="34" charset="-120"/>
               </a:rPr>
-              <a:t>51件（81.0%）</a:t>
+              <a:t>54件（80.6%）</a:t>
             </a:r>
             <a:endParaRPr lang="en-US" sz="1600" dirty="0"/>
           </a:p>
@@ -6693,7 +6693,7 @@
                 <a:ea typeface="Arial" pitchFamily="34" charset="-122"/>
                 <a:cs typeface="Arial" pitchFamily="34" charset="-120"/>
               </a:rPr>
-              <a:t>12件（19.0%）</a:t>
+              <a:t>13件（19.4%）</a:t>
             </a:r>
             <a:endParaRPr lang="en-US" sz="1600" dirty="0"/>
           </a:p>
@@ -6953,7 +6953,7 @@
                 <a:ea typeface="Arial" pitchFamily="34" charset="-122"/>
                 <a:cs typeface="Arial" pitchFamily="34" charset="-120"/>
               </a:rPr>
-              <a:t>高評価レビュー（8-10点: 51件）の分析から、主要な強みテーマを抽出しています。立地・アクセス、客室清潔感、スタッフ対応が高評価の中心的テーマです。</a:t>
+              <a:t>高評価レビュー（8-10点: 54件）の分析から、主要な強みテーマを抽出しています。立地・アクセス、客室清潔感、スタッフ対応が高評価の中心的テーマです。</a:t>
             </a:r>
             <a:endParaRPr lang="en-US" sz="1200" dirty="0"/>
           </a:p>
@@ -7213,7 +7213,7 @@
                 <a:ea typeface="Arial" pitchFamily="34" charset="-122"/>
                 <a:cs typeface="Arial" pitchFamily="34" charset="-120"/>
               </a:rPr>
-              <a:t>低評価・中評価レビュー（12件）から改善課題を優先度別に整理しています。S/A/B/Cの4段階で優先度を設定し、計画的な改善を推進します。</a:t>
+              <a:t>低評価・中評価レビュー（13件）から改善課題を優先度別に整理しています。S/A/B/Cの4段階で優先度を設定し、計画的な改善を推進します。</a:t>
             </a:r>
             <a:endParaRPr lang="en-US" sz="1200" dirty="0"/>
           </a:p>
@@ -7993,7 +7993,7 @@
                 <a:ea typeface="Arial" pitchFamily="34" charset="-122"/>
                 <a:cs typeface="Arial" pitchFamily="34" charset="-120"/>
               </a:rPr>
-              <a:t>全体平均 8.87点 → 目標 9.37点</a:t>
+              <a:t>全体平均 8.84点 → 目標 9.34点</a:t>
             </a:r>
             <a:endParaRPr lang="en-US" sz="1200" dirty="0"/>
           </a:p>
@@ -8010,7 +8010,7 @@
                 <a:ea typeface="Arial" pitchFamily="34" charset="-122"/>
                 <a:cs typeface="Arial" pitchFamily="34" charset="-120"/>
               </a:rPr>
-              <a:t>高評価率 81.0% → 目標 86.0%</a:t>
+              <a:t>高評価率 80.6% → 目標 85.6%</a:t>
             </a:r>
             <a:endParaRPr lang="en-US" sz="1200" dirty="0"/>
           </a:p>

--- a/納品レポート/ホテル別レポート/daiwa_osaki_口コミ分析レポート.pptx
+++ b/納品レポート/ホテル別レポート/daiwa_osaki_口コミ分析レポート.pptx
@@ -186,13 +186,13 @@
                     <c:v>Booking.com</c:v>
                   </c:pt>
                   <c:pt idx="2">
-                    <c:v>楽天トラベル</c:v>
+                    <c:v>Agoda</c:v>
                   </c:pt>
                   <c:pt idx="3">
-                    <c:v>Agoda</c:v>
+                    <c:v>Google</c:v>
                   </c:pt>
                   <c:pt idx="4">
-                    <c:v>Google</c:v>
+                    <c:v>楽天トラベル</c:v>
                   </c:pt>
                   <c:pt idx="5">
                     <c:v>じゃらん</c:v>
@@ -208,22 +208,22 @@
                 <c:formatCode>General</c:formatCode>
                 <c:ptCount val="6"/>
                 <c:pt idx="0">
-                  <c:v>9.67</c:v>
+                  <c:v>10</c:v>
                 </c:pt>
                 <c:pt idx="1">
-                  <c:v>8.93</c:v>
+                  <c:v>8.79</c:v>
                 </c:pt>
                 <c:pt idx="2">
-                  <c:v>8.67</c:v>
+                  <c:v>8.25</c:v>
                 </c:pt>
                 <c:pt idx="3">
-                  <c:v>8.57</c:v>
+                  <c:v>8</c:v>
                 </c:pt>
                 <c:pt idx="4">
-                  <c:v>8.29</c:v>
+                  <c:v>8</c:v>
                 </c:pt>
                 <c:pt idx="5">
-                  <c:v>8</c:v>
+                  <c:v>7.67</c:v>
                 </c:pt>
               </c:numCache>
             </c:numRef>
@@ -566,10 +566,10 @@
               <c:numCache>
                 <c:ptCount val="3"/>
                 <c:pt idx="0">
-                  <c:v>54</c:v>
+                  <c:v>31</c:v>
                 </c:pt>
                 <c:pt idx="1">
-                  <c:v>13</c:v>
+                  <c:v>11</c:v>
                 </c:pt>
                 <c:pt idx="2">
                   <c:v>0</c:v>
@@ -767,19 +767,19 @@
                 <c:formatCode>General</c:formatCode>
                 <c:ptCount val="5"/>
                 <c:pt idx="0">
-                  <c:v>33</c:v>
+                  <c:v>19</c:v>
                 </c:pt>
                 <c:pt idx="1">
-                  <c:v>8</c:v>
+                  <c:v>3</c:v>
                 </c:pt>
                 <c:pt idx="2">
-                  <c:v>13</c:v>
+                  <c:v>9</c:v>
                 </c:pt>
                 <c:pt idx="3">
-                  <c:v>8</c:v>
+                  <c:v>7</c:v>
                 </c:pt>
                 <c:pt idx="4">
-                  <c:v>5</c:v>
+                  <c:v>4</c:v>
                 </c:pt>
               </c:numCache>
             </c:numRef>
@@ -2710,7 +2710,7 @@
                 <a:ea typeface="Arial" pitchFamily="34" charset="-122"/>
                 <a:cs typeface="Arial" pitchFamily="34" charset="-120"/>
               </a:rPr>
-              <a:t>分析対象期間：2026年2月〜3月</a:t>
+              <a:t>分析対象期間：2026年3月〜4月</a:t>
             </a:r>
             <a:endParaRPr lang="en-US" sz="1000" dirty="0"/>
           </a:p>
@@ -2730,7 +2730,7 @@
                 <a:ea typeface="Arial" pitchFamily="34" charset="-122"/>
                 <a:cs typeface="Arial" pitchFamily="34" charset="-120"/>
               </a:rPr>
-              <a:t>レビュー総数：67件（6サイト）</a:t>
+              <a:t>レビュー総数：42件（6サイト）</a:t>
             </a:r>
             <a:endParaRPr lang="en-US" sz="1000" dirty="0"/>
           </a:p>
@@ -2750,7 +2750,7 @@
                 <a:ea typeface="Arial" pitchFamily="34" charset="-122"/>
                 <a:cs typeface="Arial" pitchFamily="34" charset="-120"/>
               </a:rPr>
-              <a:t>作成日：2026年4月2日</a:t>
+              <a:t>作成日：2026年4月5日</a:t>
             </a:r>
             <a:endParaRPr lang="en-US" sz="1000" dirty="0"/>
           </a:p>
@@ -3296,7 +3296,7 @@
                           <a:ea typeface="Arial" pitchFamily="34" charset="-122"/>
                           <a:cs typeface="Arial" pitchFamily="34" charset="-120"/>
                         </a:rPr>
-                        <a:t>8.84点</a:t>
+                        <a:t>8.62点</a:t>
                       </a:r>
                       <a:endParaRPr lang="en-US" sz="1000" dirty="0">
                         <a:latin typeface="Arial" charset="0"/>
@@ -3364,7 +3364,7 @@
                           <a:ea typeface="Arial" pitchFamily="34" charset="-122"/>
                           <a:cs typeface="Arial" pitchFamily="34" charset="-120"/>
                         </a:rPr>
-                        <a:t>9.1点以上</a:t>
+                        <a:t>8.9点以上</a:t>
                       </a:r>
                       <a:endParaRPr lang="en-US" sz="1000" dirty="0">
                         <a:latin typeface="Arial" charset="0"/>
@@ -3570,7 +3570,7 @@
                           <a:ea typeface="Arial" pitchFamily="34" charset="-122"/>
                           <a:cs typeface="Arial" pitchFamily="34" charset="-120"/>
                         </a:rPr>
-                        <a:t>80.6%</a:t>
+                        <a:t>73.8%</a:t>
                       </a:r>
                       <a:endParaRPr lang="en-US" sz="1000" dirty="0">
                         <a:latin typeface="Arial" charset="0"/>
@@ -3638,7 +3638,7 @@
                           <a:ea typeface="Arial" pitchFamily="34" charset="-122"/>
                           <a:cs typeface="Arial" pitchFamily="34" charset="-120"/>
                         </a:rPr>
-                        <a:t>86%以上</a:t>
+                        <a:t>79%以上</a:t>
                       </a:r>
                       <a:endParaRPr lang="en-US" sz="1000" dirty="0">
                         <a:latin typeface="Arial" charset="0"/>
@@ -4118,7 +4118,7 @@
                           <a:ea typeface="Arial" pitchFamily="34" charset="-122"/>
                           <a:cs typeface="Arial" pitchFamily="34" charset="-120"/>
                         </a:rPr>
-                        <a:t>8.0点</a:t>
+                        <a:t>7.7点</a:t>
                       </a:r>
                       <a:endParaRPr lang="en-US" sz="1000" dirty="0">
                         <a:latin typeface="Arial" charset="0"/>
@@ -4186,7 +4186,7 @@
                           <a:ea typeface="Arial" pitchFamily="34" charset="-122"/>
                           <a:cs typeface="Arial" pitchFamily="34" charset="-120"/>
                         </a:rPr>
-                        <a:t>9.0点以上</a:t>
+                        <a:t>8.7点以上</a:t>
                       </a:r>
                       <a:endParaRPr lang="en-US" sz="1000" dirty="0">
                         <a:latin typeface="Arial" charset="0"/>
@@ -4666,7 +4666,7 @@
                           <a:ea typeface="Arial" pitchFamily="34" charset="-122"/>
                           <a:cs typeface="Arial" pitchFamily="34" charset="-120"/>
                         </a:rPr>
-                        <a:t>約4件/期間</a:t>
+                        <a:t>約3件/期間</a:t>
                       </a:r>
                       <a:endParaRPr lang="en-US" sz="1000" dirty="0">
                         <a:latin typeface="Arial" charset="0"/>
@@ -4734,7 +4734,7 @@
                           <a:ea typeface="Arial" pitchFamily="34" charset="-122"/>
                           <a:cs typeface="Arial" pitchFamily="34" charset="-120"/>
                         </a:rPr>
-                        <a:t>2件以下</a:t>
+                        <a:t>1件以下</a:t>
                       </a:r>
                       <a:endParaRPr lang="en-US" sz="1000" dirty="0">
                         <a:latin typeface="Arial" charset="0"/>
@@ -5305,7 +5305,7 @@
                 <a:ea typeface="Arial" pitchFamily="34" charset="-122"/>
                 <a:cs typeface="Arial" pitchFamily="34" charset="-120"/>
               </a:rPr>
-              <a:t>8.84</a:t>
+              <a:t>8.62</a:t>
             </a:r>
             <a:endParaRPr lang="en-US" sz="3200" dirty="0"/>
           </a:p>
@@ -5430,7 +5430,7 @@
                 <a:ea typeface="Arial" pitchFamily="34" charset="-122"/>
                 <a:cs typeface="Arial" pitchFamily="34" charset="-120"/>
               </a:rPr>
-              <a:t>80.6%</a:t>
+              <a:t>73.8%</a:t>
             </a:r>
             <a:endParaRPr lang="en-US" sz="3200" dirty="0"/>
           </a:p>
@@ -5680,7 +5680,7 @@
                 <a:ea typeface="Arial" pitchFamily="34" charset="-122"/>
                 <a:cs typeface="Arial" pitchFamily="34" charset="-120"/>
               </a:rPr>
-              <a:t>67件</a:t>
+              <a:t>42件</a:t>
             </a:r>
             <a:endParaRPr lang="en-US" sz="3200" dirty="0"/>
           </a:p>
@@ -5828,7 +5828,7 @@
                 <a:ea typeface="Arial" pitchFamily="34" charset="-122"/>
                 <a:cs typeface="Arial" pitchFamily="34" charset="-120"/>
               </a:rPr>
-              <a:t>  Good location with the train station is just 3 minutes of...</a:t>
+              <a:t>  大崎出張で2回目のお世話となりました  前回同様に清潔、快適、駅近等々で今回もお世話になった次第です 大崎出張で2...</a:t>
             </a:r>
             <a:endParaRPr lang="en-US" sz="1100" dirty="0"/>
           </a:p>
@@ -5868,7 +5868,7 @@
                 <a:ea typeface="Arial" pitchFamily="34" charset="-122"/>
                 <a:cs typeface="Arial" pitchFamily="34" charset="-120"/>
               </a:rPr>
-              <a:t>  非常好乾凈 とても清潔</a:t>
+              <a:t>  大崎出張で2回目のお世話となりました  前回同様に清潔、快適、駅近等々で今回もお世話になった次第です 大崎出張で2...</a:t>
             </a:r>
             <a:endParaRPr lang="en-US" sz="1100" dirty="0"/>
           </a:p>
@@ -5888,7 +5888,7 @@
                 <a:ea typeface="Arial" pitchFamily="34" charset="-122"/>
                 <a:cs typeface="Arial" pitchFamily="34" charset="-120"/>
               </a:rPr>
-              <a:t>スタッフの対応 </a:t>
+              <a:t>快適さ・設備 </a:t>
             </a:r>
             <a:endParaRPr lang="en-US" sz="1100" dirty="0"/>
           </a:p>
@@ -5908,7 +5908,7 @@
                 <a:ea typeface="Arial" pitchFamily="34" charset="-122"/>
                 <a:cs typeface="Arial" pitchFamily="34" charset="-120"/>
               </a:rPr>
-              <a:t>  結局、貴重品は毎日フロントに預けなければなりませんでした</a:t>
+              <a:t>  大崎出張で2回目のお世話となりました  前回同様に清潔、快適、駅近等々で今回もお世話になった次第です 大崎出張で2...</a:t>
             </a:r>
             <a:endParaRPr lang="en-US" sz="1100" dirty="0"/>
           </a:p>
@@ -6076,7 +6076,7 @@
                 <a:ea typeface="Arial" pitchFamily="34" charset="-122"/>
                 <a:cs typeface="Arial" pitchFamily="34" charset="-120"/>
               </a:rPr>
-              <a:t>浴室・水回り </a:t>
+              <a:t>対応・サービスの不満 </a:t>
             </a:r>
             <a:endParaRPr lang="en-US" sz="1100" dirty="0"/>
           </a:p>
@@ -6096,7 +6096,7 @@
                 <a:ea typeface="Arial" pitchFamily="34" charset="-122"/>
                 <a:cs typeface="Arial" pitchFamily="34" charset="-120"/>
               </a:rPr>
-              <a:t>  広いお部屋にしていただいたおかげで、トイレとお風呂も十分な広さがあり、子供と二人で着替えやトイレ利用をしても全く窮...</a:t>
+              <a:t>  残念ながら、私の部屋のマットレスは沈み込んでいて、全く快適ではありませんでした</a:t>
             </a:r>
             <a:endParaRPr lang="en-US" sz="1100" dirty="0"/>
           </a:p>
@@ -6116,7 +6116,7 @@
                 <a:ea typeface="Arial" pitchFamily="34" charset="-122"/>
                 <a:cs typeface="Arial" pitchFamily="34" charset="-120"/>
               </a:rPr>
-              <a:t>部屋の狭さ </a:t>
+              <a:t>設備の老朽化 </a:t>
             </a:r>
             <a:endParaRPr lang="en-US" sz="1100" dirty="0"/>
           </a:p>
@@ -6136,7 +6136,7 @@
                 <a:ea typeface="Arial" pitchFamily="34" charset="-122"/>
                 <a:cs typeface="Arial" pitchFamily="34" charset="-120"/>
               </a:rPr>
-              <a:t>  広いお部屋にしていただいたおかげで、トイレとお風呂も十分な広さがあり、子供と二人で着替えやトイレ利用をしても全く窮...</a:t>
+              <a:t>  Gloomy cold breakfast in gloomy cold pseudo Italian resta...</a:t>
             </a:r>
             <a:endParaRPr lang="en-US" sz="1100" dirty="0"/>
           </a:p>
@@ -6489,7 +6489,7 @@
                 <a:ea typeface="Arial" pitchFamily="34" charset="-122"/>
                 <a:cs typeface="Arial" pitchFamily="34" charset="-120"/>
               </a:rPr>
-              <a:t>8.84</a:t>
+              <a:t>8.62</a:t>
             </a:r>
             <a:endParaRPr lang="en-US" sz="3200" dirty="0"/>
           </a:p>
@@ -6537,7 +6537,7 @@
             <a:avLst/>
           </a:prstGeom>
           <a:solidFill>
-            <a:srgbClr val="16A34A"/>
+            <a:srgbClr val="D4A843"/>
           </a:solidFill>
           <a:ln/>
         </p:spPr>
@@ -6608,13 +6608,13 @@
             <a:r>
               <a:rPr lang="en-US" sz="3200" b="1" dirty="0">
                 <a:solidFill>
-                  <a:srgbClr val="16A34A"/>
+                  <a:srgbClr val="D4A843"/>
                 </a:solidFill>
                 <a:latin typeface="Arial" pitchFamily="34" charset="0"/>
                 <a:ea typeface="Arial" pitchFamily="34" charset="-122"/>
                 <a:cs typeface="Arial" pitchFamily="34" charset="-120"/>
               </a:rPr>
-              <a:t>80.6%</a:t>
+              <a:t>73.8%</a:t>
             </a:r>
             <a:endParaRPr lang="en-US" sz="3200" dirty="0"/>
           </a:p>
@@ -6864,7 +6864,7 @@
                 <a:ea typeface="Arial" pitchFamily="34" charset="-122"/>
                 <a:cs typeface="Arial" pitchFamily="34" charset="-120"/>
               </a:rPr>
-              <a:t>67件</a:t>
+              <a:t>42件</a:t>
             </a:r>
             <a:endParaRPr lang="en-US" sz="3200" dirty="0"/>
           </a:p>
@@ -7285,7 +7285,7 @@
                 <a:ea typeface="Arial" pitchFamily="34" charset="-122"/>
                 <a:cs typeface="Arial" pitchFamily="34" charset="-120"/>
               </a:rPr>
-              <a:t>Trip.com(9.67)が最高スコア。</a:t>
+              <a:t>Trip.com(10.00)が最高スコア。</a:t>
             </a:r>
             <a:endParaRPr lang="en-US" sz="1100" dirty="0"/>
           </a:p>
@@ -7334,7 +7334,7 @@
                 <a:ea typeface="Arial" pitchFamily="34" charset="-122"/>
                 <a:cs typeface="Arial" pitchFamily="34" charset="-120"/>
               </a:rPr>
-              <a:t>じゃらん(8.0)が相対的に低い。口コミ返信の強化が急務</a:t>
+              <a:t>じゃらん(7.7)が相対的に低い。口コミ返信の強化が急務</a:t>
             </a:r>
             <a:endParaRPr lang="en-US" sz="1100" dirty="0"/>
           </a:p>
@@ -7843,7 +7843,7 @@
                           <a:ea typeface="Arial" pitchFamily="34" charset="-122"/>
                           <a:cs typeface="Arial" pitchFamily="34" charset="-120"/>
                         </a:rPr>
-                        <a:t>12</a:t>
+                        <a:t>6</a:t>
                       </a:r>
                       <a:endParaRPr lang="en-US" sz="900" dirty="0">
                         <a:latin typeface="Arial" charset="0"/>
@@ -7911,7 +7911,7 @@
                           <a:ea typeface="Arial" pitchFamily="34" charset="-122"/>
                           <a:cs typeface="Arial" pitchFamily="34" charset="-120"/>
                         </a:rPr>
-                        <a:t>9.67</a:t>
+                        <a:t>10</a:t>
                       </a:r>
                       <a:endParaRPr lang="en-US" sz="900" dirty="0">
                         <a:latin typeface="Arial" charset="0"/>
@@ -8047,7 +8047,7 @@
                           <a:ea typeface="Arial" pitchFamily="34" charset="-122"/>
                           <a:cs typeface="Arial" pitchFamily="34" charset="-120"/>
                         </a:rPr>
-                        <a:t>9.67</a:t>
+                        <a:t>10</a:t>
                       </a:r>
                       <a:endParaRPr lang="en-US" sz="900" dirty="0">
                         <a:latin typeface="Arial" charset="0"/>
@@ -8185,7 +8185,7 @@
                           <a:ea typeface="Arial" pitchFamily="34" charset="-122"/>
                           <a:cs typeface="Arial" pitchFamily="34" charset="-120"/>
                         </a:rPr>
-                        <a:t>30</a:t>
+                        <a:t>19</a:t>
                       </a:r>
                       <a:endParaRPr lang="en-US" sz="900" dirty="0">
                         <a:latin typeface="Arial" charset="0"/>
@@ -8253,7 +8253,7 @@
                           <a:ea typeface="Arial" pitchFamily="34" charset="-122"/>
                           <a:cs typeface="Arial" pitchFamily="34" charset="-120"/>
                         </a:rPr>
-                        <a:t>8.93</a:t>
+                        <a:t>8.79</a:t>
                       </a:r>
                       <a:endParaRPr lang="en-US" sz="900" dirty="0">
                         <a:latin typeface="Arial" charset="0"/>
@@ -8389,7 +8389,691 @@
                           <a:ea typeface="Arial" pitchFamily="34" charset="-122"/>
                           <a:cs typeface="Arial" pitchFamily="34" charset="-120"/>
                         </a:rPr>
-                        <a:t>8.93</a:t>
+                        <a:t>8.79</a:t>
+                      </a:r>
+                      <a:endParaRPr lang="en-US" sz="900" dirty="0">
+                        <a:latin typeface="Arial" charset="0"/>
+                        <a:ea typeface="Arial" charset="0"/>
+                        <a:cs typeface="Arial" charset="0"/>
+                      </a:endParaRPr>
+                    </a:p>
+                  </a:txBody>
+                  <a:tcPr marL="91440" marR="91440" marT="45720" marB="45720">
+                    <a:lnL w="6350" cap="flat" cmpd="sng" algn="ctr">
+                      <a:solidFill>
+                        <a:srgbClr val="CBD5E1"/>
+                      </a:solidFill>
+                      <a:prstDash val="solid"/>
+                      <a:round/>
+                      <a:headEnd type="none" w="med" len="med"/>
+                      <a:tailEnd type="none" w="med" len="med"/>
+                    </a:lnL>
+                    <a:lnR w="6350" cap="flat" cmpd="sng" algn="ctr">
+                      <a:solidFill>
+                        <a:srgbClr val="CBD5E1"/>
+                      </a:solidFill>
+                      <a:prstDash val="solid"/>
+                      <a:round/>
+                      <a:headEnd type="none" w="med" len="med"/>
+                      <a:tailEnd type="none" w="med" len="med"/>
+                    </a:lnR>
+                    <a:lnT w="6350" cap="flat" cmpd="sng" algn="ctr">
+                      <a:solidFill>
+                        <a:srgbClr val="CBD5E1"/>
+                      </a:solidFill>
+                      <a:prstDash val="solid"/>
+                      <a:round/>
+                      <a:headEnd type="none" w="med" len="med"/>
+                      <a:tailEnd type="none" w="med" len="med"/>
+                    </a:lnT>
+                    <a:lnB w="6350" cap="flat" cmpd="sng" algn="ctr">
+                      <a:solidFill>
+                        <a:srgbClr val="CBD5E1"/>
+                      </a:solidFill>
+                      <a:prstDash val="solid"/>
+                      <a:round/>
+                      <a:headEnd type="none" w="med" len="med"/>
+                      <a:tailEnd type="none" w="med" len="med"/>
+                    </a:lnB>
+                    <a:solidFill>
+                      <a:srgbClr val="FFFFFF"/>
+                    </a:solidFill>
+                  </a:tcPr>
+                </a:tc>
+              </a:tr>
+              <a:tr h="201168">
+                <a:tc>
+                  <a:txBody>
+                    <a:bodyPr/>
+                    <a:lstStyle/>
+                    <a:p>
+                      <a:pPr algn="ctr" indent="0" marL="0">
+                        <a:buNone/>
+                      </a:pPr>
+                      <a:r>
+                        <a:rPr lang="en-US" sz="900" dirty="0">
+                          <a:solidFill>
+                            <a:srgbClr val="000000"/>
+                          </a:solidFill>
+                          <a:latin typeface="Arial" pitchFamily="34" charset="0"/>
+                          <a:ea typeface="Arial" pitchFamily="34" charset="-122"/>
+                          <a:cs typeface="Arial" pitchFamily="34" charset="-120"/>
+                        </a:rPr>
+                        <a:t>Agoda</a:t>
+                      </a:r>
+                      <a:endParaRPr lang="en-US" sz="900" dirty="0">
+                        <a:latin typeface="Arial" charset="0"/>
+                        <a:ea typeface="Arial" charset="0"/>
+                        <a:cs typeface="Arial" charset="0"/>
+                      </a:endParaRPr>
+                    </a:p>
+                  </a:txBody>
+                  <a:tcPr marL="91440" marR="91440" marT="45720" marB="45720">
+                    <a:lnL w="6350" cap="flat" cmpd="sng" algn="ctr">
+                      <a:solidFill>
+                        <a:srgbClr val="CBD5E1"/>
+                      </a:solidFill>
+                      <a:prstDash val="solid"/>
+                      <a:round/>
+                      <a:headEnd type="none" w="med" len="med"/>
+                      <a:tailEnd type="none" w="med" len="med"/>
+                    </a:lnL>
+                    <a:lnR w="6350" cap="flat" cmpd="sng" algn="ctr">
+                      <a:solidFill>
+                        <a:srgbClr val="CBD5E1"/>
+                      </a:solidFill>
+                      <a:prstDash val="solid"/>
+                      <a:round/>
+                      <a:headEnd type="none" w="med" len="med"/>
+                      <a:tailEnd type="none" w="med" len="med"/>
+                    </a:lnR>
+                    <a:lnT w="6350" cap="flat" cmpd="sng" algn="ctr">
+                      <a:solidFill>
+                        <a:srgbClr val="CBD5E1"/>
+                      </a:solidFill>
+                      <a:prstDash val="solid"/>
+                      <a:round/>
+                      <a:headEnd type="none" w="med" len="med"/>
+                      <a:tailEnd type="none" w="med" len="med"/>
+                    </a:lnT>
+                    <a:lnB w="6350" cap="flat" cmpd="sng" algn="ctr">
+                      <a:solidFill>
+                        <a:srgbClr val="CBD5E1"/>
+                      </a:solidFill>
+                      <a:prstDash val="solid"/>
+                      <a:round/>
+                      <a:headEnd type="none" w="med" len="med"/>
+                      <a:tailEnd type="none" w="med" len="med"/>
+                    </a:lnB>
+                    <a:solidFill>
+                      <a:srgbClr val="E8EFF8"/>
+                    </a:solidFill>
+                  </a:tcPr>
+                </a:tc>
+                <a:tc>
+                  <a:txBody>
+                    <a:bodyPr/>
+                    <a:lstStyle/>
+                    <a:p>
+                      <a:pPr algn="ctr" indent="0" marL="0">
+                        <a:buNone/>
+                      </a:pPr>
+                      <a:r>
+                        <a:rPr lang="en-US" sz="900" dirty="0">
+                          <a:solidFill>
+                            <a:srgbClr val="000000"/>
+                          </a:solidFill>
+                          <a:latin typeface="Arial" pitchFamily="34" charset="0"/>
+                          <a:ea typeface="Arial" pitchFamily="34" charset="-122"/>
+                          <a:cs typeface="Arial" pitchFamily="34" charset="-120"/>
+                        </a:rPr>
+                        <a:t>4</a:t>
+                      </a:r>
+                      <a:endParaRPr lang="en-US" sz="900" dirty="0">
+                        <a:latin typeface="Arial" charset="0"/>
+                        <a:ea typeface="Arial" charset="0"/>
+                        <a:cs typeface="Arial" charset="0"/>
+                      </a:endParaRPr>
+                    </a:p>
+                  </a:txBody>
+                  <a:tcPr marL="91440" marR="91440" marT="45720" marB="45720">
+                    <a:lnL w="6350" cap="flat" cmpd="sng" algn="ctr">
+                      <a:solidFill>
+                        <a:srgbClr val="CBD5E1"/>
+                      </a:solidFill>
+                      <a:prstDash val="solid"/>
+                      <a:round/>
+                      <a:headEnd type="none" w="med" len="med"/>
+                      <a:tailEnd type="none" w="med" len="med"/>
+                    </a:lnL>
+                    <a:lnR w="6350" cap="flat" cmpd="sng" algn="ctr">
+                      <a:solidFill>
+                        <a:srgbClr val="CBD5E1"/>
+                      </a:solidFill>
+                      <a:prstDash val="solid"/>
+                      <a:round/>
+                      <a:headEnd type="none" w="med" len="med"/>
+                      <a:tailEnd type="none" w="med" len="med"/>
+                    </a:lnR>
+                    <a:lnT w="6350" cap="flat" cmpd="sng" algn="ctr">
+                      <a:solidFill>
+                        <a:srgbClr val="CBD5E1"/>
+                      </a:solidFill>
+                      <a:prstDash val="solid"/>
+                      <a:round/>
+                      <a:headEnd type="none" w="med" len="med"/>
+                      <a:tailEnd type="none" w="med" len="med"/>
+                    </a:lnT>
+                    <a:lnB w="6350" cap="flat" cmpd="sng" algn="ctr">
+                      <a:solidFill>
+                        <a:srgbClr val="CBD5E1"/>
+                      </a:solidFill>
+                      <a:prstDash val="solid"/>
+                      <a:round/>
+                      <a:headEnd type="none" w="med" len="med"/>
+                      <a:tailEnd type="none" w="med" len="med"/>
+                    </a:lnB>
+                    <a:solidFill>
+                      <a:srgbClr val="E8EFF8"/>
+                    </a:solidFill>
+                  </a:tcPr>
+                </a:tc>
+                <a:tc>
+                  <a:txBody>
+                    <a:bodyPr/>
+                    <a:lstStyle/>
+                    <a:p>
+                      <a:pPr algn="ctr" indent="0" marL="0">
+                        <a:buNone/>
+                      </a:pPr>
+                      <a:r>
+                        <a:rPr lang="en-US" sz="900" dirty="0">
+                          <a:solidFill>
+                            <a:srgbClr val="000000"/>
+                          </a:solidFill>
+                          <a:latin typeface="Arial" pitchFamily="34" charset="0"/>
+                          <a:ea typeface="Arial" pitchFamily="34" charset="-122"/>
+                          <a:cs typeface="Arial" pitchFamily="34" charset="-120"/>
+                        </a:rPr>
+                        <a:t>8.25</a:t>
+                      </a:r>
+                      <a:endParaRPr lang="en-US" sz="900" dirty="0">
+                        <a:latin typeface="Arial" charset="0"/>
+                        <a:ea typeface="Arial" charset="0"/>
+                        <a:cs typeface="Arial" charset="0"/>
+                      </a:endParaRPr>
+                    </a:p>
+                  </a:txBody>
+                  <a:tcPr marL="91440" marR="91440" marT="45720" marB="45720">
+                    <a:lnL w="6350" cap="flat" cmpd="sng" algn="ctr">
+                      <a:solidFill>
+                        <a:srgbClr val="CBD5E1"/>
+                      </a:solidFill>
+                      <a:prstDash val="solid"/>
+                      <a:round/>
+                      <a:headEnd type="none" w="med" len="med"/>
+                      <a:tailEnd type="none" w="med" len="med"/>
+                    </a:lnL>
+                    <a:lnR w="6350" cap="flat" cmpd="sng" algn="ctr">
+                      <a:solidFill>
+                        <a:srgbClr val="CBD5E1"/>
+                      </a:solidFill>
+                      <a:prstDash val="solid"/>
+                      <a:round/>
+                      <a:headEnd type="none" w="med" len="med"/>
+                      <a:tailEnd type="none" w="med" len="med"/>
+                    </a:lnR>
+                    <a:lnT w="6350" cap="flat" cmpd="sng" algn="ctr">
+                      <a:solidFill>
+                        <a:srgbClr val="CBD5E1"/>
+                      </a:solidFill>
+                      <a:prstDash val="solid"/>
+                      <a:round/>
+                      <a:headEnd type="none" w="med" len="med"/>
+                      <a:tailEnd type="none" w="med" len="med"/>
+                    </a:lnT>
+                    <a:lnB w="6350" cap="flat" cmpd="sng" algn="ctr">
+                      <a:solidFill>
+                        <a:srgbClr val="CBD5E1"/>
+                      </a:solidFill>
+                      <a:prstDash val="solid"/>
+                      <a:round/>
+                      <a:headEnd type="none" w="med" len="med"/>
+                      <a:tailEnd type="none" w="med" len="med"/>
+                    </a:lnB>
+                    <a:solidFill>
+                      <a:srgbClr val="E8EFF8"/>
+                    </a:solidFill>
+                  </a:tcPr>
+                </a:tc>
+                <a:tc>
+                  <a:txBody>
+                    <a:bodyPr/>
+                    <a:lstStyle/>
+                    <a:p>
+                      <a:pPr algn="ctr" indent="0" marL="0">
+                        <a:buNone/>
+                      </a:pPr>
+                      <a:r>
+                        <a:rPr lang="en-US" sz="900" dirty="0">
+                          <a:solidFill>
+                            <a:srgbClr val="000000"/>
+                          </a:solidFill>
+                          <a:latin typeface="Arial" pitchFamily="34" charset="0"/>
+                          <a:ea typeface="Arial" pitchFamily="34" charset="-122"/>
+                          <a:cs typeface="Arial" pitchFamily="34" charset="-120"/>
+                        </a:rPr>
+                        <a:t>/10</a:t>
+                      </a:r>
+                      <a:endParaRPr lang="en-US" sz="900" dirty="0">
+                        <a:latin typeface="Arial" charset="0"/>
+                        <a:ea typeface="Arial" charset="0"/>
+                        <a:cs typeface="Arial" charset="0"/>
+                      </a:endParaRPr>
+                    </a:p>
+                  </a:txBody>
+                  <a:tcPr marL="91440" marR="91440" marT="45720" marB="45720">
+                    <a:lnL w="6350" cap="flat" cmpd="sng" algn="ctr">
+                      <a:solidFill>
+                        <a:srgbClr val="CBD5E1"/>
+                      </a:solidFill>
+                      <a:prstDash val="solid"/>
+                      <a:round/>
+                      <a:headEnd type="none" w="med" len="med"/>
+                      <a:tailEnd type="none" w="med" len="med"/>
+                    </a:lnL>
+                    <a:lnR w="6350" cap="flat" cmpd="sng" algn="ctr">
+                      <a:solidFill>
+                        <a:srgbClr val="CBD5E1"/>
+                      </a:solidFill>
+                      <a:prstDash val="solid"/>
+                      <a:round/>
+                      <a:headEnd type="none" w="med" len="med"/>
+                      <a:tailEnd type="none" w="med" len="med"/>
+                    </a:lnR>
+                    <a:lnT w="6350" cap="flat" cmpd="sng" algn="ctr">
+                      <a:solidFill>
+                        <a:srgbClr val="CBD5E1"/>
+                      </a:solidFill>
+                      <a:prstDash val="solid"/>
+                      <a:round/>
+                      <a:headEnd type="none" w="med" len="med"/>
+                      <a:tailEnd type="none" w="med" len="med"/>
+                    </a:lnT>
+                    <a:lnB w="6350" cap="flat" cmpd="sng" algn="ctr">
+                      <a:solidFill>
+                        <a:srgbClr val="CBD5E1"/>
+                      </a:solidFill>
+                      <a:prstDash val="solid"/>
+                      <a:round/>
+                      <a:headEnd type="none" w="med" len="med"/>
+                      <a:tailEnd type="none" w="med" len="med"/>
+                    </a:lnB>
+                    <a:solidFill>
+                      <a:srgbClr val="E8EFF8"/>
+                    </a:solidFill>
+                  </a:tcPr>
+                </a:tc>
+                <a:tc>
+                  <a:txBody>
+                    <a:bodyPr/>
+                    <a:lstStyle/>
+                    <a:p>
+                      <a:pPr algn="ctr" indent="0" marL="0">
+                        <a:buNone/>
+                      </a:pPr>
+                      <a:r>
+                        <a:rPr lang="en-US" sz="900" dirty="0">
+                          <a:solidFill>
+                            <a:srgbClr val="000000"/>
+                          </a:solidFill>
+                          <a:latin typeface="Arial" pitchFamily="34" charset="0"/>
+                          <a:ea typeface="Arial" pitchFamily="34" charset="-122"/>
+                          <a:cs typeface="Arial" pitchFamily="34" charset="-120"/>
+                        </a:rPr>
+                        <a:t>8.25</a:t>
+                      </a:r>
+                      <a:endParaRPr lang="en-US" sz="900" dirty="0">
+                        <a:latin typeface="Arial" charset="0"/>
+                        <a:ea typeface="Arial" charset="0"/>
+                        <a:cs typeface="Arial" charset="0"/>
+                      </a:endParaRPr>
+                    </a:p>
+                  </a:txBody>
+                  <a:tcPr marL="91440" marR="91440" marT="45720" marB="45720">
+                    <a:lnL w="6350" cap="flat" cmpd="sng" algn="ctr">
+                      <a:solidFill>
+                        <a:srgbClr val="CBD5E1"/>
+                      </a:solidFill>
+                      <a:prstDash val="solid"/>
+                      <a:round/>
+                      <a:headEnd type="none" w="med" len="med"/>
+                      <a:tailEnd type="none" w="med" len="med"/>
+                    </a:lnL>
+                    <a:lnR w="6350" cap="flat" cmpd="sng" algn="ctr">
+                      <a:solidFill>
+                        <a:srgbClr val="CBD5E1"/>
+                      </a:solidFill>
+                      <a:prstDash val="solid"/>
+                      <a:round/>
+                      <a:headEnd type="none" w="med" len="med"/>
+                      <a:tailEnd type="none" w="med" len="med"/>
+                    </a:lnR>
+                    <a:lnT w="6350" cap="flat" cmpd="sng" algn="ctr">
+                      <a:solidFill>
+                        <a:srgbClr val="CBD5E1"/>
+                      </a:solidFill>
+                      <a:prstDash val="solid"/>
+                      <a:round/>
+                      <a:headEnd type="none" w="med" len="med"/>
+                      <a:tailEnd type="none" w="med" len="med"/>
+                    </a:lnT>
+                    <a:lnB w="6350" cap="flat" cmpd="sng" algn="ctr">
+                      <a:solidFill>
+                        <a:srgbClr val="CBD5E1"/>
+                      </a:solidFill>
+                      <a:prstDash val="solid"/>
+                      <a:round/>
+                      <a:headEnd type="none" w="med" len="med"/>
+                      <a:tailEnd type="none" w="med" len="med"/>
+                    </a:lnB>
+                    <a:solidFill>
+                      <a:srgbClr val="E8EFF8"/>
+                    </a:solidFill>
+                  </a:tcPr>
+                </a:tc>
+              </a:tr>
+              <a:tr h="201168">
+                <a:tc>
+                  <a:txBody>
+                    <a:bodyPr/>
+                    <a:lstStyle/>
+                    <a:p>
+                      <a:pPr algn="ctr" indent="0" marL="0">
+                        <a:buNone/>
+                      </a:pPr>
+                      <a:r>
+                        <a:rPr lang="en-US" sz="900" dirty="0">
+                          <a:solidFill>
+                            <a:srgbClr val="000000"/>
+                          </a:solidFill>
+                          <a:latin typeface="Arial" pitchFamily="34" charset="0"/>
+                          <a:ea typeface="Arial" pitchFamily="34" charset="-122"/>
+                          <a:cs typeface="Arial" pitchFamily="34" charset="-120"/>
+                        </a:rPr>
+                        <a:t>Google</a:t>
+                      </a:r>
+                      <a:endParaRPr lang="en-US" sz="900" dirty="0">
+                        <a:latin typeface="Arial" charset="0"/>
+                        <a:ea typeface="Arial" charset="0"/>
+                        <a:cs typeface="Arial" charset="0"/>
+                      </a:endParaRPr>
+                    </a:p>
+                  </a:txBody>
+                  <a:tcPr marL="91440" marR="91440" marT="45720" marB="45720">
+                    <a:lnL w="6350" cap="flat" cmpd="sng" algn="ctr">
+                      <a:solidFill>
+                        <a:srgbClr val="CBD5E1"/>
+                      </a:solidFill>
+                      <a:prstDash val="solid"/>
+                      <a:round/>
+                      <a:headEnd type="none" w="med" len="med"/>
+                      <a:tailEnd type="none" w="med" len="med"/>
+                    </a:lnL>
+                    <a:lnR w="6350" cap="flat" cmpd="sng" algn="ctr">
+                      <a:solidFill>
+                        <a:srgbClr val="CBD5E1"/>
+                      </a:solidFill>
+                      <a:prstDash val="solid"/>
+                      <a:round/>
+                      <a:headEnd type="none" w="med" len="med"/>
+                      <a:tailEnd type="none" w="med" len="med"/>
+                    </a:lnR>
+                    <a:lnT w="6350" cap="flat" cmpd="sng" algn="ctr">
+                      <a:solidFill>
+                        <a:srgbClr val="CBD5E1"/>
+                      </a:solidFill>
+                      <a:prstDash val="solid"/>
+                      <a:round/>
+                      <a:headEnd type="none" w="med" len="med"/>
+                      <a:tailEnd type="none" w="med" len="med"/>
+                    </a:lnT>
+                    <a:lnB w="6350" cap="flat" cmpd="sng" algn="ctr">
+                      <a:solidFill>
+                        <a:srgbClr val="CBD5E1"/>
+                      </a:solidFill>
+                      <a:prstDash val="solid"/>
+                      <a:round/>
+                      <a:headEnd type="none" w="med" len="med"/>
+                      <a:tailEnd type="none" w="med" len="med"/>
+                    </a:lnB>
+                    <a:solidFill>
+                      <a:srgbClr val="FFFFFF"/>
+                    </a:solidFill>
+                  </a:tcPr>
+                </a:tc>
+                <a:tc>
+                  <a:txBody>
+                    <a:bodyPr/>
+                    <a:lstStyle/>
+                    <a:p>
+                      <a:pPr algn="ctr" indent="0" marL="0">
+                        <a:buNone/>
+                      </a:pPr>
+                      <a:r>
+                        <a:rPr lang="en-US" sz="900" dirty="0">
+                          <a:solidFill>
+                            <a:srgbClr val="000000"/>
+                          </a:solidFill>
+                          <a:latin typeface="Arial" pitchFamily="34" charset="0"/>
+                          <a:ea typeface="Arial" pitchFamily="34" charset="-122"/>
+                          <a:cs typeface="Arial" pitchFamily="34" charset="-120"/>
+                        </a:rPr>
+                        <a:t>6</a:t>
+                      </a:r>
+                      <a:endParaRPr lang="en-US" sz="900" dirty="0">
+                        <a:latin typeface="Arial" charset="0"/>
+                        <a:ea typeface="Arial" charset="0"/>
+                        <a:cs typeface="Arial" charset="0"/>
+                      </a:endParaRPr>
+                    </a:p>
+                  </a:txBody>
+                  <a:tcPr marL="91440" marR="91440" marT="45720" marB="45720">
+                    <a:lnL w="6350" cap="flat" cmpd="sng" algn="ctr">
+                      <a:solidFill>
+                        <a:srgbClr val="CBD5E1"/>
+                      </a:solidFill>
+                      <a:prstDash val="solid"/>
+                      <a:round/>
+                      <a:headEnd type="none" w="med" len="med"/>
+                      <a:tailEnd type="none" w="med" len="med"/>
+                    </a:lnL>
+                    <a:lnR w="6350" cap="flat" cmpd="sng" algn="ctr">
+                      <a:solidFill>
+                        <a:srgbClr val="CBD5E1"/>
+                      </a:solidFill>
+                      <a:prstDash val="solid"/>
+                      <a:round/>
+                      <a:headEnd type="none" w="med" len="med"/>
+                      <a:tailEnd type="none" w="med" len="med"/>
+                    </a:lnR>
+                    <a:lnT w="6350" cap="flat" cmpd="sng" algn="ctr">
+                      <a:solidFill>
+                        <a:srgbClr val="CBD5E1"/>
+                      </a:solidFill>
+                      <a:prstDash val="solid"/>
+                      <a:round/>
+                      <a:headEnd type="none" w="med" len="med"/>
+                      <a:tailEnd type="none" w="med" len="med"/>
+                    </a:lnT>
+                    <a:lnB w="6350" cap="flat" cmpd="sng" algn="ctr">
+                      <a:solidFill>
+                        <a:srgbClr val="CBD5E1"/>
+                      </a:solidFill>
+                      <a:prstDash val="solid"/>
+                      <a:round/>
+                      <a:headEnd type="none" w="med" len="med"/>
+                      <a:tailEnd type="none" w="med" len="med"/>
+                    </a:lnB>
+                    <a:solidFill>
+                      <a:srgbClr val="FFFFFF"/>
+                    </a:solidFill>
+                  </a:tcPr>
+                </a:tc>
+                <a:tc>
+                  <a:txBody>
+                    <a:bodyPr/>
+                    <a:lstStyle/>
+                    <a:p>
+                      <a:pPr algn="ctr" indent="0" marL="0">
+                        <a:buNone/>
+                      </a:pPr>
+                      <a:r>
+                        <a:rPr lang="en-US" sz="900" dirty="0">
+                          <a:solidFill>
+                            <a:srgbClr val="000000"/>
+                          </a:solidFill>
+                          <a:latin typeface="Arial" pitchFamily="34" charset="0"/>
+                          <a:ea typeface="Arial" pitchFamily="34" charset="-122"/>
+                          <a:cs typeface="Arial" pitchFamily="34" charset="-120"/>
+                        </a:rPr>
+                        <a:t>4</a:t>
+                      </a:r>
+                      <a:endParaRPr lang="en-US" sz="900" dirty="0">
+                        <a:latin typeface="Arial" charset="0"/>
+                        <a:ea typeface="Arial" charset="0"/>
+                        <a:cs typeface="Arial" charset="0"/>
+                      </a:endParaRPr>
+                    </a:p>
+                  </a:txBody>
+                  <a:tcPr marL="91440" marR="91440" marT="45720" marB="45720">
+                    <a:lnL w="6350" cap="flat" cmpd="sng" algn="ctr">
+                      <a:solidFill>
+                        <a:srgbClr val="CBD5E1"/>
+                      </a:solidFill>
+                      <a:prstDash val="solid"/>
+                      <a:round/>
+                      <a:headEnd type="none" w="med" len="med"/>
+                      <a:tailEnd type="none" w="med" len="med"/>
+                    </a:lnL>
+                    <a:lnR w="6350" cap="flat" cmpd="sng" algn="ctr">
+                      <a:solidFill>
+                        <a:srgbClr val="CBD5E1"/>
+                      </a:solidFill>
+                      <a:prstDash val="solid"/>
+                      <a:round/>
+                      <a:headEnd type="none" w="med" len="med"/>
+                      <a:tailEnd type="none" w="med" len="med"/>
+                    </a:lnR>
+                    <a:lnT w="6350" cap="flat" cmpd="sng" algn="ctr">
+                      <a:solidFill>
+                        <a:srgbClr val="CBD5E1"/>
+                      </a:solidFill>
+                      <a:prstDash val="solid"/>
+                      <a:round/>
+                      <a:headEnd type="none" w="med" len="med"/>
+                      <a:tailEnd type="none" w="med" len="med"/>
+                    </a:lnT>
+                    <a:lnB w="6350" cap="flat" cmpd="sng" algn="ctr">
+                      <a:solidFill>
+                        <a:srgbClr val="CBD5E1"/>
+                      </a:solidFill>
+                      <a:prstDash val="solid"/>
+                      <a:round/>
+                      <a:headEnd type="none" w="med" len="med"/>
+                      <a:tailEnd type="none" w="med" len="med"/>
+                    </a:lnB>
+                    <a:solidFill>
+                      <a:srgbClr val="FFFFFF"/>
+                    </a:solidFill>
+                  </a:tcPr>
+                </a:tc>
+                <a:tc>
+                  <a:txBody>
+                    <a:bodyPr/>
+                    <a:lstStyle/>
+                    <a:p>
+                      <a:pPr algn="ctr" indent="0" marL="0">
+                        <a:buNone/>
+                      </a:pPr>
+                      <a:r>
+                        <a:rPr lang="en-US" sz="900" dirty="0">
+                          <a:solidFill>
+                            <a:srgbClr val="000000"/>
+                          </a:solidFill>
+                          <a:latin typeface="Arial" pitchFamily="34" charset="0"/>
+                          <a:ea typeface="Arial" pitchFamily="34" charset="-122"/>
+                          <a:cs typeface="Arial" pitchFamily="34" charset="-120"/>
+                        </a:rPr>
+                        <a:t>/5 (×2)</a:t>
+                      </a:r>
+                      <a:endParaRPr lang="en-US" sz="900" dirty="0">
+                        <a:latin typeface="Arial" charset="0"/>
+                        <a:ea typeface="Arial" charset="0"/>
+                        <a:cs typeface="Arial" charset="0"/>
+                      </a:endParaRPr>
+                    </a:p>
+                  </a:txBody>
+                  <a:tcPr marL="91440" marR="91440" marT="45720" marB="45720">
+                    <a:lnL w="6350" cap="flat" cmpd="sng" algn="ctr">
+                      <a:solidFill>
+                        <a:srgbClr val="CBD5E1"/>
+                      </a:solidFill>
+                      <a:prstDash val="solid"/>
+                      <a:round/>
+                      <a:headEnd type="none" w="med" len="med"/>
+                      <a:tailEnd type="none" w="med" len="med"/>
+                    </a:lnL>
+                    <a:lnR w="6350" cap="flat" cmpd="sng" algn="ctr">
+                      <a:solidFill>
+                        <a:srgbClr val="CBD5E1"/>
+                      </a:solidFill>
+                      <a:prstDash val="solid"/>
+                      <a:round/>
+                      <a:headEnd type="none" w="med" len="med"/>
+                      <a:tailEnd type="none" w="med" len="med"/>
+                    </a:lnR>
+                    <a:lnT w="6350" cap="flat" cmpd="sng" algn="ctr">
+                      <a:solidFill>
+                        <a:srgbClr val="CBD5E1"/>
+                      </a:solidFill>
+                      <a:prstDash val="solid"/>
+                      <a:round/>
+                      <a:headEnd type="none" w="med" len="med"/>
+                      <a:tailEnd type="none" w="med" len="med"/>
+                    </a:lnT>
+                    <a:lnB w="6350" cap="flat" cmpd="sng" algn="ctr">
+                      <a:solidFill>
+                        <a:srgbClr val="CBD5E1"/>
+                      </a:solidFill>
+                      <a:prstDash val="solid"/>
+                      <a:round/>
+                      <a:headEnd type="none" w="med" len="med"/>
+                      <a:tailEnd type="none" w="med" len="med"/>
+                    </a:lnB>
+                    <a:solidFill>
+                      <a:srgbClr val="FFFFFF"/>
+                    </a:solidFill>
+                  </a:tcPr>
+                </a:tc>
+                <a:tc>
+                  <a:txBody>
+                    <a:bodyPr/>
+                    <a:lstStyle/>
+                    <a:p>
+                      <a:pPr algn="ctr" indent="0" marL="0">
+                        <a:buNone/>
+                      </a:pPr>
+                      <a:r>
+                        <a:rPr lang="en-US" sz="900" dirty="0">
+                          <a:solidFill>
+                            <a:srgbClr val="000000"/>
+                          </a:solidFill>
+                          <a:latin typeface="Arial" pitchFamily="34" charset="0"/>
+                          <a:ea typeface="Arial" pitchFamily="34" charset="-122"/>
+                          <a:cs typeface="Arial" pitchFamily="34" charset="-120"/>
+                        </a:rPr>
+                        <a:t>8</a:t>
                       </a:r>
                       <a:endParaRPr lang="en-US" sz="900" dirty="0">
                         <a:latin typeface="Arial" charset="0"/>
@@ -8527,7 +9211,7 @@
                           <a:ea typeface="Arial" pitchFamily="34" charset="-122"/>
                           <a:cs typeface="Arial" pitchFamily="34" charset="-120"/>
                         </a:rPr>
-                        <a:t>3</a:t>
+                        <a:t>1</a:t>
                       </a:r>
                       <a:endParaRPr lang="en-US" sz="900" dirty="0">
                         <a:latin typeface="Arial" charset="0"/>
@@ -8595,7 +9279,7 @@
                           <a:ea typeface="Arial" pitchFamily="34" charset="-122"/>
                           <a:cs typeface="Arial" pitchFamily="34" charset="-120"/>
                         </a:rPr>
-                        <a:t>4.33</a:t>
+                        <a:t>4</a:t>
                       </a:r>
                       <a:endParaRPr lang="en-US" sz="900" dirty="0">
                         <a:latin typeface="Arial" charset="0"/>
@@ -8731,691 +9415,7 @@
                           <a:ea typeface="Arial" pitchFamily="34" charset="-122"/>
                           <a:cs typeface="Arial" pitchFamily="34" charset="-120"/>
                         </a:rPr>
-                        <a:t>8.67</a:t>
-                      </a:r>
-                      <a:endParaRPr lang="en-US" sz="900" dirty="0">
-                        <a:latin typeface="Arial" charset="0"/>
-                        <a:ea typeface="Arial" charset="0"/>
-                        <a:cs typeface="Arial" charset="0"/>
-                      </a:endParaRPr>
-                    </a:p>
-                  </a:txBody>
-                  <a:tcPr marL="91440" marR="91440" marT="45720" marB="45720">
-                    <a:lnL w="6350" cap="flat" cmpd="sng" algn="ctr">
-                      <a:solidFill>
-                        <a:srgbClr val="CBD5E1"/>
-                      </a:solidFill>
-                      <a:prstDash val="solid"/>
-                      <a:round/>
-                      <a:headEnd type="none" w="med" len="med"/>
-                      <a:tailEnd type="none" w="med" len="med"/>
-                    </a:lnL>
-                    <a:lnR w="6350" cap="flat" cmpd="sng" algn="ctr">
-                      <a:solidFill>
-                        <a:srgbClr val="CBD5E1"/>
-                      </a:solidFill>
-                      <a:prstDash val="solid"/>
-                      <a:round/>
-                      <a:headEnd type="none" w="med" len="med"/>
-                      <a:tailEnd type="none" w="med" len="med"/>
-                    </a:lnR>
-                    <a:lnT w="6350" cap="flat" cmpd="sng" algn="ctr">
-                      <a:solidFill>
-                        <a:srgbClr val="CBD5E1"/>
-                      </a:solidFill>
-                      <a:prstDash val="solid"/>
-                      <a:round/>
-                      <a:headEnd type="none" w="med" len="med"/>
-                      <a:tailEnd type="none" w="med" len="med"/>
-                    </a:lnT>
-                    <a:lnB w="6350" cap="flat" cmpd="sng" algn="ctr">
-                      <a:solidFill>
-                        <a:srgbClr val="CBD5E1"/>
-                      </a:solidFill>
-                      <a:prstDash val="solid"/>
-                      <a:round/>
-                      <a:headEnd type="none" w="med" len="med"/>
-                      <a:tailEnd type="none" w="med" len="med"/>
-                    </a:lnB>
-                    <a:solidFill>
-                      <a:srgbClr val="E8EFF8"/>
-                    </a:solidFill>
-                  </a:tcPr>
-                </a:tc>
-              </a:tr>
-              <a:tr h="201168">
-                <a:tc>
-                  <a:txBody>
-                    <a:bodyPr/>
-                    <a:lstStyle/>
-                    <a:p>
-                      <a:pPr algn="ctr" indent="0" marL="0">
-                        <a:buNone/>
-                      </a:pPr>
-                      <a:r>
-                        <a:rPr lang="en-US" sz="900" dirty="0">
-                          <a:solidFill>
-                            <a:srgbClr val="000000"/>
-                          </a:solidFill>
-                          <a:latin typeface="Arial" pitchFamily="34" charset="0"/>
-                          <a:ea typeface="Arial" pitchFamily="34" charset="-122"/>
-                          <a:cs typeface="Arial" pitchFamily="34" charset="-120"/>
-                        </a:rPr>
-                        <a:t>Agoda</a:t>
-                      </a:r>
-                      <a:endParaRPr lang="en-US" sz="900" dirty="0">
-                        <a:latin typeface="Arial" charset="0"/>
-                        <a:ea typeface="Arial" charset="0"/>
-                        <a:cs typeface="Arial" charset="0"/>
-                      </a:endParaRPr>
-                    </a:p>
-                  </a:txBody>
-                  <a:tcPr marL="91440" marR="91440" marT="45720" marB="45720">
-                    <a:lnL w="6350" cap="flat" cmpd="sng" algn="ctr">
-                      <a:solidFill>
-                        <a:srgbClr val="CBD5E1"/>
-                      </a:solidFill>
-                      <a:prstDash val="solid"/>
-                      <a:round/>
-                      <a:headEnd type="none" w="med" len="med"/>
-                      <a:tailEnd type="none" w="med" len="med"/>
-                    </a:lnL>
-                    <a:lnR w="6350" cap="flat" cmpd="sng" algn="ctr">
-                      <a:solidFill>
-                        <a:srgbClr val="CBD5E1"/>
-                      </a:solidFill>
-                      <a:prstDash val="solid"/>
-                      <a:round/>
-                      <a:headEnd type="none" w="med" len="med"/>
-                      <a:tailEnd type="none" w="med" len="med"/>
-                    </a:lnR>
-                    <a:lnT w="6350" cap="flat" cmpd="sng" algn="ctr">
-                      <a:solidFill>
-                        <a:srgbClr val="CBD5E1"/>
-                      </a:solidFill>
-                      <a:prstDash val="solid"/>
-                      <a:round/>
-                      <a:headEnd type="none" w="med" len="med"/>
-                      <a:tailEnd type="none" w="med" len="med"/>
-                    </a:lnT>
-                    <a:lnB w="6350" cap="flat" cmpd="sng" algn="ctr">
-                      <a:solidFill>
-                        <a:srgbClr val="CBD5E1"/>
-                      </a:solidFill>
-                      <a:prstDash val="solid"/>
-                      <a:round/>
-                      <a:headEnd type="none" w="med" len="med"/>
-                      <a:tailEnd type="none" w="med" len="med"/>
-                    </a:lnB>
-                    <a:solidFill>
-                      <a:srgbClr val="FFFFFF"/>
-                    </a:solidFill>
-                  </a:tcPr>
-                </a:tc>
-                <a:tc>
-                  <a:txBody>
-                    <a:bodyPr/>
-                    <a:lstStyle/>
-                    <a:p>
-                      <a:pPr algn="ctr" indent="0" marL="0">
-                        <a:buNone/>
-                      </a:pPr>
-                      <a:r>
-                        <a:rPr lang="en-US" sz="900" dirty="0">
-                          <a:solidFill>
-                            <a:srgbClr val="000000"/>
-                          </a:solidFill>
-                          <a:latin typeface="Arial" pitchFamily="34" charset="0"/>
-                          <a:ea typeface="Arial" pitchFamily="34" charset="-122"/>
-                          <a:cs typeface="Arial" pitchFamily="34" charset="-120"/>
-                        </a:rPr>
-                        <a:t>7</a:t>
-                      </a:r>
-                      <a:endParaRPr lang="en-US" sz="900" dirty="0">
-                        <a:latin typeface="Arial" charset="0"/>
-                        <a:ea typeface="Arial" charset="0"/>
-                        <a:cs typeface="Arial" charset="0"/>
-                      </a:endParaRPr>
-                    </a:p>
-                  </a:txBody>
-                  <a:tcPr marL="91440" marR="91440" marT="45720" marB="45720">
-                    <a:lnL w="6350" cap="flat" cmpd="sng" algn="ctr">
-                      <a:solidFill>
-                        <a:srgbClr val="CBD5E1"/>
-                      </a:solidFill>
-                      <a:prstDash val="solid"/>
-                      <a:round/>
-                      <a:headEnd type="none" w="med" len="med"/>
-                      <a:tailEnd type="none" w="med" len="med"/>
-                    </a:lnL>
-                    <a:lnR w="6350" cap="flat" cmpd="sng" algn="ctr">
-                      <a:solidFill>
-                        <a:srgbClr val="CBD5E1"/>
-                      </a:solidFill>
-                      <a:prstDash val="solid"/>
-                      <a:round/>
-                      <a:headEnd type="none" w="med" len="med"/>
-                      <a:tailEnd type="none" w="med" len="med"/>
-                    </a:lnR>
-                    <a:lnT w="6350" cap="flat" cmpd="sng" algn="ctr">
-                      <a:solidFill>
-                        <a:srgbClr val="CBD5E1"/>
-                      </a:solidFill>
-                      <a:prstDash val="solid"/>
-                      <a:round/>
-                      <a:headEnd type="none" w="med" len="med"/>
-                      <a:tailEnd type="none" w="med" len="med"/>
-                    </a:lnT>
-                    <a:lnB w="6350" cap="flat" cmpd="sng" algn="ctr">
-                      <a:solidFill>
-                        <a:srgbClr val="CBD5E1"/>
-                      </a:solidFill>
-                      <a:prstDash val="solid"/>
-                      <a:round/>
-                      <a:headEnd type="none" w="med" len="med"/>
-                      <a:tailEnd type="none" w="med" len="med"/>
-                    </a:lnB>
-                    <a:solidFill>
-                      <a:srgbClr val="FFFFFF"/>
-                    </a:solidFill>
-                  </a:tcPr>
-                </a:tc>
-                <a:tc>
-                  <a:txBody>
-                    <a:bodyPr/>
-                    <a:lstStyle/>
-                    <a:p>
-                      <a:pPr algn="ctr" indent="0" marL="0">
-                        <a:buNone/>
-                      </a:pPr>
-                      <a:r>
-                        <a:rPr lang="en-US" sz="900" dirty="0">
-                          <a:solidFill>
-                            <a:srgbClr val="000000"/>
-                          </a:solidFill>
-                          <a:latin typeface="Arial" pitchFamily="34" charset="0"/>
-                          <a:ea typeface="Arial" pitchFamily="34" charset="-122"/>
-                          <a:cs typeface="Arial" pitchFamily="34" charset="-120"/>
-                        </a:rPr>
-                        <a:t>8.57</a:t>
-                      </a:r>
-                      <a:endParaRPr lang="en-US" sz="900" dirty="0">
-                        <a:latin typeface="Arial" charset="0"/>
-                        <a:ea typeface="Arial" charset="0"/>
-                        <a:cs typeface="Arial" charset="0"/>
-                      </a:endParaRPr>
-                    </a:p>
-                  </a:txBody>
-                  <a:tcPr marL="91440" marR="91440" marT="45720" marB="45720">
-                    <a:lnL w="6350" cap="flat" cmpd="sng" algn="ctr">
-                      <a:solidFill>
-                        <a:srgbClr val="CBD5E1"/>
-                      </a:solidFill>
-                      <a:prstDash val="solid"/>
-                      <a:round/>
-                      <a:headEnd type="none" w="med" len="med"/>
-                      <a:tailEnd type="none" w="med" len="med"/>
-                    </a:lnL>
-                    <a:lnR w="6350" cap="flat" cmpd="sng" algn="ctr">
-                      <a:solidFill>
-                        <a:srgbClr val="CBD5E1"/>
-                      </a:solidFill>
-                      <a:prstDash val="solid"/>
-                      <a:round/>
-                      <a:headEnd type="none" w="med" len="med"/>
-                      <a:tailEnd type="none" w="med" len="med"/>
-                    </a:lnR>
-                    <a:lnT w="6350" cap="flat" cmpd="sng" algn="ctr">
-                      <a:solidFill>
-                        <a:srgbClr val="CBD5E1"/>
-                      </a:solidFill>
-                      <a:prstDash val="solid"/>
-                      <a:round/>
-                      <a:headEnd type="none" w="med" len="med"/>
-                      <a:tailEnd type="none" w="med" len="med"/>
-                    </a:lnT>
-                    <a:lnB w="6350" cap="flat" cmpd="sng" algn="ctr">
-                      <a:solidFill>
-                        <a:srgbClr val="CBD5E1"/>
-                      </a:solidFill>
-                      <a:prstDash val="solid"/>
-                      <a:round/>
-                      <a:headEnd type="none" w="med" len="med"/>
-                      <a:tailEnd type="none" w="med" len="med"/>
-                    </a:lnB>
-                    <a:solidFill>
-                      <a:srgbClr val="FFFFFF"/>
-                    </a:solidFill>
-                  </a:tcPr>
-                </a:tc>
-                <a:tc>
-                  <a:txBody>
-                    <a:bodyPr/>
-                    <a:lstStyle/>
-                    <a:p>
-                      <a:pPr algn="ctr" indent="0" marL="0">
-                        <a:buNone/>
-                      </a:pPr>
-                      <a:r>
-                        <a:rPr lang="en-US" sz="900" dirty="0">
-                          <a:solidFill>
-                            <a:srgbClr val="000000"/>
-                          </a:solidFill>
-                          <a:latin typeface="Arial" pitchFamily="34" charset="0"/>
-                          <a:ea typeface="Arial" pitchFamily="34" charset="-122"/>
-                          <a:cs typeface="Arial" pitchFamily="34" charset="-120"/>
-                        </a:rPr>
-                        <a:t>/10</a:t>
-                      </a:r>
-                      <a:endParaRPr lang="en-US" sz="900" dirty="0">
-                        <a:latin typeface="Arial" charset="0"/>
-                        <a:ea typeface="Arial" charset="0"/>
-                        <a:cs typeface="Arial" charset="0"/>
-                      </a:endParaRPr>
-                    </a:p>
-                  </a:txBody>
-                  <a:tcPr marL="91440" marR="91440" marT="45720" marB="45720">
-                    <a:lnL w="6350" cap="flat" cmpd="sng" algn="ctr">
-                      <a:solidFill>
-                        <a:srgbClr val="CBD5E1"/>
-                      </a:solidFill>
-                      <a:prstDash val="solid"/>
-                      <a:round/>
-                      <a:headEnd type="none" w="med" len="med"/>
-                      <a:tailEnd type="none" w="med" len="med"/>
-                    </a:lnL>
-                    <a:lnR w="6350" cap="flat" cmpd="sng" algn="ctr">
-                      <a:solidFill>
-                        <a:srgbClr val="CBD5E1"/>
-                      </a:solidFill>
-                      <a:prstDash val="solid"/>
-                      <a:round/>
-                      <a:headEnd type="none" w="med" len="med"/>
-                      <a:tailEnd type="none" w="med" len="med"/>
-                    </a:lnR>
-                    <a:lnT w="6350" cap="flat" cmpd="sng" algn="ctr">
-                      <a:solidFill>
-                        <a:srgbClr val="CBD5E1"/>
-                      </a:solidFill>
-                      <a:prstDash val="solid"/>
-                      <a:round/>
-                      <a:headEnd type="none" w="med" len="med"/>
-                      <a:tailEnd type="none" w="med" len="med"/>
-                    </a:lnT>
-                    <a:lnB w="6350" cap="flat" cmpd="sng" algn="ctr">
-                      <a:solidFill>
-                        <a:srgbClr val="CBD5E1"/>
-                      </a:solidFill>
-                      <a:prstDash val="solid"/>
-                      <a:round/>
-                      <a:headEnd type="none" w="med" len="med"/>
-                      <a:tailEnd type="none" w="med" len="med"/>
-                    </a:lnB>
-                    <a:solidFill>
-                      <a:srgbClr val="FFFFFF"/>
-                    </a:solidFill>
-                  </a:tcPr>
-                </a:tc>
-                <a:tc>
-                  <a:txBody>
-                    <a:bodyPr/>
-                    <a:lstStyle/>
-                    <a:p>
-                      <a:pPr algn="ctr" indent="0" marL="0">
-                        <a:buNone/>
-                      </a:pPr>
-                      <a:r>
-                        <a:rPr lang="en-US" sz="900" dirty="0">
-                          <a:solidFill>
-                            <a:srgbClr val="000000"/>
-                          </a:solidFill>
-                          <a:latin typeface="Arial" pitchFamily="34" charset="0"/>
-                          <a:ea typeface="Arial" pitchFamily="34" charset="-122"/>
-                          <a:cs typeface="Arial" pitchFamily="34" charset="-120"/>
-                        </a:rPr>
-                        <a:t>8.57</a:t>
-                      </a:r>
-                      <a:endParaRPr lang="en-US" sz="900" dirty="0">
-                        <a:latin typeface="Arial" charset="0"/>
-                        <a:ea typeface="Arial" charset="0"/>
-                        <a:cs typeface="Arial" charset="0"/>
-                      </a:endParaRPr>
-                    </a:p>
-                  </a:txBody>
-                  <a:tcPr marL="91440" marR="91440" marT="45720" marB="45720">
-                    <a:lnL w="6350" cap="flat" cmpd="sng" algn="ctr">
-                      <a:solidFill>
-                        <a:srgbClr val="CBD5E1"/>
-                      </a:solidFill>
-                      <a:prstDash val="solid"/>
-                      <a:round/>
-                      <a:headEnd type="none" w="med" len="med"/>
-                      <a:tailEnd type="none" w="med" len="med"/>
-                    </a:lnL>
-                    <a:lnR w="6350" cap="flat" cmpd="sng" algn="ctr">
-                      <a:solidFill>
-                        <a:srgbClr val="CBD5E1"/>
-                      </a:solidFill>
-                      <a:prstDash val="solid"/>
-                      <a:round/>
-                      <a:headEnd type="none" w="med" len="med"/>
-                      <a:tailEnd type="none" w="med" len="med"/>
-                    </a:lnR>
-                    <a:lnT w="6350" cap="flat" cmpd="sng" algn="ctr">
-                      <a:solidFill>
-                        <a:srgbClr val="CBD5E1"/>
-                      </a:solidFill>
-                      <a:prstDash val="solid"/>
-                      <a:round/>
-                      <a:headEnd type="none" w="med" len="med"/>
-                      <a:tailEnd type="none" w="med" len="med"/>
-                    </a:lnT>
-                    <a:lnB w="6350" cap="flat" cmpd="sng" algn="ctr">
-                      <a:solidFill>
-                        <a:srgbClr val="CBD5E1"/>
-                      </a:solidFill>
-                      <a:prstDash val="solid"/>
-                      <a:round/>
-                      <a:headEnd type="none" w="med" len="med"/>
-                      <a:tailEnd type="none" w="med" len="med"/>
-                    </a:lnB>
-                    <a:solidFill>
-                      <a:srgbClr val="FFFFFF"/>
-                    </a:solidFill>
-                  </a:tcPr>
-                </a:tc>
-              </a:tr>
-              <a:tr h="201168">
-                <a:tc>
-                  <a:txBody>
-                    <a:bodyPr/>
-                    <a:lstStyle/>
-                    <a:p>
-                      <a:pPr algn="ctr" indent="0" marL="0">
-                        <a:buNone/>
-                      </a:pPr>
-                      <a:r>
-                        <a:rPr lang="en-US" sz="900" dirty="0">
-                          <a:solidFill>
-                            <a:srgbClr val="000000"/>
-                          </a:solidFill>
-                          <a:latin typeface="Arial" pitchFamily="34" charset="0"/>
-                          <a:ea typeface="Arial" pitchFamily="34" charset="-122"/>
-                          <a:cs typeface="Arial" pitchFamily="34" charset="-120"/>
-                        </a:rPr>
-                        <a:t>Google</a:t>
-                      </a:r>
-                      <a:endParaRPr lang="en-US" sz="900" dirty="0">
-                        <a:latin typeface="Arial" charset="0"/>
-                        <a:ea typeface="Arial" charset="0"/>
-                        <a:cs typeface="Arial" charset="0"/>
-                      </a:endParaRPr>
-                    </a:p>
-                  </a:txBody>
-                  <a:tcPr marL="91440" marR="91440" marT="45720" marB="45720">
-                    <a:lnL w="6350" cap="flat" cmpd="sng" algn="ctr">
-                      <a:solidFill>
-                        <a:srgbClr val="CBD5E1"/>
-                      </a:solidFill>
-                      <a:prstDash val="solid"/>
-                      <a:round/>
-                      <a:headEnd type="none" w="med" len="med"/>
-                      <a:tailEnd type="none" w="med" len="med"/>
-                    </a:lnL>
-                    <a:lnR w="6350" cap="flat" cmpd="sng" algn="ctr">
-                      <a:solidFill>
-                        <a:srgbClr val="CBD5E1"/>
-                      </a:solidFill>
-                      <a:prstDash val="solid"/>
-                      <a:round/>
-                      <a:headEnd type="none" w="med" len="med"/>
-                      <a:tailEnd type="none" w="med" len="med"/>
-                    </a:lnR>
-                    <a:lnT w="6350" cap="flat" cmpd="sng" algn="ctr">
-                      <a:solidFill>
-                        <a:srgbClr val="CBD5E1"/>
-                      </a:solidFill>
-                      <a:prstDash val="solid"/>
-                      <a:round/>
-                      <a:headEnd type="none" w="med" len="med"/>
-                      <a:tailEnd type="none" w="med" len="med"/>
-                    </a:lnT>
-                    <a:lnB w="6350" cap="flat" cmpd="sng" algn="ctr">
-                      <a:solidFill>
-                        <a:srgbClr val="CBD5E1"/>
-                      </a:solidFill>
-                      <a:prstDash val="solid"/>
-                      <a:round/>
-                      <a:headEnd type="none" w="med" len="med"/>
-                      <a:tailEnd type="none" w="med" len="med"/>
-                    </a:lnB>
-                    <a:solidFill>
-                      <a:srgbClr val="E8EFF8"/>
-                    </a:solidFill>
-                  </a:tcPr>
-                </a:tc>
-                <a:tc>
-                  <a:txBody>
-                    <a:bodyPr/>
-                    <a:lstStyle/>
-                    <a:p>
-                      <a:pPr algn="ctr" indent="0" marL="0">
-                        <a:buNone/>
-                      </a:pPr>
-                      <a:r>
-                        <a:rPr lang="en-US" sz="900" dirty="0">
-                          <a:solidFill>
-                            <a:srgbClr val="000000"/>
-                          </a:solidFill>
-                          <a:latin typeface="Arial" pitchFamily="34" charset="0"/>
-                          <a:ea typeface="Arial" pitchFamily="34" charset="-122"/>
-                          <a:cs typeface="Arial" pitchFamily="34" charset="-120"/>
-                        </a:rPr>
-                        <a:t>7</a:t>
-                      </a:r>
-                      <a:endParaRPr lang="en-US" sz="900" dirty="0">
-                        <a:latin typeface="Arial" charset="0"/>
-                        <a:ea typeface="Arial" charset="0"/>
-                        <a:cs typeface="Arial" charset="0"/>
-                      </a:endParaRPr>
-                    </a:p>
-                  </a:txBody>
-                  <a:tcPr marL="91440" marR="91440" marT="45720" marB="45720">
-                    <a:lnL w="6350" cap="flat" cmpd="sng" algn="ctr">
-                      <a:solidFill>
-                        <a:srgbClr val="CBD5E1"/>
-                      </a:solidFill>
-                      <a:prstDash val="solid"/>
-                      <a:round/>
-                      <a:headEnd type="none" w="med" len="med"/>
-                      <a:tailEnd type="none" w="med" len="med"/>
-                    </a:lnL>
-                    <a:lnR w="6350" cap="flat" cmpd="sng" algn="ctr">
-                      <a:solidFill>
-                        <a:srgbClr val="CBD5E1"/>
-                      </a:solidFill>
-                      <a:prstDash val="solid"/>
-                      <a:round/>
-                      <a:headEnd type="none" w="med" len="med"/>
-                      <a:tailEnd type="none" w="med" len="med"/>
-                    </a:lnR>
-                    <a:lnT w="6350" cap="flat" cmpd="sng" algn="ctr">
-                      <a:solidFill>
-                        <a:srgbClr val="CBD5E1"/>
-                      </a:solidFill>
-                      <a:prstDash val="solid"/>
-                      <a:round/>
-                      <a:headEnd type="none" w="med" len="med"/>
-                      <a:tailEnd type="none" w="med" len="med"/>
-                    </a:lnT>
-                    <a:lnB w="6350" cap="flat" cmpd="sng" algn="ctr">
-                      <a:solidFill>
-                        <a:srgbClr val="CBD5E1"/>
-                      </a:solidFill>
-                      <a:prstDash val="solid"/>
-                      <a:round/>
-                      <a:headEnd type="none" w="med" len="med"/>
-                      <a:tailEnd type="none" w="med" len="med"/>
-                    </a:lnB>
-                    <a:solidFill>
-                      <a:srgbClr val="E8EFF8"/>
-                    </a:solidFill>
-                  </a:tcPr>
-                </a:tc>
-                <a:tc>
-                  <a:txBody>
-                    <a:bodyPr/>
-                    <a:lstStyle/>
-                    <a:p>
-                      <a:pPr algn="ctr" indent="0" marL="0">
-                        <a:buNone/>
-                      </a:pPr>
-                      <a:r>
-                        <a:rPr lang="en-US" sz="900" dirty="0">
-                          <a:solidFill>
-                            <a:srgbClr val="000000"/>
-                          </a:solidFill>
-                          <a:latin typeface="Arial" pitchFamily="34" charset="0"/>
-                          <a:ea typeface="Arial" pitchFamily="34" charset="-122"/>
-                          <a:cs typeface="Arial" pitchFamily="34" charset="-120"/>
-                        </a:rPr>
-                        <a:t>4.14</a:t>
-                      </a:r>
-                      <a:endParaRPr lang="en-US" sz="900" dirty="0">
-                        <a:latin typeface="Arial" charset="0"/>
-                        <a:ea typeface="Arial" charset="0"/>
-                        <a:cs typeface="Arial" charset="0"/>
-                      </a:endParaRPr>
-                    </a:p>
-                  </a:txBody>
-                  <a:tcPr marL="91440" marR="91440" marT="45720" marB="45720">
-                    <a:lnL w="6350" cap="flat" cmpd="sng" algn="ctr">
-                      <a:solidFill>
-                        <a:srgbClr val="CBD5E1"/>
-                      </a:solidFill>
-                      <a:prstDash val="solid"/>
-                      <a:round/>
-                      <a:headEnd type="none" w="med" len="med"/>
-                      <a:tailEnd type="none" w="med" len="med"/>
-                    </a:lnL>
-                    <a:lnR w="6350" cap="flat" cmpd="sng" algn="ctr">
-                      <a:solidFill>
-                        <a:srgbClr val="CBD5E1"/>
-                      </a:solidFill>
-                      <a:prstDash val="solid"/>
-                      <a:round/>
-                      <a:headEnd type="none" w="med" len="med"/>
-                      <a:tailEnd type="none" w="med" len="med"/>
-                    </a:lnR>
-                    <a:lnT w="6350" cap="flat" cmpd="sng" algn="ctr">
-                      <a:solidFill>
-                        <a:srgbClr val="CBD5E1"/>
-                      </a:solidFill>
-                      <a:prstDash val="solid"/>
-                      <a:round/>
-                      <a:headEnd type="none" w="med" len="med"/>
-                      <a:tailEnd type="none" w="med" len="med"/>
-                    </a:lnT>
-                    <a:lnB w="6350" cap="flat" cmpd="sng" algn="ctr">
-                      <a:solidFill>
-                        <a:srgbClr val="CBD5E1"/>
-                      </a:solidFill>
-                      <a:prstDash val="solid"/>
-                      <a:round/>
-                      <a:headEnd type="none" w="med" len="med"/>
-                      <a:tailEnd type="none" w="med" len="med"/>
-                    </a:lnB>
-                    <a:solidFill>
-                      <a:srgbClr val="E8EFF8"/>
-                    </a:solidFill>
-                  </a:tcPr>
-                </a:tc>
-                <a:tc>
-                  <a:txBody>
-                    <a:bodyPr/>
-                    <a:lstStyle/>
-                    <a:p>
-                      <a:pPr algn="ctr" indent="0" marL="0">
-                        <a:buNone/>
-                      </a:pPr>
-                      <a:r>
-                        <a:rPr lang="en-US" sz="900" dirty="0">
-                          <a:solidFill>
-                            <a:srgbClr val="000000"/>
-                          </a:solidFill>
-                          <a:latin typeface="Arial" pitchFamily="34" charset="0"/>
-                          <a:ea typeface="Arial" pitchFamily="34" charset="-122"/>
-                          <a:cs typeface="Arial" pitchFamily="34" charset="-120"/>
-                        </a:rPr>
-                        <a:t>/5 (×2)</a:t>
-                      </a:r>
-                      <a:endParaRPr lang="en-US" sz="900" dirty="0">
-                        <a:latin typeface="Arial" charset="0"/>
-                        <a:ea typeface="Arial" charset="0"/>
-                        <a:cs typeface="Arial" charset="0"/>
-                      </a:endParaRPr>
-                    </a:p>
-                  </a:txBody>
-                  <a:tcPr marL="91440" marR="91440" marT="45720" marB="45720">
-                    <a:lnL w="6350" cap="flat" cmpd="sng" algn="ctr">
-                      <a:solidFill>
-                        <a:srgbClr val="CBD5E1"/>
-                      </a:solidFill>
-                      <a:prstDash val="solid"/>
-                      <a:round/>
-                      <a:headEnd type="none" w="med" len="med"/>
-                      <a:tailEnd type="none" w="med" len="med"/>
-                    </a:lnL>
-                    <a:lnR w="6350" cap="flat" cmpd="sng" algn="ctr">
-                      <a:solidFill>
-                        <a:srgbClr val="CBD5E1"/>
-                      </a:solidFill>
-                      <a:prstDash val="solid"/>
-                      <a:round/>
-                      <a:headEnd type="none" w="med" len="med"/>
-                      <a:tailEnd type="none" w="med" len="med"/>
-                    </a:lnR>
-                    <a:lnT w="6350" cap="flat" cmpd="sng" algn="ctr">
-                      <a:solidFill>
-                        <a:srgbClr val="CBD5E1"/>
-                      </a:solidFill>
-                      <a:prstDash val="solid"/>
-                      <a:round/>
-                      <a:headEnd type="none" w="med" len="med"/>
-                      <a:tailEnd type="none" w="med" len="med"/>
-                    </a:lnT>
-                    <a:lnB w="6350" cap="flat" cmpd="sng" algn="ctr">
-                      <a:solidFill>
-                        <a:srgbClr val="CBD5E1"/>
-                      </a:solidFill>
-                      <a:prstDash val="solid"/>
-                      <a:round/>
-                      <a:headEnd type="none" w="med" len="med"/>
-                      <a:tailEnd type="none" w="med" len="med"/>
-                    </a:lnB>
-                    <a:solidFill>
-                      <a:srgbClr val="E8EFF8"/>
-                    </a:solidFill>
-                  </a:tcPr>
-                </a:tc>
-                <a:tc>
-                  <a:txBody>
-                    <a:bodyPr/>
-                    <a:lstStyle/>
-                    <a:p>
-                      <a:pPr algn="ctr" indent="0" marL="0">
-                        <a:buNone/>
-                      </a:pPr>
-                      <a:r>
-                        <a:rPr lang="en-US" sz="900" dirty="0">
-                          <a:solidFill>
-                            <a:srgbClr val="000000"/>
-                          </a:solidFill>
-                          <a:latin typeface="Arial" pitchFamily="34" charset="0"/>
-                          <a:ea typeface="Arial" pitchFamily="34" charset="-122"/>
-                          <a:cs typeface="Arial" pitchFamily="34" charset="-120"/>
-                        </a:rPr>
-                        <a:t>8.29</a:t>
+                        <a:t>8</a:t>
                       </a:r>
                       <a:endParaRPr lang="en-US" sz="900" dirty="0">
                         <a:latin typeface="Arial" charset="0"/>
@@ -9553,7 +9553,7 @@
                           <a:ea typeface="Arial" pitchFamily="34" charset="-122"/>
                           <a:cs typeface="Arial" pitchFamily="34" charset="-120"/>
                         </a:rPr>
-                        <a:t>8</a:t>
+                        <a:t>6</a:t>
                       </a:r>
                       <a:endParaRPr lang="en-US" sz="900" dirty="0">
                         <a:latin typeface="Arial" charset="0"/>
@@ -9621,7 +9621,7 @@
                           <a:ea typeface="Arial" pitchFamily="34" charset="-122"/>
                           <a:cs typeface="Arial" pitchFamily="34" charset="-120"/>
                         </a:rPr>
-                        <a:t>4</a:t>
+                        <a:t>3.83</a:t>
                       </a:r>
                       <a:endParaRPr lang="en-US" sz="900" dirty="0">
                         <a:latin typeface="Arial" charset="0"/>
@@ -9757,7 +9757,7 @@
                           <a:ea typeface="Arial" pitchFamily="34" charset="-122"/>
                           <a:cs typeface="Arial" pitchFamily="34" charset="-120"/>
                         </a:rPr>
-                        <a:t>8</a:t>
+                        <a:t>7.67</a:t>
                       </a:r>
                       <a:endParaRPr lang="en-US" sz="900" dirty="0">
                         <a:latin typeface="Arial" charset="0"/>
@@ -10165,7 +10165,7 @@
                 <a:ea typeface="Arial" pitchFamily="34" charset="-122"/>
                 <a:cs typeface="Arial" pitchFamily="34" charset="-120"/>
               </a:rPr>
-              <a:t>54件（80.6%）</a:t>
+              <a:t>31件（73.8%）</a:t>
             </a:r>
             <a:endParaRPr lang="en-US" sz="1100" dirty="0"/>
           </a:p>
@@ -10263,7 +10263,7 @@
                 <a:ea typeface="Arial" pitchFamily="34" charset="-122"/>
                 <a:cs typeface="Arial" pitchFamily="34" charset="-120"/>
               </a:rPr>
-              <a:t>13件（19.4%）</a:t>
+              <a:t>11件（26.2%）</a:t>
             </a:r>
             <a:endParaRPr lang="en-US" sz="1100" dirty="0"/>
           </a:p>
@@ -10695,7 +10695,7 @@
                 <a:ea typeface="Arial" pitchFamily="34" charset="-122"/>
                 <a:cs typeface="Arial" pitchFamily="34" charset="-120"/>
               </a:rPr>
-              <a:t>20件+</a:t>
+              <a:t>10件+</a:t>
             </a:r>
             <a:endParaRPr lang="en-US" sz="900" dirty="0"/>
           </a:p>
@@ -10773,7 +10773,7 @@
                 <a:ea typeface="Arial" pitchFamily="34" charset="-122"/>
                 <a:cs typeface="Arial" pitchFamily="34" charset="-120"/>
               </a:rPr>
-              <a:t>Good location with the train station is just 3 minutes of...</a:t>
+              <a:t>大崎出張で2回目のお世話となりました  前回同様に清潔、快適、駅近等々で今回もお世話になった次第です 大崎出張で2...</a:t>
             </a:r>
             <a:endParaRPr lang="en-US" sz="900" dirty="0"/>
           </a:p>
@@ -10812,7 +10812,7 @@
                 <a:ea typeface="Arial" pitchFamily="34" charset="-122"/>
                 <a:cs typeface="Arial" pitchFamily="34" charset="-120"/>
               </a:rPr>
-              <a:t>「駅が近くて駐車場も隣にあり良かった ございません ございません」</a:t>
+              <a:t>「駅に近いのも大きな利点です」</a:t>
             </a:r>
             <a:endParaRPr lang="en-US" sz="900" dirty="0"/>
           </a:p>
@@ -10996,7 +10996,7 @@
                 <a:ea typeface="Arial" pitchFamily="34" charset="-122"/>
                 <a:cs typeface="Arial" pitchFamily="34" charset="-120"/>
               </a:rPr>
-              <a:t>非常好乾凈 とても清潔</a:t>
+              <a:t>大崎出張で2回目のお世話となりました  前回同様に清潔、快適、駅近等々で今回もお世話になった次第です 大崎出張で2...</a:t>
             </a:r>
             <a:endParaRPr lang="en-US" sz="900" dirty="0"/>
           </a:p>
@@ -11035,7 +11035,7 @@
                 <a:ea typeface="Arial" pitchFamily="34" charset="-122"/>
                 <a:cs typeface="Arial" pitchFamily="34" charset="-120"/>
               </a:rPr>
-              <a:t>「それ以外は、部屋の広さと清潔さは気に入っています」</a:t>
+              <a:t>「対応がいつも迅速かつ丁寧なところや、部屋が綺麗」</a:t>
             </a:r>
             <a:endParaRPr lang="en-US" sz="900" dirty="0"/>
           </a:p>
@@ -11141,7 +11141,7 @@
                 <a:ea typeface="Arial" pitchFamily="34" charset="-122"/>
                 <a:cs typeface="Arial" pitchFamily="34" charset="-120"/>
               </a:rPr>
-              <a:t>10件+</a:t>
+              <a:t>9件</a:t>
             </a:r>
             <a:endParaRPr lang="en-US" sz="900" dirty="0"/>
           </a:p>
@@ -11156,6 +11156,452 @@
         <p:spPr>
           <a:xfrm>
             <a:off x="6263640" y="1124712"/>
+            <a:ext cx="1645920" cy="274320"/>
+          </a:xfrm>
+          <a:prstGeom prst="rect">
+            <a:avLst/>
+          </a:prstGeom>
+          <a:noFill/>
+          <a:ln/>
+        </p:spPr>
+        <p:txBody>
+          <a:bodyPr wrap="square" lIns="0" tIns="0" rIns="0" bIns="0" rtlCol="0" anchor="ctr"/>
+          <a:lstStyle/>
+          <a:p>
+            <a:pPr indent="0" marL="0">
+              <a:buNone/>
+            </a:pPr>
+            <a:r>
+              <a:rPr lang="en-US" sz="1300" b="1" dirty="0">
+                <a:solidFill>
+                  <a:srgbClr val="1A2744"/>
+                </a:solidFill>
+                <a:latin typeface="Arial" pitchFamily="34" charset="0"/>
+                <a:ea typeface="Arial" pitchFamily="34" charset="-122"/>
+                <a:cs typeface="Arial" pitchFamily="34" charset="-120"/>
+              </a:rPr>
+              <a:t>快適さ・設備</a:t>
+            </a:r>
+            <a:endParaRPr lang="en-US" sz="1300" dirty="0"/>
+          </a:p>
+        </p:txBody>
+      </p:sp>
+      <p:sp>
+        <p:nvSpPr>
+          <p:cNvPr id="24" name="Text 22"/>
+          <p:cNvSpPr/>
+          <p:nvPr/>
+        </p:nvSpPr>
+        <p:spPr>
+          <a:xfrm>
+            <a:off x="6263640" y="1417320"/>
+            <a:ext cx="2377440" cy="365760"/>
+          </a:xfrm>
+          <a:prstGeom prst="rect">
+            <a:avLst/>
+          </a:prstGeom>
+          <a:noFill/>
+          <a:ln/>
+        </p:spPr>
+        <p:txBody>
+          <a:bodyPr wrap="square" lIns="0" tIns="0" rIns="0" bIns="0" rtlCol="0" anchor="ctr"/>
+          <a:lstStyle/>
+          <a:p>
+            <a:pPr indent="0" marL="0">
+              <a:buNone/>
+            </a:pPr>
+            <a:r>
+              <a:rPr lang="en-US" sz="900" dirty="0">
+                <a:solidFill>
+                  <a:srgbClr val="64748B"/>
+                </a:solidFill>
+                <a:latin typeface="Arial" pitchFamily="34" charset="0"/>
+                <a:ea typeface="Arial" pitchFamily="34" charset="-122"/>
+                <a:cs typeface="Arial" pitchFamily="34" charset="-120"/>
+              </a:rPr>
+              <a:t>大崎出張で2回目のお世話となりました  前回同様に清潔、快適、駅近等々で今回もお世話になった次第です 大崎出張で2...</a:t>
+            </a:r>
+            <a:endParaRPr lang="en-US" sz="900" dirty="0"/>
+          </a:p>
+        </p:txBody>
+      </p:sp>
+      <p:sp>
+        <p:nvSpPr>
+          <p:cNvPr id="25" name="Text 23"/>
+          <p:cNvSpPr/>
+          <p:nvPr/>
+        </p:nvSpPr>
+        <p:spPr>
+          <a:xfrm>
+            <a:off x="6263640" y="1828800"/>
+            <a:ext cx="2377440" cy="640080"/>
+          </a:xfrm>
+          <a:prstGeom prst="rect">
+            <a:avLst/>
+          </a:prstGeom>
+          <a:noFill/>
+          <a:ln/>
+        </p:spPr>
+        <p:txBody>
+          <a:bodyPr wrap="square" lIns="0" tIns="0" rIns="0" bIns="0" rtlCol="0" anchor="ctr"/>
+          <a:lstStyle/>
+          <a:p>
+            <a:pPr indent="0" marL="0">
+              <a:buNone/>
+            </a:pPr>
+            <a:r>
+              <a:rPr lang="en-US" sz="900" i="1" dirty="0">
+                <a:solidFill>
+                  <a:srgbClr val="3B7DD8"/>
+                </a:solidFill>
+                <a:latin typeface="Arial" pitchFamily="34" charset="0"/>
+                <a:ea typeface="Arial" pitchFamily="34" charset="-122"/>
+                <a:cs typeface="Arial" pitchFamily="34" charset="-120"/>
+              </a:rPr>
+              <a:t>「残念ながら、私の部屋のマットレスは沈み込んでいて、全く快適ではありませんでした」</a:t>
+            </a:r>
+            <a:endParaRPr lang="en-US" sz="900" dirty="0"/>
+          </a:p>
+        </p:txBody>
+      </p:sp>
+      <p:sp>
+        <p:nvSpPr>
+          <p:cNvPr id="26" name="Shape 24"/>
+          <p:cNvSpPr/>
+          <p:nvPr/>
+        </p:nvSpPr>
+        <p:spPr>
+          <a:xfrm>
+            <a:off x="457200" y="2880360"/>
+            <a:ext cx="2651760" cy="1600200"/>
+          </a:xfrm>
+          <a:prstGeom prst="rect">
+            <a:avLst/>
+          </a:prstGeom>
+          <a:solidFill>
+            <a:srgbClr val="FFFFFF"/>
+          </a:solidFill>
+          <a:ln/>
+          <a:effectLst>
+            <a:outerShdw sx="100000" sy="100000" kx="0" ky="0" algn="bl" rotWithShape="0" blurRad="50800" dist="25400" dir="8100000">
+              <a:srgbClr val="000000">
+                <a:alpha val="10000"/>
+              </a:srgbClr>
+            </a:outerShdw>
+          </a:effectLst>
+        </p:spPr>
+      </p:sp>
+      <p:sp>
+        <p:nvSpPr>
+          <p:cNvPr id="27" name="Shape 25"/>
+          <p:cNvSpPr/>
+          <p:nvPr/>
+        </p:nvSpPr>
+        <p:spPr>
+          <a:xfrm>
+            <a:off x="457200" y="2880360"/>
+            <a:ext cx="54864" cy="1600200"/>
+          </a:xfrm>
+          <a:prstGeom prst="rect">
+            <a:avLst/>
+          </a:prstGeom>
+          <a:solidFill>
+            <a:srgbClr val="16A34A"/>
+          </a:solidFill>
+          <a:ln/>
+        </p:spPr>
+      </p:sp>
+      <p:sp>
+        <p:nvSpPr>
+          <p:cNvPr id="28" name="Shape 26"/>
+          <p:cNvSpPr/>
+          <p:nvPr/>
+        </p:nvSpPr>
+        <p:spPr>
+          <a:xfrm>
+            <a:off x="2286000" y="2953512"/>
+            <a:ext cx="658368" cy="228600"/>
+          </a:xfrm>
+          <a:prstGeom prst="rect">
+            <a:avLst/>
+          </a:prstGeom>
+          <a:solidFill>
+            <a:srgbClr val="DCFCE7"/>
+          </a:solidFill>
+          <a:ln/>
+        </p:spPr>
+      </p:sp>
+      <p:sp>
+        <p:nvSpPr>
+          <p:cNvPr id="29" name="Text 27"/>
+          <p:cNvSpPr/>
+          <p:nvPr/>
+        </p:nvSpPr>
+        <p:spPr>
+          <a:xfrm>
+            <a:off x="2286000" y="2953512"/>
+            <a:ext cx="658368" cy="228600"/>
+          </a:xfrm>
+          <a:prstGeom prst="rect">
+            <a:avLst/>
+          </a:prstGeom>
+          <a:noFill/>
+          <a:ln/>
+        </p:spPr>
+        <p:txBody>
+          <a:bodyPr wrap="square" lIns="0" tIns="0" rIns="0" bIns="0" rtlCol="0" anchor="ctr"/>
+          <a:lstStyle/>
+          <a:p>
+            <a:pPr algn="ctr" indent="0" marL="0">
+              <a:buNone/>
+            </a:pPr>
+            <a:r>
+              <a:rPr lang="en-US" sz="900" b="1" dirty="0">
+                <a:solidFill>
+                  <a:srgbClr val="16A34A"/>
+                </a:solidFill>
+                <a:latin typeface="Arial" pitchFamily="34" charset="0"/>
+                <a:ea typeface="Arial" pitchFamily="34" charset="-122"/>
+                <a:cs typeface="Arial" pitchFamily="34" charset="-120"/>
+              </a:rPr>
+              <a:t>8件</a:t>
+            </a:r>
+            <a:endParaRPr lang="en-US" sz="900" dirty="0"/>
+          </a:p>
+        </p:txBody>
+      </p:sp>
+      <p:sp>
+        <p:nvSpPr>
+          <p:cNvPr id="30" name="Text 28"/>
+          <p:cNvSpPr/>
+          <p:nvPr/>
+        </p:nvSpPr>
+        <p:spPr>
+          <a:xfrm>
+            <a:off x="594360" y="2953512"/>
+            <a:ext cx="1645920" cy="274320"/>
+          </a:xfrm>
+          <a:prstGeom prst="rect">
+            <a:avLst/>
+          </a:prstGeom>
+          <a:noFill/>
+          <a:ln/>
+        </p:spPr>
+        <p:txBody>
+          <a:bodyPr wrap="square" lIns="0" tIns="0" rIns="0" bIns="0" rtlCol="0" anchor="ctr"/>
+          <a:lstStyle/>
+          <a:p>
+            <a:pPr indent="0" marL="0">
+              <a:buNone/>
+            </a:pPr>
+            <a:r>
+              <a:rPr lang="en-US" sz="1300" b="1" dirty="0">
+                <a:solidFill>
+                  <a:srgbClr val="1A2744"/>
+                </a:solidFill>
+                <a:latin typeface="Arial" pitchFamily="34" charset="0"/>
+                <a:ea typeface="Arial" pitchFamily="34" charset="-122"/>
+                <a:cs typeface="Arial" pitchFamily="34" charset="-120"/>
+              </a:rPr>
+              <a:t>朝食</a:t>
+            </a:r>
+            <a:endParaRPr lang="en-US" sz="1300" dirty="0"/>
+          </a:p>
+        </p:txBody>
+      </p:sp>
+      <p:sp>
+        <p:nvSpPr>
+          <p:cNvPr id="31" name="Text 29"/>
+          <p:cNvSpPr/>
+          <p:nvPr/>
+        </p:nvSpPr>
+        <p:spPr>
+          <a:xfrm>
+            <a:off x="594360" y="3246120"/>
+            <a:ext cx="2377440" cy="365760"/>
+          </a:xfrm>
+          <a:prstGeom prst="rect">
+            <a:avLst/>
+          </a:prstGeom>
+          <a:noFill/>
+          <a:ln/>
+        </p:spPr>
+        <p:txBody>
+          <a:bodyPr wrap="square" lIns="0" tIns="0" rIns="0" bIns="0" rtlCol="0" anchor="ctr"/>
+          <a:lstStyle/>
+          <a:p>
+            <a:pPr indent="0" marL="0">
+              <a:buNone/>
+            </a:pPr>
+            <a:r>
+              <a:rPr lang="en-US" sz="900" dirty="0">
+                <a:solidFill>
+                  <a:srgbClr val="64748B"/>
+                </a:solidFill>
+                <a:latin typeface="Arial" pitchFamily="34" charset="0"/>
+                <a:ea typeface="Arial" pitchFamily="34" charset="-122"/>
+                <a:cs typeface="Arial" pitchFamily="34" charset="-120"/>
+              </a:rPr>
+              <a:t>以前、レストランが14階にあったと思うのですが、その時の朝食は素晴らしかったです</a:t>
+            </a:r>
+            <a:endParaRPr lang="en-US" sz="900" dirty="0"/>
+          </a:p>
+        </p:txBody>
+      </p:sp>
+      <p:sp>
+        <p:nvSpPr>
+          <p:cNvPr id="32" name="Text 30"/>
+          <p:cNvSpPr/>
+          <p:nvPr/>
+        </p:nvSpPr>
+        <p:spPr>
+          <a:xfrm>
+            <a:off x="594360" y="3657600"/>
+            <a:ext cx="2377440" cy="640080"/>
+          </a:xfrm>
+          <a:prstGeom prst="rect">
+            <a:avLst/>
+          </a:prstGeom>
+          <a:noFill/>
+          <a:ln/>
+        </p:spPr>
+        <p:txBody>
+          <a:bodyPr wrap="square" lIns="0" tIns="0" rIns="0" bIns="0" rtlCol="0" anchor="ctr"/>
+          <a:lstStyle/>
+          <a:p>
+            <a:pPr indent="0" marL="0">
+              <a:buNone/>
+            </a:pPr>
+            <a:r>
+              <a:rPr lang="en-US" sz="900" i="1" dirty="0">
+                <a:solidFill>
+                  <a:srgbClr val="3B7DD8"/>
+                </a:solidFill>
+                <a:latin typeface="Arial" pitchFamily="34" charset="0"/>
+                <a:ea typeface="Arial" pitchFamily="34" charset="-122"/>
+                <a:cs typeface="Arial" pitchFamily="34" charset="-120"/>
+              </a:rPr>
+              <a:t>「Gloomy cold breakfast in gloomy cold pseudo Italian resta...」</a:t>
+            </a:r>
+            <a:endParaRPr lang="en-US" sz="900" dirty="0"/>
+          </a:p>
+        </p:txBody>
+      </p:sp>
+      <p:sp>
+        <p:nvSpPr>
+          <p:cNvPr id="33" name="Shape 31"/>
+          <p:cNvSpPr/>
+          <p:nvPr/>
+        </p:nvSpPr>
+        <p:spPr>
+          <a:xfrm>
+            <a:off x="3291840" y="2880360"/>
+            <a:ext cx="2651760" cy="1600200"/>
+          </a:xfrm>
+          <a:prstGeom prst="rect">
+            <a:avLst/>
+          </a:prstGeom>
+          <a:solidFill>
+            <a:srgbClr val="FFFFFF"/>
+          </a:solidFill>
+          <a:ln/>
+          <a:effectLst>
+            <a:outerShdw sx="100000" sy="100000" kx="0" ky="0" algn="bl" rotWithShape="0" blurRad="50800" dist="25400" dir="8100000">
+              <a:srgbClr val="000000">
+                <a:alpha val="10000"/>
+              </a:srgbClr>
+            </a:outerShdw>
+          </a:effectLst>
+        </p:spPr>
+      </p:sp>
+      <p:sp>
+        <p:nvSpPr>
+          <p:cNvPr id="34" name="Shape 32"/>
+          <p:cNvSpPr/>
+          <p:nvPr/>
+        </p:nvSpPr>
+        <p:spPr>
+          <a:xfrm>
+            <a:off x="3291840" y="2880360"/>
+            <a:ext cx="54864" cy="1600200"/>
+          </a:xfrm>
+          <a:prstGeom prst="rect">
+            <a:avLst/>
+          </a:prstGeom>
+          <a:solidFill>
+            <a:srgbClr val="16A34A"/>
+          </a:solidFill>
+          <a:ln/>
+        </p:spPr>
+      </p:sp>
+      <p:sp>
+        <p:nvSpPr>
+          <p:cNvPr id="35" name="Shape 33"/>
+          <p:cNvSpPr/>
+          <p:nvPr/>
+        </p:nvSpPr>
+        <p:spPr>
+          <a:xfrm>
+            <a:off x="5120640" y="2953512"/>
+            <a:ext cx="658368" cy="228600"/>
+          </a:xfrm>
+          <a:prstGeom prst="rect">
+            <a:avLst/>
+          </a:prstGeom>
+          <a:solidFill>
+            <a:srgbClr val="DCFCE7"/>
+          </a:solidFill>
+          <a:ln/>
+        </p:spPr>
+      </p:sp>
+      <p:sp>
+        <p:nvSpPr>
+          <p:cNvPr id="36" name="Text 34"/>
+          <p:cNvSpPr/>
+          <p:nvPr/>
+        </p:nvSpPr>
+        <p:spPr>
+          <a:xfrm>
+            <a:off x="5120640" y="2953512"/>
+            <a:ext cx="658368" cy="228600"/>
+          </a:xfrm>
+          <a:prstGeom prst="rect">
+            <a:avLst/>
+          </a:prstGeom>
+          <a:noFill/>
+          <a:ln/>
+        </p:spPr>
+        <p:txBody>
+          <a:bodyPr wrap="square" lIns="0" tIns="0" rIns="0" bIns="0" rtlCol="0" anchor="ctr"/>
+          <a:lstStyle/>
+          <a:p>
+            <a:pPr algn="ctr" indent="0" marL="0">
+              <a:buNone/>
+            </a:pPr>
+            <a:r>
+              <a:rPr lang="en-US" sz="900" b="1" dirty="0">
+                <a:solidFill>
+                  <a:srgbClr val="16A34A"/>
+                </a:solidFill>
+                <a:latin typeface="Arial" pitchFamily="34" charset="0"/>
+                <a:ea typeface="Arial" pitchFamily="34" charset="-122"/>
+                <a:cs typeface="Arial" pitchFamily="34" charset="-120"/>
+              </a:rPr>
+              <a:t>7件</a:t>
+            </a:r>
+            <a:endParaRPr lang="en-US" sz="900" dirty="0"/>
+          </a:p>
+        </p:txBody>
+      </p:sp>
+      <p:sp>
+        <p:nvSpPr>
+          <p:cNvPr id="37" name="Text 35"/>
+          <p:cNvSpPr/>
+          <p:nvPr/>
+        </p:nvSpPr>
+        <p:spPr>
+          <a:xfrm>
+            <a:off x="3429000" y="2953512"/>
             <a:ext cx="1645920" cy="274320"/>
           </a:xfrm>
           <a:prstGeom prst="rect">
@@ -11188,13 +11634,13 @@
       </p:sp>
       <p:sp>
         <p:nvSpPr>
-          <p:cNvPr id="24" name="Text 22"/>
-          <p:cNvSpPr/>
-          <p:nvPr/>
-        </p:nvSpPr>
-        <p:spPr>
-          <a:xfrm>
-            <a:off x="6263640" y="1417320"/>
+          <p:cNvPr id="38" name="Text 36"/>
+          <p:cNvSpPr/>
+          <p:nvPr/>
+        </p:nvSpPr>
+        <p:spPr>
+          <a:xfrm>
+            <a:off x="3429000" y="3246120"/>
             <a:ext cx="2377440" cy="365760"/>
           </a:xfrm>
           <a:prstGeom prst="rect">
@@ -11219,7 +11665,7 @@
                 <a:ea typeface="Arial" pitchFamily="34" charset="-122"/>
                 <a:cs typeface="Arial" pitchFamily="34" charset="-120"/>
               </a:rPr>
-              <a:t>結局、貴重品は毎日フロントに預けなければなりませんでした</a:t>
+              <a:t>対応がいつも迅速かつ丁寧なところや、部屋が綺麗</a:t>
             </a:r>
             <a:endParaRPr lang="en-US" sz="900" dirty="0"/>
           </a:p>
@@ -11227,13 +11673,13 @@
       </p:sp>
       <p:sp>
         <p:nvSpPr>
-          <p:cNvPr id="25" name="Text 23"/>
-          <p:cNvSpPr/>
-          <p:nvPr/>
-        </p:nvSpPr>
-        <p:spPr>
-          <a:xfrm>
-            <a:off x="6263640" y="1828800"/>
+          <p:cNvPr id="39" name="Text 37"/>
+          <p:cNvSpPr/>
+          <p:nvPr/>
+        </p:nvSpPr>
+        <p:spPr>
+          <a:xfrm>
+            <a:off x="3429000" y="3657600"/>
             <a:ext cx="2377440" cy="640080"/>
           </a:xfrm>
           <a:prstGeom prst="rect">
@@ -11258,7 +11704,7 @@
                 <a:ea typeface="Arial" pitchFamily="34" charset="-122"/>
                 <a:cs typeface="Arial" pitchFamily="34" charset="-120"/>
               </a:rPr>
-              <a:t>「スタッフ皆さんに優しくしていただき感謝しています」</a:t>
+              <a:t>「スタッフは親切で笑顔が素敵です」</a:t>
             </a:r>
             <a:endParaRPr lang="en-US" sz="900" dirty="0"/>
           </a:p>
@@ -11266,13 +11712,13 @@
       </p:sp>
       <p:sp>
         <p:nvSpPr>
-          <p:cNvPr id="26" name="Shape 24"/>
-          <p:cNvSpPr/>
-          <p:nvPr/>
-        </p:nvSpPr>
-        <p:spPr>
-          <a:xfrm>
-            <a:off x="457200" y="2880360"/>
+          <p:cNvPr id="40" name="Shape 38"/>
+          <p:cNvSpPr/>
+          <p:nvPr/>
+        </p:nvSpPr>
+        <p:spPr>
+          <a:xfrm>
+            <a:off x="6126480" y="2880360"/>
             <a:ext cx="2651760" cy="1600200"/>
           </a:xfrm>
           <a:prstGeom prst="rect">
@@ -11293,13 +11739,13 @@
       </p:sp>
       <p:sp>
         <p:nvSpPr>
-          <p:cNvPr id="27" name="Shape 25"/>
-          <p:cNvSpPr/>
-          <p:nvPr/>
-        </p:nvSpPr>
-        <p:spPr>
-          <a:xfrm>
-            <a:off x="457200" y="2880360"/>
+          <p:cNvPr id="41" name="Shape 39"/>
+          <p:cNvSpPr/>
+          <p:nvPr/>
+        </p:nvSpPr>
+        <p:spPr>
+          <a:xfrm>
+            <a:off x="6126480" y="2880360"/>
             <a:ext cx="54864" cy="1600200"/>
           </a:xfrm>
           <a:prstGeom prst="rect">
@@ -11313,13 +11759,13 @@
       </p:sp>
       <p:sp>
         <p:nvSpPr>
-          <p:cNvPr id="28" name="Shape 26"/>
-          <p:cNvSpPr/>
-          <p:nvPr/>
-        </p:nvSpPr>
-        <p:spPr>
-          <a:xfrm>
-            <a:off x="2286000" y="2953512"/>
+          <p:cNvPr id="42" name="Shape 40"/>
+          <p:cNvSpPr/>
+          <p:nvPr/>
+        </p:nvSpPr>
+        <p:spPr>
+          <a:xfrm>
+            <a:off x="7955280" y="2953512"/>
             <a:ext cx="658368" cy="228600"/>
           </a:xfrm>
           <a:prstGeom prst="rect">
@@ -11333,13 +11779,13 @@
       </p:sp>
       <p:sp>
         <p:nvSpPr>
-          <p:cNvPr id="29" name="Text 27"/>
-          <p:cNvSpPr/>
-          <p:nvPr/>
-        </p:nvSpPr>
-        <p:spPr>
-          <a:xfrm>
-            <a:off x="2286000" y="2953512"/>
+          <p:cNvPr id="43" name="Text 41"/>
+          <p:cNvSpPr/>
+          <p:nvPr/>
+        </p:nvSpPr>
+        <p:spPr>
+          <a:xfrm>
+            <a:off x="7955280" y="2953512"/>
             <a:ext cx="658368" cy="228600"/>
           </a:xfrm>
           <a:prstGeom prst="rect">
@@ -11364,7 +11810,7 @@
                 <a:ea typeface="Arial" pitchFamily="34" charset="-122"/>
                 <a:cs typeface="Arial" pitchFamily="34" charset="-120"/>
               </a:rPr>
-              <a:t>10件+</a:t>
+              <a:t>4件</a:t>
             </a:r>
             <a:endParaRPr lang="en-US" sz="900" dirty="0"/>
           </a:p>
@@ -11372,236 +11818,13 @@
       </p:sp>
       <p:sp>
         <p:nvSpPr>
-          <p:cNvPr id="30" name="Text 28"/>
-          <p:cNvSpPr/>
-          <p:nvPr/>
-        </p:nvSpPr>
-        <p:spPr>
-          <a:xfrm>
-            <a:off x="594360" y="2953512"/>
-            <a:ext cx="1645920" cy="274320"/>
-          </a:xfrm>
-          <a:prstGeom prst="rect">
-            <a:avLst/>
-          </a:prstGeom>
-          <a:noFill/>
-          <a:ln/>
-        </p:spPr>
-        <p:txBody>
-          <a:bodyPr wrap="square" lIns="0" tIns="0" rIns="0" bIns="0" rtlCol="0" anchor="ctr"/>
-          <a:lstStyle/>
-          <a:p>
-            <a:pPr indent="0" marL="0">
-              <a:buNone/>
-            </a:pPr>
-            <a:r>
-              <a:rPr lang="en-US" sz="1300" b="1" dirty="0">
-                <a:solidFill>
-                  <a:srgbClr val="1A2744"/>
-                </a:solidFill>
-                <a:latin typeface="Arial" pitchFamily="34" charset="0"/>
-                <a:ea typeface="Arial" pitchFamily="34" charset="-122"/>
-                <a:cs typeface="Arial" pitchFamily="34" charset="-120"/>
-              </a:rPr>
-              <a:t>快適さ・設備</a:t>
-            </a:r>
-            <a:endParaRPr lang="en-US" sz="1300" dirty="0"/>
-          </a:p>
-        </p:txBody>
-      </p:sp>
-      <p:sp>
-        <p:nvSpPr>
-          <p:cNvPr id="31" name="Text 29"/>
-          <p:cNvSpPr/>
-          <p:nvPr/>
-        </p:nvSpPr>
-        <p:spPr>
-          <a:xfrm>
-            <a:off x="594360" y="3246120"/>
-            <a:ext cx="2377440" cy="365760"/>
-          </a:xfrm>
-          <a:prstGeom prst="rect">
-            <a:avLst/>
-          </a:prstGeom>
-          <a:noFill/>
-          <a:ln/>
-        </p:spPr>
-        <p:txBody>
-          <a:bodyPr wrap="square" lIns="0" tIns="0" rIns="0" bIns="0" rtlCol="0" anchor="ctr"/>
-          <a:lstStyle/>
-          <a:p>
-            <a:pPr indent="0" marL="0">
-              <a:buNone/>
-            </a:pPr>
-            <a:r>
-              <a:rPr lang="en-US" sz="900" dirty="0">
-                <a:solidFill>
-                  <a:srgbClr val="64748B"/>
-                </a:solidFill>
-                <a:latin typeface="Arial" pitchFamily="34" charset="0"/>
-                <a:ea typeface="Arial" pitchFamily="34" charset="-122"/>
-                <a:cs typeface="Arial" pitchFamily="34" charset="-120"/>
-              </a:rPr>
-              <a:t>残念ながら、私の部屋のマットレスは沈み込んでいて、全く快適ではありませんでした</a:t>
-            </a:r>
-            <a:endParaRPr lang="en-US" sz="900" dirty="0"/>
-          </a:p>
-        </p:txBody>
-      </p:sp>
-      <p:sp>
-        <p:nvSpPr>
-          <p:cNvPr id="32" name="Text 30"/>
-          <p:cNvSpPr/>
-          <p:nvPr/>
-        </p:nvSpPr>
-        <p:spPr>
-          <a:xfrm>
-            <a:off x="594360" y="3657600"/>
-            <a:ext cx="2377440" cy="640080"/>
-          </a:xfrm>
-          <a:prstGeom prst="rect">
-            <a:avLst/>
-          </a:prstGeom>
-          <a:noFill/>
-          <a:ln/>
-        </p:spPr>
-        <p:txBody>
-          <a:bodyPr wrap="square" lIns="0" tIns="0" rIns="0" bIns="0" rtlCol="0" anchor="ctr"/>
-          <a:lstStyle/>
-          <a:p>
-            <a:pPr indent="0" marL="0">
-              <a:buNone/>
-            </a:pPr>
-            <a:r>
-              <a:rPr lang="en-US" sz="900" i="1" dirty="0">
-                <a:solidFill>
-                  <a:srgbClr val="3B7DD8"/>
-                </a:solidFill>
-                <a:latin typeface="Arial" pitchFamily="34" charset="0"/>
-                <a:ea typeface="Arial" pitchFamily="34" charset="-122"/>
-                <a:cs typeface="Arial" pitchFamily="34" charset="-120"/>
-              </a:rPr>
-              <a:t>「コットンボールなどの基本的なアメニティが用意されていないのは驚きです」</a:t>
-            </a:r>
-            <a:endParaRPr lang="en-US" sz="900" dirty="0"/>
-          </a:p>
-        </p:txBody>
-      </p:sp>
-      <p:sp>
-        <p:nvSpPr>
-          <p:cNvPr id="33" name="Shape 31"/>
-          <p:cNvSpPr/>
-          <p:nvPr/>
-        </p:nvSpPr>
-        <p:spPr>
-          <a:xfrm>
-            <a:off x="3291840" y="2880360"/>
-            <a:ext cx="2651760" cy="1600200"/>
-          </a:xfrm>
-          <a:prstGeom prst="rect">
-            <a:avLst/>
-          </a:prstGeom>
-          <a:solidFill>
-            <a:srgbClr val="FFFFFF"/>
-          </a:solidFill>
-          <a:ln/>
-          <a:effectLst>
-            <a:outerShdw sx="100000" sy="100000" kx="0" ky="0" algn="bl" rotWithShape="0" blurRad="50800" dist="25400" dir="8100000">
-              <a:srgbClr val="000000">
-                <a:alpha val="10000"/>
-              </a:srgbClr>
-            </a:outerShdw>
-          </a:effectLst>
-        </p:spPr>
-      </p:sp>
-      <p:sp>
-        <p:nvSpPr>
-          <p:cNvPr id="34" name="Shape 32"/>
-          <p:cNvSpPr/>
-          <p:nvPr/>
-        </p:nvSpPr>
-        <p:spPr>
-          <a:xfrm>
-            <a:off x="3291840" y="2880360"/>
-            <a:ext cx="54864" cy="1600200"/>
-          </a:xfrm>
-          <a:prstGeom prst="rect">
-            <a:avLst/>
-          </a:prstGeom>
-          <a:solidFill>
-            <a:srgbClr val="16A34A"/>
-          </a:solidFill>
-          <a:ln/>
-        </p:spPr>
-      </p:sp>
-      <p:sp>
-        <p:nvSpPr>
-          <p:cNvPr id="35" name="Shape 33"/>
-          <p:cNvSpPr/>
-          <p:nvPr/>
-        </p:nvSpPr>
-        <p:spPr>
-          <a:xfrm>
-            <a:off x="5120640" y="2953512"/>
-            <a:ext cx="658368" cy="228600"/>
-          </a:xfrm>
-          <a:prstGeom prst="rect">
-            <a:avLst/>
-          </a:prstGeom>
-          <a:solidFill>
-            <a:srgbClr val="DCFCE7"/>
-          </a:solidFill>
-          <a:ln/>
-        </p:spPr>
-      </p:sp>
-      <p:sp>
-        <p:nvSpPr>
-          <p:cNvPr id="36" name="Text 34"/>
-          <p:cNvSpPr/>
-          <p:nvPr/>
-        </p:nvSpPr>
-        <p:spPr>
-          <a:xfrm>
-            <a:off x="5120640" y="2953512"/>
-            <a:ext cx="658368" cy="228600"/>
-          </a:xfrm>
-          <a:prstGeom prst="rect">
-            <a:avLst/>
-          </a:prstGeom>
-          <a:noFill/>
-          <a:ln/>
-        </p:spPr>
-        <p:txBody>
-          <a:bodyPr wrap="square" lIns="0" tIns="0" rIns="0" bIns="0" rtlCol="0" anchor="ctr"/>
-          <a:lstStyle/>
-          <a:p>
-            <a:pPr algn="ctr" indent="0" marL="0">
-              <a:buNone/>
-            </a:pPr>
-            <a:r>
-              <a:rPr lang="en-US" sz="900" b="1" dirty="0">
-                <a:solidFill>
-                  <a:srgbClr val="16A34A"/>
-                </a:solidFill>
-                <a:latin typeface="Arial" pitchFamily="34" charset="0"/>
-                <a:ea typeface="Arial" pitchFamily="34" charset="-122"/>
-                <a:cs typeface="Arial" pitchFamily="34" charset="-120"/>
-              </a:rPr>
-              <a:t>10件+</a:t>
-            </a:r>
-            <a:endParaRPr lang="en-US" sz="900" dirty="0"/>
-          </a:p>
-        </p:txBody>
-      </p:sp>
-      <p:sp>
-        <p:nvSpPr>
-          <p:cNvPr id="37" name="Text 35"/>
-          <p:cNvSpPr/>
-          <p:nvPr/>
-        </p:nvSpPr>
-        <p:spPr>
-          <a:xfrm>
-            <a:off x="3429000" y="2953512"/>
+          <p:cNvPr id="44" name="Text 42"/>
+          <p:cNvSpPr/>
+          <p:nvPr/>
+        </p:nvSpPr>
+        <p:spPr>
+          <a:xfrm>
+            <a:off x="6263640" y="2953512"/>
             <a:ext cx="1645920" cy="274320"/>
           </a:xfrm>
           <a:prstGeom prst="rect">
@@ -11627,229 +11850,6 @@
                 <a:cs typeface="Arial" pitchFamily="34" charset="-120"/>
               </a:rPr>
               <a:t>コンビニ・周辺施設</a:t>
-            </a:r>
-            <a:endParaRPr lang="en-US" sz="1300" dirty="0"/>
-          </a:p>
-        </p:txBody>
-      </p:sp>
-      <p:sp>
-        <p:nvSpPr>
-          <p:cNvPr id="38" name="Text 36"/>
-          <p:cNvSpPr/>
-          <p:nvPr/>
-        </p:nvSpPr>
-        <p:spPr>
-          <a:xfrm>
-            <a:off x="3429000" y="3246120"/>
-            <a:ext cx="2377440" cy="365760"/>
-          </a:xfrm>
-          <a:prstGeom prst="rect">
-            <a:avLst/>
-          </a:prstGeom>
-          <a:noFill/>
-          <a:ln/>
-        </p:spPr>
-        <p:txBody>
-          <a:bodyPr wrap="square" lIns="0" tIns="0" rIns="0" bIns="0" rtlCol="0" anchor="ctr"/>
-          <a:lstStyle/>
-          <a:p>
-            <a:pPr indent="0" marL="0">
-              <a:buNone/>
-            </a:pPr>
-            <a:r>
-              <a:rPr lang="en-US" sz="900" dirty="0">
-                <a:solidFill>
-                  <a:srgbClr val="64748B"/>
-                </a:solidFill>
-                <a:latin typeface="Arial" pitchFamily="34" charset="0"/>
-                <a:ea typeface="Arial" pitchFamily="34" charset="-122"/>
-                <a:cs typeface="Arial" pitchFamily="34" charset="-120"/>
-              </a:rPr>
-              <a:t>以前、レストランが14階にあったと思うのですが、その時の朝食は素晴らしかったです</a:t>
-            </a:r>
-            <a:endParaRPr lang="en-US" sz="900" dirty="0"/>
-          </a:p>
-        </p:txBody>
-      </p:sp>
-      <p:sp>
-        <p:nvSpPr>
-          <p:cNvPr id="39" name="Text 37"/>
-          <p:cNvSpPr/>
-          <p:nvPr/>
-        </p:nvSpPr>
-        <p:spPr>
-          <a:xfrm>
-            <a:off x="3429000" y="3657600"/>
-            <a:ext cx="2377440" cy="640080"/>
-          </a:xfrm>
-          <a:prstGeom prst="rect">
-            <a:avLst/>
-          </a:prstGeom>
-          <a:noFill/>
-          <a:ln/>
-        </p:spPr>
-        <p:txBody>
-          <a:bodyPr wrap="square" lIns="0" tIns="0" rIns="0" bIns="0" rtlCol="0" anchor="ctr"/>
-          <a:lstStyle/>
-          <a:p>
-            <a:pPr indent="0" marL="0">
-              <a:buNone/>
-            </a:pPr>
-            <a:r>
-              <a:rPr lang="en-US" sz="900" i="1" dirty="0">
-                <a:solidFill>
-                  <a:srgbClr val="3B7DD8"/>
-                </a:solidFill>
-                <a:latin typeface="Arial" pitchFamily="34" charset="0"/>
-                <a:ea typeface="Arial" pitchFamily="34" charset="-122"/>
-                <a:cs typeface="Arial" pitchFamily="34" charset="-120"/>
-              </a:rPr>
-              <a:t>「Gloomy cold breakfast in gloomy cold pseudo Italian resta...」</a:t>
-            </a:r>
-            <a:endParaRPr lang="en-US" sz="900" dirty="0"/>
-          </a:p>
-        </p:txBody>
-      </p:sp>
-      <p:sp>
-        <p:nvSpPr>
-          <p:cNvPr id="40" name="Shape 38"/>
-          <p:cNvSpPr/>
-          <p:nvPr/>
-        </p:nvSpPr>
-        <p:spPr>
-          <a:xfrm>
-            <a:off x="6126480" y="2880360"/>
-            <a:ext cx="2651760" cy="1600200"/>
-          </a:xfrm>
-          <a:prstGeom prst="rect">
-            <a:avLst/>
-          </a:prstGeom>
-          <a:solidFill>
-            <a:srgbClr val="FFFFFF"/>
-          </a:solidFill>
-          <a:ln/>
-          <a:effectLst>
-            <a:outerShdw sx="100000" sy="100000" kx="0" ky="0" algn="bl" rotWithShape="0" blurRad="50800" dist="25400" dir="8100000">
-              <a:srgbClr val="000000">
-                <a:alpha val="10000"/>
-              </a:srgbClr>
-            </a:outerShdw>
-          </a:effectLst>
-        </p:spPr>
-      </p:sp>
-      <p:sp>
-        <p:nvSpPr>
-          <p:cNvPr id="41" name="Shape 39"/>
-          <p:cNvSpPr/>
-          <p:nvPr/>
-        </p:nvSpPr>
-        <p:spPr>
-          <a:xfrm>
-            <a:off x="6126480" y="2880360"/>
-            <a:ext cx="54864" cy="1600200"/>
-          </a:xfrm>
-          <a:prstGeom prst="rect">
-            <a:avLst/>
-          </a:prstGeom>
-          <a:solidFill>
-            <a:srgbClr val="16A34A"/>
-          </a:solidFill>
-          <a:ln/>
-        </p:spPr>
-      </p:sp>
-      <p:sp>
-        <p:nvSpPr>
-          <p:cNvPr id="42" name="Shape 40"/>
-          <p:cNvSpPr/>
-          <p:nvPr/>
-        </p:nvSpPr>
-        <p:spPr>
-          <a:xfrm>
-            <a:off x="7955280" y="2953512"/>
-            <a:ext cx="658368" cy="228600"/>
-          </a:xfrm>
-          <a:prstGeom prst="rect">
-            <a:avLst/>
-          </a:prstGeom>
-          <a:solidFill>
-            <a:srgbClr val="DCFCE7"/>
-          </a:solidFill>
-          <a:ln/>
-        </p:spPr>
-      </p:sp>
-      <p:sp>
-        <p:nvSpPr>
-          <p:cNvPr id="43" name="Text 41"/>
-          <p:cNvSpPr/>
-          <p:nvPr/>
-        </p:nvSpPr>
-        <p:spPr>
-          <a:xfrm>
-            <a:off x="7955280" y="2953512"/>
-            <a:ext cx="658368" cy="228600"/>
-          </a:xfrm>
-          <a:prstGeom prst="rect">
-            <a:avLst/>
-          </a:prstGeom>
-          <a:noFill/>
-          <a:ln/>
-        </p:spPr>
-        <p:txBody>
-          <a:bodyPr wrap="square" lIns="0" tIns="0" rIns="0" bIns="0" rtlCol="0" anchor="ctr"/>
-          <a:lstStyle/>
-          <a:p>
-            <a:pPr algn="ctr" indent="0" marL="0">
-              <a:buNone/>
-            </a:pPr>
-            <a:r>
-              <a:rPr lang="en-US" sz="900" b="1" dirty="0">
-                <a:solidFill>
-                  <a:srgbClr val="16A34A"/>
-                </a:solidFill>
-                <a:latin typeface="Arial" pitchFamily="34" charset="0"/>
-                <a:ea typeface="Arial" pitchFamily="34" charset="-122"/>
-                <a:cs typeface="Arial" pitchFamily="34" charset="-120"/>
-              </a:rPr>
-              <a:t>8件</a:t>
-            </a:r>
-            <a:endParaRPr lang="en-US" sz="900" dirty="0"/>
-          </a:p>
-        </p:txBody>
-      </p:sp>
-      <p:sp>
-        <p:nvSpPr>
-          <p:cNvPr id="44" name="Text 42"/>
-          <p:cNvSpPr/>
-          <p:nvPr/>
-        </p:nvSpPr>
-        <p:spPr>
-          <a:xfrm>
-            <a:off x="6263640" y="2953512"/>
-            <a:ext cx="1645920" cy="274320"/>
-          </a:xfrm>
-          <a:prstGeom prst="rect">
-            <a:avLst/>
-          </a:prstGeom>
-          <a:noFill/>
-          <a:ln/>
-        </p:spPr>
-        <p:txBody>
-          <a:bodyPr wrap="square" lIns="0" tIns="0" rIns="0" bIns="0" rtlCol="0" anchor="ctr"/>
-          <a:lstStyle/>
-          <a:p>
-            <a:pPr indent="0" marL="0">
-              <a:buNone/>
-            </a:pPr>
-            <a:r>
-              <a:rPr lang="en-US" sz="1300" b="1" dirty="0">
-                <a:solidFill>
-                  <a:srgbClr val="1A2744"/>
-                </a:solidFill>
-                <a:latin typeface="Arial" pitchFamily="34" charset="0"/>
-                <a:ea typeface="Arial" pitchFamily="34" charset="-122"/>
-                <a:cs typeface="Arial" pitchFamily="34" charset="-120"/>
-              </a:rPr>
-              <a:t>朝食</a:t>
             </a:r>
             <a:endParaRPr lang="en-US" sz="1300" dirty="0"/>
           </a:p>
@@ -12685,7 +12685,7 @@
                           <a:ea typeface="Arial" pitchFamily="34" charset="-122"/>
                           <a:cs typeface="Arial" pitchFamily="34" charset="-120"/>
                         </a:rPr>
-                        <a:t>4件</a:t>
+                        <a:t>3件</a:t>
                       </a:r>
                       <a:endParaRPr lang="en-US" sz="900" dirty="0">
                         <a:latin typeface="Arial" charset="0"/>
@@ -12823,7 +12823,7 @@
                           <a:ea typeface="Arial" pitchFamily="34" charset="-122"/>
                           <a:cs typeface="Arial" pitchFamily="34" charset="-120"/>
                         </a:rPr>
-                        <a:t>浴室・水回り</a:t>
+                        <a:t>対応・サービスの不満</a:t>
                       </a:r>
                       <a:endParaRPr lang="en-US" sz="900" dirty="0">
                         <a:latin typeface="Arial" charset="0"/>
@@ -12891,7 +12891,7 @@
                           <a:ea typeface="Arial" pitchFamily="34" charset="-122"/>
                           <a:cs typeface="Arial" pitchFamily="34" charset="-120"/>
                         </a:rPr>
-                        <a:t>広いお部屋にしていただいたおかげで、トイレとお風呂も十分な広さがあり、子供と二人で着替えやトイレ利用をしても全く窮...</a:t>
+                        <a:t>残念ながら、私の部屋のマットレスは沈み込んでいて、全く快適ではありませんでした</a:t>
                       </a:r>
                       <a:endParaRPr lang="en-US" sz="900" dirty="0">
                         <a:latin typeface="Arial" charset="0"/>
@@ -12959,7 +12959,7 @@
                           <a:ea typeface="Arial" pitchFamily="34" charset="-122"/>
                           <a:cs typeface="Arial" pitchFamily="34" charset="-120"/>
                         </a:rPr>
-                        <a:t>3件</a:t>
+                        <a:t>2件</a:t>
                       </a:r>
                       <a:endParaRPr lang="en-US" sz="900" dirty="0">
                         <a:latin typeface="Arial" charset="0"/>
@@ -13097,7 +13097,7 @@
                           <a:ea typeface="Arial" pitchFamily="34" charset="-122"/>
                           <a:cs typeface="Arial" pitchFamily="34" charset="-120"/>
                         </a:rPr>
-                        <a:t>部屋の狭さ</a:t>
+                        <a:t>設備の老朽化</a:t>
                       </a:r>
                       <a:endParaRPr lang="en-US" sz="900" dirty="0">
                         <a:latin typeface="Arial" charset="0"/>
@@ -13165,7 +13165,7 @@
                           <a:ea typeface="Arial" pitchFamily="34" charset="-122"/>
                           <a:cs typeface="Arial" pitchFamily="34" charset="-120"/>
                         </a:rPr>
-                        <a:t>広いお部屋にしていただいたおかげで、トイレとお風呂も十分な広さがあり、子供と二人で着替えやトイレ利用をしても全く窮...</a:t>
+                        <a:t>Gloomy cold breakfast in gloomy cold pseudo Italian resta...</a:t>
                       </a:r>
                       <a:endParaRPr lang="en-US" sz="900" dirty="0">
                         <a:latin typeface="Arial" charset="0"/>
@@ -13233,7 +13233,7 @@
                           <a:ea typeface="Arial" pitchFamily="34" charset="-122"/>
                           <a:cs typeface="Arial" pitchFamily="34" charset="-120"/>
                         </a:rPr>
-                        <a:t>2件</a:t>
+                        <a:t>1件</a:t>
                       </a:r>
                       <a:endParaRPr lang="en-US" sz="900" dirty="0">
                         <a:latin typeface="Arial" charset="0"/>
@@ -13371,7 +13371,7 @@
                           <a:ea typeface="Arial" pitchFamily="34" charset="-122"/>
                           <a:cs typeface="Arial" pitchFamily="34" charset="-120"/>
                         </a:rPr>
-                        <a:t>対応・サービスの不満</a:t>
+                        <a:t>部屋の狭さ</a:t>
                       </a:r>
                       <a:endParaRPr lang="en-US" sz="900" dirty="0">
                         <a:latin typeface="Arial" charset="0"/>
@@ -13439,7 +13439,7 @@
                           <a:ea typeface="Arial" pitchFamily="34" charset="-122"/>
                           <a:cs typeface="Arial" pitchFamily="34" charset="-120"/>
                         </a:rPr>
-                        <a:t>残念ながら、私の部屋のマットレスは沈み込んでいて、全く快適ではありませんでした</a:t>
+                        <a:t>広いお部屋にしていただいたおかげで、トイレとお風呂も十分な広さがあり、子供と二人で着替えやトイレ利用をしても全く窮...</a:t>
                       </a:r>
                       <a:endParaRPr lang="en-US" sz="900" dirty="0">
                         <a:latin typeface="Arial" charset="0"/>
@@ -13507,7 +13507,7 @@
                           <a:ea typeface="Arial" pitchFamily="34" charset="-122"/>
                           <a:cs typeface="Arial" pitchFamily="34" charset="-120"/>
                         </a:rPr>
-                        <a:t>2件</a:t>
+                        <a:t>1件</a:t>
                       </a:r>
                       <a:endParaRPr lang="en-US" sz="900" dirty="0">
                         <a:latin typeface="Arial" charset="0"/>
@@ -13645,7 +13645,7 @@
                           <a:ea typeface="Arial" pitchFamily="34" charset="-122"/>
                           <a:cs typeface="Arial" pitchFamily="34" charset="-120"/>
                         </a:rPr>
-                        <a:t>設備の老朽化</a:t>
+                        <a:t>浴室・水回り</a:t>
                       </a:r>
                       <a:endParaRPr lang="en-US" sz="900" dirty="0">
                         <a:latin typeface="Arial" charset="0"/>
@@ -13713,7 +13713,7 @@
                           <a:ea typeface="Arial" pitchFamily="34" charset="-122"/>
                           <a:cs typeface="Arial" pitchFamily="34" charset="-120"/>
                         </a:rPr>
-                        <a:t>Gloomy cold breakfast in gloomy cold pseudo Italian resta...</a:t>
+                        <a:t>広いお部屋にしていただいたおかげで、トイレとお風呂も十分な広さがあり、子供と二人で着替えやトイレ利用をしても全く窮...</a:t>
                       </a:r>
                       <a:endParaRPr lang="en-US" sz="900" dirty="0">
                         <a:latin typeface="Arial" charset="0"/>
@@ -13919,7 +13919,7 @@
                           <a:ea typeface="Arial" pitchFamily="34" charset="-122"/>
                           <a:cs typeface="Arial" pitchFamily="34" charset="-120"/>
                         </a:rPr>
-                        <a:t>臭い・匂い</a:t>
+                        <a:t>窓・採光</a:t>
                       </a:r>
                       <a:endParaRPr lang="en-US" sz="900" dirty="0">
                         <a:latin typeface="Arial" charset="0"/>
@@ -13987,7 +13987,7 @@
                           <a:ea typeface="Arial" pitchFamily="34" charset="-122"/>
                           <a:cs typeface="Arial" pitchFamily="34" charset="-120"/>
                         </a:rPr>
-                        <a:t>少しお風呂、水回りの匂いが気になりましたが、それ以外は何にも不便も不快もありません</a:t>
+                        <a:t>立地はとても便利で、窓の一つからは素晴らしい景色が望めます</a:t>
                       </a:r>
                       <a:endParaRPr lang="en-US" sz="900" dirty="0">
                         <a:latin typeface="Arial" charset="0"/>
@@ -14107,280 +14107,6 @@
                   </a:tcPr>
                 </a:tc>
               </a:tr>
-              <a:tr h="320040">
-                <a:tc>
-                  <a:txBody>
-                    <a:bodyPr/>
-                    <a:lstStyle/>
-                    <a:p>
-                      <a:pPr algn="ctr" indent="0" marL="0">
-                        <a:buNone/>
-                      </a:pPr>
-                      <a:r>
-                        <a:rPr lang="en-US" sz="1200" b="1" dirty="0">
-                          <a:solidFill>
-                            <a:srgbClr val="94A3B8"/>
-                          </a:solidFill>
-                          <a:latin typeface="Arial" pitchFamily="34" charset="0"/>
-                          <a:ea typeface="Arial" pitchFamily="34" charset="-122"/>
-                          <a:cs typeface="Arial" pitchFamily="34" charset="-120"/>
-                        </a:rPr>
-                        <a:t>C</a:t>
-                      </a:r>
-                      <a:endParaRPr lang="en-US" sz="1200" dirty="0">
-                        <a:latin typeface="Arial" charset="0"/>
-                        <a:ea typeface="Arial" charset="0"/>
-                        <a:cs typeface="Arial" charset="0"/>
-                      </a:endParaRPr>
-                    </a:p>
-                  </a:txBody>
-                  <a:tcPr marL="91440" marR="91440" marT="45720" marB="45720">
-                    <a:lnL w="6350" cap="flat" cmpd="sng" algn="ctr">
-                      <a:solidFill>
-                        <a:srgbClr val="CBD5E1"/>
-                      </a:solidFill>
-                      <a:prstDash val="solid"/>
-                      <a:round/>
-                      <a:headEnd type="none" w="med" len="med"/>
-                      <a:tailEnd type="none" w="med" len="med"/>
-                    </a:lnL>
-                    <a:lnR w="6350" cap="flat" cmpd="sng" algn="ctr">
-                      <a:solidFill>
-                        <a:srgbClr val="CBD5E1"/>
-                      </a:solidFill>
-                      <a:prstDash val="solid"/>
-                      <a:round/>
-                      <a:headEnd type="none" w="med" len="med"/>
-                      <a:tailEnd type="none" w="med" len="med"/>
-                    </a:lnR>
-                    <a:lnT w="6350" cap="flat" cmpd="sng" algn="ctr">
-                      <a:solidFill>
-                        <a:srgbClr val="CBD5E1"/>
-                      </a:solidFill>
-                      <a:prstDash val="solid"/>
-                      <a:round/>
-                      <a:headEnd type="none" w="med" len="med"/>
-                      <a:tailEnd type="none" w="med" len="med"/>
-                    </a:lnT>
-                    <a:lnB w="6350" cap="flat" cmpd="sng" algn="ctr">
-                      <a:solidFill>
-                        <a:srgbClr val="CBD5E1"/>
-                      </a:solidFill>
-                      <a:prstDash val="solid"/>
-                      <a:round/>
-                      <a:headEnd type="none" w="med" len="med"/>
-                      <a:tailEnd type="none" w="med" len="med"/>
-                    </a:lnB>
-                    <a:solidFill>
-                      <a:srgbClr val="E8EFF8"/>
-                    </a:solidFill>
-                  </a:tcPr>
-                </a:tc>
-                <a:tc>
-                  <a:txBody>
-                    <a:bodyPr/>
-                    <a:lstStyle/>
-                    <a:p>
-                      <a:pPr indent="0" marL="0">
-                        <a:buNone/>
-                      </a:pPr>
-                      <a:r>
-                        <a:rPr lang="en-US" sz="900" b="1" dirty="0">
-                          <a:solidFill>
-                            <a:srgbClr val="334155"/>
-                          </a:solidFill>
-                          <a:latin typeface="Arial" pitchFamily="34" charset="0"/>
-                          <a:ea typeface="Arial" pitchFamily="34" charset="-122"/>
-                          <a:cs typeface="Arial" pitchFamily="34" charset="-120"/>
-                        </a:rPr>
-                        <a:t>窓・採光</a:t>
-                      </a:r>
-                      <a:endParaRPr lang="en-US" sz="900" dirty="0">
-                        <a:latin typeface="Arial" charset="0"/>
-                        <a:ea typeface="Arial" charset="0"/>
-                        <a:cs typeface="Arial" charset="0"/>
-                      </a:endParaRPr>
-                    </a:p>
-                  </a:txBody>
-                  <a:tcPr marL="91440" marR="91440" marT="45720" marB="45720">
-                    <a:lnL w="6350" cap="flat" cmpd="sng" algn="ctr">
-                      <a:solidFill>
-                        <a:srgbClr val="CBD5E1"/>
-                      </a:solidFill>
-                      <a:prstDash val="solid"/>
-                      <a:round/>
-                      <a:headEnd type="none" w="med" len="med"/>
-                      <a:tailEnd type="none" w="med" len="med"/>
-                    </a:lnL>
-                    <a:lnR w="6350" cap="flat" cmpd="sng" algn="ctr">
-                      <a:solidFill>
-                        <a:srgbClr val="CBD5E1"/>
-                      </a:solidFill>
-                      <a:prstDash val="solid"/>
-                      <a:round/>
-                      <a:headEnd type="none" w="med" len="med"/>
-                      <a:tailEnd type="none" w="med" len="med"/>
-                    </a:lnR>
-                    <a:lnT w="6350" cap="flat" cmpd="sng" algn="ctr">
-                      <a:solidFill>
-                        <a:srgbClr val="CBD5E1"/>
-                      </a:solidFill>
-                      <a:prstDash val="solid"/>
-                      <a:round/>
-                      <a:headEnd type="none" w="med" len="med"/>
-                      <a:tailEnd type="none" w="med" len="med"/>
-                    </a:lnT>
-                    <a:lnB w="6350" cap="flat" cmpd="sng" algn="ctr">
-                      <a:solidFill>
-                        <a:srgbClr val="CBD5E1"/>
-                      </a:solidFill>
-                      <a:prstDash val="solid"/>
-                      <a:round/>
-                      <a:headEnd type="none" w="med" len="med"/>
-                      <a:tailEnd type="none" w="med" len="med"/>
-                    </a:lnB>
-                    <a:solidFill>
-                      <a:srgbClr val="E8EFF8"/>
-                    </a:solidFill>
-                  </a:tcPr>
-                </a:tc>
-                <a:tc>
-                  <a:txBody>
-                    <a:bodyPr/>
-                    <a:lstStyle/>
-                    <a:p>
-                      <a:pPr indent="0" marL="0">
-                        <a:buNone/>
-                      </a:pPr>
-                      <a:r>
-                        <a:rPr lang="en-US" sz="900" dirty="0">
-                          <a:solidFill>
-                            <a:srgbClr val="64748B"/>
-                          </a:solidFill>
-                          <a:latin typeface="Arial" pitchFamily="34" charset="0"/>
-                          <a:ea typeface="Arial" pitchFamily="34" charset="-122"/>
-                          <a:cs typeface="Arial" pitchFamily="34" charset="-120"/>
-                        </a:rPr>
-                        <a:t>立地はとても便利で、窓の一つからは素晴らしい景色が望めます</a:t>
-                      </a:r>
-                      <a:endParaRPr lang="en-US" sz="900" dirty="0">
-                        <a:latin typeface="Arial" charset="0"/>
-                        <a:ea typeface="Arial" charset="0"/>
-                        <a:cs typeface="Arial" charset="0"/>
-                      </a:endParaRPr>
-                    </a:p>
-                  </a:txBody>
-                  <a:tcPr marL="91440" marR="91440" marT="45720" marB="45720">
-                    <a:lnL w="6350" cap="flat" cmpd="sng" algn="ctr">
-                      <a:solidFill>
-                        <a:srgbClr val="CBD5E1"/>
-                      </a:solidFill>
-                      <a:prstDash val="solid"/>
-                      <a:round/>
-                      <a:headEnd type="none" w="med" len="med"/>
-                      <a:tailEnd type="none" w="med" len="med"/>
-                    </a:lnL>
-                    <a:lnR w="6350" cap="flat" cmpd="sng" algn="ctr">
-                      <a:solidFill>
-                        <a:srgbClr val="CBD5E1"/>
-                      </a:solidFill>
-                      <a:prstDash val="solid"/>
-                      <a:round/>
-                      <a:headEnd type="none" w="med" len="med"/>
-                      <a:tailEnd type="none" w="med" len="med"/>
-                    </a:lnR>
-                    <a:lnT w="6350" cap="flat" cmpd="sng" algn="ctr">
-                      <a:solidFill>
-                        <a:srgbClr val="CBD5E1"/>
-                      </a:solidFill>
-                      <a:prstDash val="solid"/>
-                      <a:round/>
-                      <a:headEnd type="none" w="med" len="med"/>
-                      <a:tailEnd type="none" w="med" len="med"/>
-                    </a:lnT>
-                    <a:lnB w="6350" cap="flat" cmpd="sng" algn="ctr">
-                      <a:solidFill>
-                        <a:srgbClr val="CBD5E1"/>
-                      </a:solidFill>
-                      <a:prstDash val="solid"/>
-                      <a:round/>
-                      <a:headEnd type="none" w="med" len="med"/>
-                      <a:tailEnd type="none" w="med" len="med"/>
-                    </a:lnB>
-                    <a:solidFill>
-                      <a:srgbClr val="E8EFF8"/>
-                    </a:solidFill>
-                  </a:tcPr>
-                </a:tc>
-                <a:tc>
-                  <a:txBody>
-                    <a:bodyPr/>
-                    <a:lstStyle/>
-                    <a:p>
-                      <a:pPr algn="ctr" indent="0" marL="0">
-                        <a:buNone/>
-                      </a:pPr>
-                      <a:r>
-                        <a:rPr lang="en-US" sz="900" dirty="0">
-                          <a:solidFill>
-                            <a:srgbClr val="334155"/>
-                          </a:solidFill>
-                          <a:latin typeface="Arial" pitchFamily="34" charset="0"/>
-                          <a:ea typeface="Arial" pitchFamily="34" charset="-122"/>
-                          <a:cs typeface="Arial" pitchFamily="34" charset="-120"/>
-                        </a:rPr>
-                        <a:t>1件</a:t>
-                      </a:r>
-                      <a:endParaRPr lang="en-US" sz="900" dirty="0">
-                        <a:latin typeface="Arial" charset="0"/>
-                        <a:ea typeface="Arial" charset="0"/>
-                        <a:cs typeface="Arial" charset="0"/>
-                      </a:endParaRPr>
-                    </a:p>
-                  </a:txBody>
-                  <a:tcPr marL="91440" marR="91440" marT="45720" marB="45720">
-                    <a:lnL w="6350" cap="flat" cmpd="sng" algn="ctr">
-                      <a:solidFill>
-                        <a:srgbClr val="CBD5E1"/>
-                      </a:solidFill>
-                      <a:prstDash val="solid"/>
-                      <a:round/>
-                      <a:headEnd type="none" w="med" len="med"/>
-                      <a:tailEnd type="none" w="med" len="med"/>
-                    </a:lnL>
-                    <a:lnR w="6350" cap="flat" cmpd="sng" algn="ctr">
-                      <a:solidFill>
-                        <a:srgbClr val="CBD5E1"/>
-                      </a:solidFill>
-                      <a:prstDash val="solid"/>
-                      <a:round/>
-                      <a:headEnd type="none" w="med" len="med"/>
-                      <a:tailEnd type="none" w="med" len="med"/>
-                    </a:lnR>
-                    <a:lnT w="6350" cap="flat" cmpd="sng" algn="ctr">
-                      <a:solidFill>
-                        <a:srgbClr val="CBD5E1"/>
-                      </a:solidFill>
-                      <a:prstDash val="solid"/>
-                      <a:round/>
-                      <a:headEnd type="none" w="med" len="med"/>
-                      <a:tailEnd type="none" w="med" len="med"/>
-                    </a:lnT>
-                    <a:lnB w="6350" cap="flat" cmpd="sng" algn="ctr">
-                      <a:solidFill>
-                        <a:srgbClr val="CBD5E1"/>
-                      </a:solidFill>
-                      <a:prstDash val="solid"/>
-                      <a:round/>
-                      <a:headEnd type="none" w="med" len="med"/>
-                      <a:tailEnd type="none" w="med" len="med"/>
-                    </a:lnB>
-                    <a:solidFill>
-                      <a:srgbClr val="E8EFF8"/>
-                    </a:solidFill>
-                  </a:tcPr>
-                </a:tc>
-              </a:tr>
             </a:tbl>
           </a:graphicData>
         </a:graphic>
@@ -14869,7 +14595,7 @@
                 <a:ea typeface="Arial" pitchFamily="34" charset="-122"/>
                 <a:cs typeface="Arial" pitchFamily="34" charset="-120"/>
               </a:rPr>
-              <a:t>客室の消臭対策の強化</a:t>
+              <a:t>エアコン・空調の定期点検強化</a:t>
             </a:r>
             <a:endParaRPr lang="en-US" sz="1200" dirty="0"/>
           </a:p>
@@ -14884,177 +14610,6 @@
         <p:spPr>
           <a:xfrm>
             <a:off x="594360" y="1600200"/>
-            <a:ext cx="3657600" cy="1188720"/>
-          </a:xfrm>
-          <a:prstGeom prst="rect">
-            <a:avLst/>
-          </a:prstGeom>
-          <a:noFill/>
-          <a:ln/>
-        </p:spPr>
-        <p:txBody>
-          <a:bodyPr wrap="square" lIns="0" tIns="0" rIns="0" bIns="0" rtlCol="0" anchor="ctr"/>
-          <a:lstStyle/>
-          <a:p>
-            <a:pPr marL="342900" indent="-342900">
-              <a:spcAft>
-                <a:spcPts val="300"/>
-              </a:spcAft>
-              <a:buSzPct val="100000"/>
-              <a:buChar char="•"/>
-            </a:pPr>
-            <a:r>
-              <a:rPr lang="en-US" sz="900" dirty="0">
-                <a:solidFill>
-                  <a:srgbClr val="334155"/>
-                </a:solidFill>
-                <a:latin typeface="Arial" pitchFamily="34" charset="0"/>
-                <a:ea typeface="Arial" pitchFamily="34" charset="-122"/>
-                <a:cs typeface="Arial" pitchFamily="34" charset="-120"/>
-              </a:rPr>
-              <a:t>チェックアウト後の換気・消臭スプレー処理の徹底</a:t>
-            </a:r>
-            <a:endParaRPr lang="en-US" sz="900" dirty="0"/>
-          </a:p>
-          <a:p>
-            <a:pPr marL="342900" indent="-342900">
-              <a:spcAft>
-                <a:spcPts val="300"/>
-              </a:spcAft>
-              <a:buSzPct val="100000"/>
-              <a:buChar char="•"/>
-            </a:pPr>
-            <a:r>
-              <a:rPr lang="en-US" sz="900" dirty="0">
-                <a:solidFill>
-                  <a:srgbClr val="334155"/>
-                </a:solidFill>
-                <a:latin typeface="Arial" pitchFamily="34" charset="0"/>
-                <a:ea typeface="Arial" pitchFamily="34" charset="-122"/>
-                <a:cs typeface="Arial" pitchFamily="34" charset="-120"/>
-              </a:rPr>
-              <a:t>定期的な脱臭剤の設置と交換フローの確立</a:t>
-            </a:r>
-            <a:endParaRPr lang="en-US" sz="900" dirty="0"/>
-          </a:p>
-          <a:p>
-            <a:pPr marL="342900" indent="-342900">
-              <a:spcAft>
-                <a:spcPts val="300"/>
-              </a:spcAft>
-              <a:buSzPct val="100000"/>
-              <a:buChar char="•"/>
-            </a:pPr>
-            <a:r>
-              <a:rPr lang="en-US" sz="900" dirty="0">
-                <a:solidFill>
-                  <a:srgbClr val="334155"/>
-                </a:solidFill>
-                <a:latin typeface="Arial" pitchFamily="34" charset="0"/>
-                <a:ea typeface="Arial" pitchFamily="34" charset="-122"/>
-                <a:cs typeface="Arial" pitchFamily="34" charset="-120"/>
-              </a:rPr>
-              <a:t>喫煙・臭いに関するクレーム発生時の即座対応マニュアル作成</a:t>
-            </a:r>
-            <a:endParaRPr lang="en-US" sz="900" dirty="0"/>
-          </a:p>
-        </p:txBody>
-      </p:sp>
-      <p:sp>
-        <p:nvSpPr>
-          <p:cNvPr id="10" name="Shape 8"/>
-          <p:cNvSpPr/>
-          <p:nvPr/>
-        </p:nvSpPr>
-        <p:spPr>
-          <a:xfrm>
-            <a:off x="4663440" y="1234440"/>
-            <a:ext cx="3977640" cy="1600200"/>
-          </a:xfrm>
-          <a:prstGeom prst="rect">
-            <a:avLst/>
-          </a:prstGeom>
-          <a:solidFill>
-            <a:srgbClr val="FFFFFF"/>
-          </a:solidFill>
-          <a:ln/>
-          <a:effectLst>
-            <a:outerShdw sx="100000" sy="100000" kx="0" ky="0" algn="bl" rotWithShape="0" blurRad="50800" dist="25400" dir="8100000">
-              <a:srgbClr val="000000">
-                <a:alpha val="10000"/>
-              </a:srgbClr>
-            </a:outerShdw>
-          </a:effectLst>
-        </p:spPr>
-      </p:sp>
-      <p:sp>
-        <p:nvSpPr>
-          <p:cNvPr id="11" name="Shape 9"/>
-          <p:cNvSpPr/>
-          <p:nvPr/>
-        </p:nvSpPr>
-        <p:spPr>
-          <a:xfrm>
-            <a:off x="4663440" y="1234440"/>
-            <a:ext cx="54864" cy="1600200"/>
-          </a:xfrm>
-          <a:prstGeom prst="rect">
-            <a:avLst/>
-          </a:prstGeom>
-          <a:solidFill>
-            <a:srgbClr val="3B7DD8"/>
-          </a:solidFill>
-          <a:ln/>
-        </p:spPr>
-      </p:sp>
-      <p:sp>
-        <p:nvSpPr>
-          <p:cNvPr id="12" name="Text 10"/>
-          <p:cNvSpPr/>
-          <p:nvPr/>
-        </p:nvSpPr>
-        <p:spPr>
-          <a:xfrm>
-            <a:off x="4800600" y="1280160"/>
-            <a:ext cx="3657600" cy="320040"/>
-          </a:xfrm>
-          <a:prstGeom prst="rect">
-            <a:avLst/>
-          </a:prstGeom>
-          <a:noFill/>
-          <a:ln/>
-        </p:spPr>
-        <p:txBody>
-          <a:bodyPr wrap="square" lIns="0" tIns="0" rIns="0" bIns="0" rtlCol="0" anchor="ctr"/>
-          <a:lstStyle/>
-          <a:p>
-            <a:pPr indent="0" marL="0">
-              <a:buNone/>
-            </a:pPr>
-            <a:r>
-              <a:rPr lang="en-US" sz="1200" b="1" dirty="0">
-                <a:solidFill>
-                  <a:srgbClr val="1A2744"/>
-                </a:solidFill>
-                <a:latin typeface="Arial" pitchFamily="34" charset="0"/>
-                <a:ea typeface="Arial" pitchFamily="34" charset="-122"/>
-                <a:cs typeface="Arial" pitchFamily="34" charset="-120"/>
-              </a:rPr>
-              <a:t>エアコン・空調の定期点検強化</a:t>
-            </a:r>
-            <a:endParaRPr lang="en-US" sz="1200" dirty="0"/>
-          </a:p>
-        </p:txBody>
-      </p:sp>
-      <p:sp>
-        <p:nvSpPr>
-          <p:cNvPr id="13" name="Text 11"/>
-          <p:cNvSpPr/>
-          <p:nvPr/>
-        </p:nvSpPr>
-        <p:spPr>
-          <a:xfrm>
-            <a:off x="4800600" y="1600200"/>
             <a:ext cx="3657600" cy="1188720"/>
           </a:xfrm>
           <a:prstGeom prst="rect">
@@ -15133,13 +14688,13 @@
       </p:sp>
       <p:sp>
         <p:nvSpPr>
-          <p:cNvPr id="14" name="Shape 12"/>
-          <p:cNvSpPr/>
-          <p:nvPr/>
-        </p:nvSpPr>
-        <p:spPr>
-          <a:xfrm>
-            <a:off x="457200" y="3017520"/>
+          <p:cNvPr id="10" name="Shape 8"/>
+          <p:cNvSpPr/>
+          <p:nvPr/>
+        </p:nvSpPr>
+        <p:spPr>
+          <a:xfrm>
+            <a:off x="4663440" y="1234440"/>
             <a:ext cx="3977640" cy="1600200"/>
           </a:xfrm>
           <a:prstGeom prst="rect">
@@ -15160,13 +14715,13 @@
       </p:sp>
       <p:sp>
         <p:nvSpPr>
-          <p:cNvPr id="15" name="Shape 13"/>
-          <p:cNvSpPr/>
-          <p:nvPr/>
-        </p:nvSpPr>
-        <p:spPr>
-          <a:xfrm>
-            <a:off x="457200" y="3017520"/>
+          <p:cNvPr id="11" name="Shape 9"/>
+          <p:cNvSpPr/>
+          <p:nvPr/>
+        </p:nvSpPr>
+        <p:spPr>
+          <a:xfrm>
+            <a:off x="4663440" y="1234440"/>
             <a:ext cx="54864" cy="1600200"/>
           </a:xfrm>
           <a:prstGeom prst="rect">
@@ -15180,13 +14735,13 @@
       </p:sp>
       <p:sp>
         <p:nvSpPr>
-          <p:cNvPr id="16" name="Text 14"/>
-          <p:cNvSpPr/>
-          <p:nvPr/>
-        </p:nvSpPr>
-        <p:spPr>
-          <a:xfrm>
-            <a:off x="594360" y="3063240"/>
+          <p:cNvPr id="12" name="Text 10"/>
+          <p:cNvSpPr/>
+          <p:nvPr/>
+        </p:nvSpPr>
+        <p:spPr>
+          <a:xfrm>
+            <a:off x="4800600" y="1280160"/>
             <a:ext cx="3657600" cy="320040"/>
           </a:xfrm>
           <a:prstGeom prst="rect">
@@ -15219,13 +14774,13 @@
       </p:sp>
       <p:sp>
         <p:nvSpPr>
-          <p:cNvPr id="17" name="Text 15"/>
-          <p:cNvSpPr/>
-          <p:nvPr/>
-        </p:nvSpPr>
-        <p:spPr>
-          <a:xfrm>
-            <a:off x="594360" y="3383280"/>
+          <p:cNvPr id="13" name="Text 11"/>
+          <p:cNvSpPr/>
+          <p:nvPr/>
+        </p:nvSpPr>
+        <p:spPr>
+          <a:xfrm>
+            <a:off x="4800600" y="1600200"/>
             <a:ext cx="3657600" cy="1188720"/>
           </a:xfrm>
           <a:prstGeom prst="rect">
@@ -15297,6 +14852,177 @@
                 <a:cs typeface="Arial" pitchFamily="34" charset="-120"/>
               </a:rPr>
               <a:t>定期的なCS研修の実施</a:t>
+            </a:r>
+            <a:endParaRPr lang="en-US" sz="900" dirty="0"/>
+          </a:p>
+        </p:txBody>
+      </p:sp>
+      <p:sp>
+        <p:nvSpPr>
+          <p:cNvPr id="14" name="Shape 12"/>
+          <p:cNvSpPr/>
+          <p:nvPr/>
+        </p:nvSpPr>
+        <p:spPr>
+          <a:xfrm>
+            <a:off x="457200" y="3017520"/>
+            <a:ext cx="3977640" cy="1600200"/>
+          </a:xfrm>
+          <a:prstGeom prst="rect">
+            <a:avLst/>
+          </a:prstGeom>
+          <a:solidFill>
+            <a:srgbClr val="FFFFFF"/>
+          </a:solidFill>
+          <a:ln/>
+          <a:effectLst>
+            <a:outerShdw sx="100000" sy="100000" kx="0" ky="0" algn="bl" rotWithShape="0" blurRad="50800" dist="25400" dir="8100000">
+              <a:srgbClr val="000000">
+                <a:alpha val="10000"/>
+              </a:srgbClr>
+            </a:outerShdw>
+          </a:effectLst>
+        </p:spPr>
+      </p:sp>
+      <p:sp>
+        <p:nvSpPr>
+          <p:cNvPr id="15" name="Shape 13"/>
+          <p:cNvSpPr/>
+          <p:nvPr/>
+        </p:nvSpPr>
+        <p:spPr>
+          <a:xfrm>
+            <a:off x="457200" y="3017520"/>
+            <a:ext cx="54864" cy="1600200"/>
+          </a:xfrm>
+          <a:prstGeom prst="rect">
+            <a:avLst/>
+          </a:prstGeom>
+          <a:solidFill>
+            <a:srgbClr val="3B7DD8"/>
+          </a:solidFill>
+          <a:ln/>
+        </p:spPr>
+      </p:sp>
+      <p:sp>
+        <p:nvSpPr>
+          <p:cNvPr id="16" name="Text 14"/>
+          <p:cNvSpPr/>
+          <p:nvPr/>
+        </p:nvSpPr>
+        <p:spPr>
+          <a:xfrm>
+            <a:off x="594360" y="3063240"/>
+            <a:ext cx="3657600" cy="320040"/>
+          </a:xfrm>
+          <a:prstGeom prst="rect">
+            <a:avLst/>
+          </a:prstGeom>
+          <a:noFill/>
+          <a:ln/>
+        </p:spPr>
+        <p:txBody>
+          <a:bodyPr wrap="square" lIns="0" tIns="0" rIns="0" bIns="0" rtlCol="0" anchor="ctr"/>
+          <a:lstStyle/>
+          <a:p>
+            <a:pPr indent="0" marL="0">
+              <a:buNone/>
+            </a:pPr>
+            <a:r>
+              <a:rPr lang="en-US" sz="1200" b="1" dirty="0">
+                <a:solidFill>
+                  <a:srgbClr val="1A2744"/>
+                </a:solidFill>
+                <a:latin typeface="Arial" pitchFamily="34" charset="0"/>
+                <a:ea typeface="Arial" pitchFamily="34" charset="-122"/>
+                <a:cs typeface="Arial" pitchFamily="34" charset="-120"/>
+              </a:rPr>
+              <a:t>ゲストコミュニケーションの強化</a:t>
+            </a:r>
+            <a:endParaRPr lang="en-US" sz="1200" dirty="0"/>
+          </a:p>
+        </p:txBody>
+      </p:sp>
+      <p:sp>
+        <p:nvSpPr>
+          <p:cNvPr id="17" name="Text 15"/>
+          <p:cNvSpPr/>
+          <p:nvPr/>
+        </p:nvSpPr>
+        <p:spPr>
+          <a:xfrm>
+            <a:off x="594360" y="3383280"/>
+            <a:ext cx="3657600" cy="1188720"/>
+          </a:xfrm>
+          <a:prstGeom prst="rect">
+            <a:avLst/>
+          </a:prstGeom>
+          <a:noFill/>
+          <a:ln/>
+        </p:spPr>
+        <p:txBody>
+          <a:bodyPr wrap="square" lIns="0" tIns="0" rIns="0" bIns="0" rtlCol="0" anchor="ctr"/>
+          <a:lstStyle/>
+          <a:p>
+            <a:pPr marL="342900" indent="-342900">
+              <a:spcAft>
+                <a:spcPts val="300"/>
+              </a:spcAft>
+              <a:buSzPct val="100000"/>
+              <a:buChar char="•"/>
+            </a:pPr>
+            <a:r>
+              <a:rPr lang="en-US" sz="900" dirty="0">
+                <a:solidFill>
+                  <a:srgbClr val="334155"/>
+                </a:solidFill>
+                <a:latin typeface="Arial" pitchFamily="34" charset="0"/>
+                <a:ea typeface="Arial" pitchFamily="34" charset="-122"/>
+                <a:cs typeface="Arial" pitchFamily="34" charset="-120"/>
+              </a:rPr>
+              <a:t>チェックイン時の挨拶・案内の標準化</a:t>
+            </a:r>
+            <a:endParaRPr lang="en-US" sz="900" dirty="0"/>
+          </a:p>
+          <a:p>
+            <a:pPr marL="342900" indent="-342900">
+              <a:spcAft>
+                <a:spcPts val="300"/>
+              </a:spcAft>
+              <a:buSzPct val="100000"/>
+              <a:buChar char="•"/>
+            </a:pPr>
+            <a:r>
+              <a:rPr lang="en-US" sz="900" dirty="0">
+                <a:solidFill>
+                  <a:srgbClr val="334155"/>
+                </a:solidFill>
+                <a:latin typeface="Arial" pitchFamily="34" charset="0"/>
+                <a:ea typeface="Arial" pitchFamily="34" charset="-122"/>
+                <a:cs typeface="Arial" pitchFamily="34" charset="-120"/>
+              </a:rPr>
+              <a:t>チェックアウト時の簡易アンケート実施</a:t>
+            </a:r>
+            <a:endParaRPr lang="en-US" sz="900" dirty="0"/>
+          </a:p>
+          <a:p>
+            <a:pPr marL="342900" indent="-342900">
+              <a:spcAft>
+                <a:spcPts val="300"/>
+              </a:spcAft>
+              <a:buSzPct val="100000"/>
+              <a:buChar char="•"/>
+            </a:pPr>
+            <a:r>
+              <a:rPr lang="en-US" sz="900" dirty="0">
+                <a:solidFill>
+                  <a:srgbClr val="334155"/>
+                </a:solidFill>
+                <a:latin typeface="Arial" pitchFamily="34" charset="0"/>
+                <a:ea typeface="Arial" pitchFamily="34" charset="-122"/>
+                <a:cs typeface="Arial" pitchFamily="34" charset="-120"/>
+              </a:rPr>
+              <a:t>リピーターへの感謝メッセージの導入</a:t>
             </a:r>
             <a:endParaRPr lang="en-US" sz="900" dirty="0"/>
           </a:p>

--- a/納品レポート/ホテル別レポート/daiwa_osaki_口コミ分析レポート.pptx
+++ b/納品レポート/ホテル別レポート/daiwa_osaki_口コミ分析レポート.pptx
@@ -2750,7 +2750,7 @@
                 <a:ea typeface="Arial" pitchFamily="34" charset="-122"/>
                 <a:cs typeface="Arial" pitchFamily="34" charset="-120"/>
               </a:rPr>
-              <a:t>作成日：2026年4月6日</a:t>
+              <a:t>作成日：2026年4月7日</a:t>
             </a:r>
             <a:endParaRPr lang="en-US" sz="1000" dirty="0"/>
           </a:p>

--- a/納品レポート/ホテル別レポート/daiwa_osaki_口コミ分析レポート.pptx
+++ b/納品レポート/ホテル別レポート/daiwa_osaki_口コミ分析レポート.pptx
@@ -2750,7 +2750,7 @@
                 <a:ea typeface="Arial" pitchFamily="34" charset="-122"/>
                 <a:cs typeface="Arial" pitchFamily="34" charset="-120"/>
               </a:rPr>
-              <a:t>作成日：2026年4月7日</a:t>
+              <a:t>作成日：2026年4月8日</a:t>
             </a:r>
             <a:endParaRPr lang="en-US" sz="1000" dirty="0"/>
           </a:p>

--- a/納品レポート/ホテル別レポート/daiwa_osaki_口コミ分析レポート.pptx
+++ b/納品レポート/ホテル別レポート/daiwa_osaki_口コミ分析レポート.pptx
@@ -2750,7 +2750,7 @@
                 <a:ea typeface="Arial" pitchFamily="34" charset="-122"/>
                 <a:cs typeface="Arial" pitchFamily="34" charset="-120"/>
               </a:rPr>
-              <a:t>作成日：2026年4月10日</a:t>
+              <a:t>作成日：2026年4月11日</a:t>
             </a:r>
             <a:endParaRPr lang="en-US" sz="1000" dirty="0"/>
           </a:p>

--- a/納品レポート/ホテル別レポート/daiwa_osaki_口コミ分析レポート.pptx
+++ b/納品レポート/ホテル別レポート/daiwa_osaki_口コミ分析レポート.pptx
@@ -2750,7 +2750,7 @@
                 <a:ea typeface="Arial" pitchFamily="34" charset="-122"/>
                 <a:cs typeface="Arial" pitchFamily="34" charset="-120"/>
               </a:rPr>
-              <a:t>作成日：2026年4月11日</a:t>
+              <a:t>作成日：2026年4月13日</a:t>
             </a:r>
             <a:endParaRPr lang="en-US" sz="1000" dirty="0"/>
           </a:p>

--- a/納品レポート/ホテル別レポート/daiwa_osaki_口コミ分析レポート.pptx
+++ b/納品レポート/ホテル別レポート/daiwa_osaki_口コミ分析レポート.pptx
@@ -2750,7 +2750,7 @@
                 <a:ea typeface="Arial" pitchFamily="34" charset="-122"/>
                 <a:cs typeface="Arial" pitchFamily="34" charset="-120"/>
               </a:rPr>
-              <a:t>作成日：2026年4月13日</a:t>
+              <a:t>作成日：2026年4月15日</a:t>
             </a:r>
             <a:endParaRPr lang="en-US" sz="1000" dirty="0"/>
           </a:p>

--- a/納品レポート/ホテル別レポート/daiwa_osaki_口コミ分析レポート.pptx
+++ b/納品レポート/ホテル別レポート/daiwa_osaki_口コミ分析レポート.pptx
@@ -2750,7 +2750,7 @@
                 <a:ea typeface="Arial" pitchFamily="34" charset="-122"/>
                 <a:cs typeface="Arial" pitchFamily="34" charset="-120"/>
               </a:rPr>
-              <a:t>作成日：2026年4月16日</a:t>
+              <a:t>作成日：2026年4月20日</a:t>
             </a:r>
             <a:endParaRPr lang="en-US" sz="1000" dirty="0"/>
           </a:p>

--- a/納品レポート/ホテル別レポート/daiwa_osaki_口コミ分析レポート.pptx
+++ b/納品レポート/ホテル別レポート/daiwa_osaki_口コミ分析レポート.pptx
@@ -2668,7 +2668,7 @@
                 <a:ea typeface="Arial" pitchFamily="34" charset="-122"/>
                 <a:cs typeface="Arial" pitchFamily="34" charset="-120"/>
               </a:rPr>
-              <a:t>ダイワロイネットホテル東京大崎</a:t>
+              <a:t>ダイワロイネットホテル大崎</a:t>
             </a:r>
             <a:endParaRPr lang="en-US" sz="1600" dirty="0"/>
           </a:p>
@@ -2750,7 +2750,7 @@
                 <a:ea typeface="Arial" pitchFamily="34" charset="-122"/>
                 <a:cs typeface="Arial" pitchFamily="34" charset="-120"/>
               </a:rPr>
-              <a:t>作成日：2026年4月20日</a:t>
+              <a:t>作成日：2026年4月21日</a:t>
             </a:r>
             <a:endParaRPr lang="en-US" sz="1000" dirty="0"/>
           </a:p>

--- a/納品レポート/ホテル別レポート/daiwa_osaki_口コミ分析レポート.pptx
+++ b/納品レポート/ホテル別レポート/daiwa_osaki_口コミ分析レポート.pptx
@@ -2668,7 +2668,7 @@
                 <a:ea typeface="Arial" pitchFamily="34" charset="-122"/>
                 <a:cs typeface="Arial" pitchFamily="34" charset="-120"/>
               </a:rPr>
-              <a:t>ダイワロイネットホテル大崎</a:t>
+              <a:t>ダイワロイネットホテル東京大崎</a:t>
             </a:r>
             <a:endParaRPr lang="en-US" sz="1600" dirty="0"/>
           </a:p>
@@ -2750,7 +2750,7 @@
                 <a:ea typeface="Arial" pitchFamily="34" charset="-122"/>
                 <a:cs typeface="Arial" pitchFamily="34" charset="-120"/>
               </a:rPr>
-              <a:t>作成日：2026年4月21日</a:t>
+              <a:t>作成日：2026年4月22日</a:t>
             </a:r>
             <a:endParaRPr lang="en-US" sz="1000" dirty="0"/>
           </a:p>
